--- a/docs/presentation.pptx
+++ b/docs/presentation.pptx
@@ -13,9 +13,6 @@
     <p:sldId id="261" r:id="rId13"/>
     <p:sldId id="262" r:id="rId14"/>
     <p:sldId id="263" r:id="rId15"/>
-    <p:sldId id="264" r:id="rId16"/>
-    <p:sldId id="265" r:id="rId17"/>
-    <p:sldId id="266" r:id="rId18"/>
   </p:sldIdLst>
   <p:sldSz cx="12191695" cy="6858000" type="screen4x3"/>
   <p:notesSz cx="6858000" cy="9144000"/>
@@ -537,146 +534,6 @@
 </p:notes>
 </file>
 
-<file path=ppt/notesSlides/notesSlide10.xml><?xml version="1.0" encoding="utf-8"?>
-<p:notes xmlns:a="http://schemas.openxmlformats.org/drawingml/2006/main" xmlns:p="http://schemas.openxmlformats.org/presentationml/2006/main" xmlns:r="http://schemas.openxmlformats.org/officeDocument/2006/relationships">
-  <p:cSld>
-    <p:spTree>
-      <p:nvGrpSpPr>
-        <p:cNvPr id="1" name=""/>
-        <p:cNvGrpSpPr/>
-        <p:nvPr/>
-      </p:nvGrpSpPr>
-      <p:grpSpPr>
-        <a:xfrm>
-          <a:off x="0" y="0"/>
-          <a:ext cx="0" cy="0"/>
-          <a:chOff x="0" y="0"/>
-          <a:chExt cx="0" cy="0"/>
-        </a:xfrm>
-      </p:grpSpPr>
-      <p:sp>
-        <p:nvSpPr>
-          <p:cNvPr id="2" name="Slide Image Placeholder 1"/>
-          <p:cNvSpPr>
-            <a:spLocks noGrp="1"/>
-          </p:cNvSpPr>
-          <p:nvPr>
-            <p:ph type="sldImg" idx="2"/>
-          </p:nvPr>
-        </p:nvSpPr>
-        <p:spPr/>
-      </p:sp>
-      <p:sp>
-        <p:nvSpPr>
-          <p:cNvPr id="3" name="Notes Placeholder 2"/>
-          <p:cNvSpPr>
-            <a:spLocks noGrp="1"/>
-          </p:cNvSpPr>
-          <p:nvPr>
-            <p:ph type="body" idx="3" sz="quarter"/>
-          </p:nvPr>
-        </p:nvSpPr>
-        <p:spPr/>
-        <p:txBody>
-          <a:bodyPr/>
-          <a:lstStyle/>
-          <a:p>
-            <a:r>
-              <a:t>Scope was 4-6 hours; a narrow thing that runs plus a clear list of what was cut.</a:t>
-            </a:r>
-          </a:p>
-        </p:txBody>
-      </p:sp>
-      <p:sp>
-        <p:nvSpPr>
-          <p:cNvPr id="4" name="Slide Number Placeholder 3"/>
-          <p:cNvSpPr>
-            <a:spLocks noGrp="1"/>
-          </p:cNvSpPr>
-          <p:nvPr>
-            <p:ph type="sldNum" idx="5" sz="quarter"/>
-          </p:nvPr>
-        </p:nvSpPr>
-        <p:spPr/>
-      </p:sp>
-    </p:spTree>
-  </p:cSld>
-  <p:clrMapOvr>
-    <a:masterClrMapping/>
-  </p:clrMapOvr>
-</p:notes>
-</file>
-
-<file path=ppt/notesSlides/notesSlide11.xml><?xml version="1.0" encoding="utf-8"?>
-<p:notes xmlns:a="http://schemas.openxmlformats.org/drawingml/2006/main" xmlns:p="http://schemas.openxmlformats.org/presentationml/2006/main" xmlns:r="http://schemas.openxmlformats.org/officeDocument/2006/relationships">
-  <p:cSld>
-    <p:spTree>
-      <p:nvGrpSpPr>
-        <p:cNvPr id="1" name=""/>
-        <p:cNvGrpSpPr/>
-        <p:nvPr/>
-      </p:nvGrpSpPr>
-      <p:grpSpPr>
-        <a:xfrm>
-          <a:off x="0" y="0"/>
-          <a:ext cx="0" cy="0"/>
-          <a:chOff x="0" y="0"/>
-          <a:chExt cx="0" cy="0"/>
-        </a:xfrm>
-      </p:grpSpPr>
-      <p:sp>
-        <p:nvSpPr>
-          <p:cNvPr id="2" name="Slide Image Placeholder 1"/>
-          <p:cNvSpPr>
-            <a:spLocks noGrp="1"/>
-          </p:cNvSpPr>
-          <p:nvPr>
-            <p:ph type="sldImg" idx="2"/>
-          </p:nvPr>
-        </p:nvSpPr>
-        <p:spPr/>
-      </p:sp>
-      <p:sp>
-        <p:nvSpPr>
-          <p:cNvPr id="3" name="Notes Placeholder 2"/>
-          <p:cNvSpPr>
-            <a:spLocks noGrp="1"/>
-          </p:cNvSpPr>
-          <p:nvPr>
-            <p:ph type="body" idx="3" sz="quarter"/>
-          </p:nvPr>
-        </p:nvSpPr>
-        <p:spPr/>
-        <p:txBody>
-          <a:bodyPr/>
-          <a:lstStyle/>
-          <a:p>
-            <a:r>
-              <a:t>Everything regenerates from the repo: scripts/eda.py, refund-agent backtest, scripts/eval_extractor.py, scripts/build_slides.py.</a:t>
-            </a:r>
-          </a:p>
-        </p:txBody>
-      </p:sp>
-      <p:sp>
-        <p:nvSpPr>
-          <p:cNvPr id="4" name="Slide Number Placeholder 3"/>
-          <p:cNvSpPr>
-            <a:spLocks noGrp="1"/>
-          </p:cNvSpPr>
-          <p:nvPr>
-            <p:ph type="sldNum" idx="5" sz="quarter"/>
-          </p:nvPr>
-        </p:nvSpPr>
-        <p:spPr/>
-      </p:sp>
-    </p:spTree>
-  </p:cSld>
-  <p:clrMapOvr>
-    <a:masterClrMapping/>
-  </p:clrMapOvr>
-</p:notes>
-</file>
-
 <file path=ppt/notesSlides/notesSlide2.xml><?xml version="1.0" encoding="utf-8"?>
 <p:notes xmlns:a="http://schemas.openxmlformats.org/drawingml/2006/main" xmlns:p="http://schemas.openxmlformats.org/presentationml/2006/main" xmlns:r="http://schemas.openxmlformats.org/officeDocument/2006/relationships">
   <p:cSld>
@@ -722,7 +579,7 @@
           <a:lstStyle/>
           <a:p>
             <a:r>
-              <a:t>Numbers from docs/eda/findings.md sections 2 to 6: the old rule reverse-engineered, reviewer minutes by band, bad outcomes, decisions against policy.</a:t>
+              <a:t>Figure and numbers from docs/eda/findings.md sections 3 to 6; scripts/eda.py reverse-engineers the old rule as the tightest box around every auto-decided request.</a:t>
             </a:r>
           </a:p>
         </p:txBody>
@@ -792,7 +649,7 @@
           <a:lstStyle/>
           <a:p>
             <a:r>
-              <a:t>The flow is src/data/normalize.py -&gt; src/policy/engine.py -&gt; src/queue.py; the model is only called from the extractor. Screens are app/pages; the test is refund-agent backtest.</a:t>
+              <a:t>Rules: policies/v1.json, each with the policy note it comes from. Cap table and chargeback figure: docs/eda/findings.md section 8 and refund-agent backtest.</a:t>
             </a:r>
           </a:p>
         </p:txBody>
@@ -862,7 +719,7 @@
           <a:lstStyle/>
           <a:p>
             <a:r>
-              <a:t>Left column from findings.md sections 2 to 6; right column from the backtest ('The line') and the two screens. Slides 5 to 7 give the detail behind each row.</a:t>
+              <a:t>The flow is src/data/normalize.py -&gt; src/policy/engine.py -&gt; src/queue.py; the model is only called from the extractor. Screens are app/pages; the test is refund-agent backtest.</a:t>
             </a:r>
           </a:p>
         </p:txBody>
@@ -932,7 +789,7 @@
           <a:lstStyle/>
           <a:p>
             <a:r>
-              <a:t>The rules live in policies/v1.json: a list of yes/no questions about the notes and an ordered list of rules. First matching rule wins.</a:t>
+              <a:t>Left column from findings.md sections 2 to 6; right column from the backtest ('The line') and the two screens. Slides 5 to 7 give the detail behind each row.</a:t>
             </a:r>
           </a:p>
         </p:txBody>
@@ -1002,7 +859,7 @@
           <a:lstStyle/>
           <a:p>
             <a:r>
-              <a:t>Numbers from docs/eda/findings.md, section 'The line', generated by refund-agent backtest.</a:t>
+              <a:t>Baselines come from the replay: about $450 per week approved automatically over 11 weeks of history.</a:t>
             </a:r>
           </a:p>
         </p:txBody>
@@ -1072,7 +929,7 @@
           <a:lstStyle/>
           <a:p>
             <a:r>
-              <a:t>Nothing on these screens is a mock: they call the same engine and logs as the command line.</a:t>
+              <a:t>Checked on 205 notes labelled by hand; details and every mismatch in docs/eda/extractor_eval.md.</a:t>
             </a:r>
           </a:p>
         </p:txBody>
@@ -1142,77 +999,7 @@
           <a:lstStyle/>
           <a:p>
             <a:r>
-              <a:t>Baselines come from the replay: about $450 per week approved automatically over 11 weeks of history.</a:t>
-            </a:r>
-          </a:p>
-        </p:txBody>
-      </p:sp>
-      <p:sp>
-        <p:nvSpPr>
-          <p:cNvPr id="4" name="Slide Number Placeholder 3"/>
-          <p:cNvSpPr>
-            <a:spLocks noGrp="1"/>
-          </p:cNvSpPr>
-          <p:nvPr>
-            <p:ph type="sldNum" idx="5" sz="quarter"/>
-          </p:nvPr>
-        </p:nvSpPr>
-        <p:spPr/>
-      </p:sp>
-    </p:spTree>
-  </p:cSld>
-  <p:clrMapOvr>
-    <a:masterClrMapping/>
-  </p:clrMapOvr>
-</p:notes>
-</file>
-
-<file path=ppt/notesSlides/notesSlide9.xml><?xml version="1.0" encoding="utf-8"?>
-<p:notes xmlns:a="http://schemas.openxmlformats.org/drawingml/2006/main" xmlns:p="http://schemas.openxmlformats.org/presentationml/2006/main" xmlns:r="http://schemas.openxmlformats.org/officeDocument/2006/relationships">
-  <p:cSld>
-    <p:spTree>
-      <p:nvGrpSpPr>
-        <p:cNvPr id="1" name=""/>
-        <p:cNvGrpSpPr/>
-        <p:nvPr/>
-      </p:nvGrpSpPr>
-      <p:grpSpPr>
-        <a:xfrm>
-          <a:off x="0" y="0"/>
-          <a:ext cx="0" cy="0"/>
-          <a:chOff x="0" y="0"/>
-          <a:chExt cx="0" cy="0"/>
-        </a:xfrm>
-      </p:grpSpPr>
-      <p:sp>
-        <p:nvSpPr>
-          <p:cNvPr id="2" name="Slide Image Placeholder 1"/>
-          <p:cNvSpPr>
-            <a:spLocks noGrp="1"/>
-          </p:cNvSpPr>
-          <p:nvPr>
-            <p:ph type="sldImg" idx="2"/>
-          </p:nvPr>
-        </p:nvSpPr>
-        <p:spPr/>
-      </p:sp>
-      <p:sp>
-        <p:nvSpPr>
-          <p:cNvPr id="3" name="Notes Placeholder 2"/>
-          <p:cNvSpPr>
-            <a:spLocks noGrp="1"/>
-          </p:cNvSpPr>
-          <p:nvPr>
-            <p:ph type="body" idx="3" sz="quarter"/>
-          </p:nvPr>
-        </p:nvSpPr>
-        <p:spPr/>
-        <p:txBody>
-          <a:bodyPr/>
-          <a:lstStyle/>
-          <a:p>
-            <a:r>
-              <a:t>Checked on 205 notes labelled by hand; details and every mismatch in docs/eda/extractor_eval.md.</a:t>
+              <a:t>Scope was 4-6 hours; a narrow thing that runs plus a clear list of what was cut.</a:t>
             </a:r>
           </a:p>
         </p:txBody>
@@ -4954,7 +4741,7 @@
 </p:sld>
 </file>
 
-<file path=ppt/slides/slide10.xml><?xml version="1.0" encoding="utf-8"?>
+<file path=ppt/slides/slide2.xml><?xml version="1.0" encoding="utf-8"?>
 <p:sld xmlns:a="http://schemas.openxmlformats.org/drawingml/2006/main" xmlns:p="http://schemas.openxmlformats.org/presentationml/2006/main" xmlns:r="http://schemas.openxmlformats.org/officeDocument/2006/relationships">
   <p:cSld>
     <p:spTree>
@@ -4998,21 +4785,100 @@
                 </a:solidFill>
                 <a:latin typeface="Cambria"/>
               </a:rPr>
-              <a:t>What was left out, and what comes next</a:t>
-            </a:r>
-          </a:p>
-        </p:txBody>
-      </p:sp>
-      <p:sp>
-        <p:nvSpPr>
-          <p:cNvPr id="3" name="Rounded Rectangle 2"/>
+              <a:t>Today's line, read off the data</a:t>
+            </a:r>
+          </a:p>
+        </p:txBody>
+      </p:sp>
+      <p:pic>
+        <p:nvPicPr>
+          <p:cNvPr id="3" name="Picture 2" descr="fig3_old_rule_boundary.png"/>
+          <p:cNvPicPr>
+            <a:picLocks noChangeAspect="1"/>
+          </p:cNvPicPr>
+          <p:nvPr/>
+        </p:nvPicPr>
+        <p:blipFill>
+          <a:blip r:embed="rId2"/>
+          <a:stretch>
+            <a:fillRect/>
+          </a:stretch>
+        </p:blipFill>
+        <p:spPr>
+          <a:xfrm>
+            <a:off x="548640" y="1234440"/>
+            <a:ext cx="7040880" cy="3520440"/>
+          </a:xfrm>
+          <a:prstGeom prst="rect">
+            <a:avLst/>
+          </a:prstGeom>
+        </p:spPr>
+      </p:pic>
+      <p:sp>
+        <p:nvSpPr>
+          <p:cNvPr id="4" name="TextBox 3"/>
+          <p:cNvSpPr txBox="1"/>
+          <p:nvPr/>
+        </p:nvSpPr>
+        <p:spPr>
+          <a:xfrm>
+            <a:off x="548640" y="4892040"/>
+            <a:ext cx="7040880" cy="1508760"/>
+          </a:xfrm>
+          <a:prstGeom prst="rect">
+            <a:avLst/>
+          </a:prstGeom>
+          <a:noFill/>
+        </p:spPr>
+        <p:txBody>
+          <a:bodyPr wrap="square" anchor="t" lIns="45720" rIns="45720" tIns="27432" bIns="27432">
+            <a:spAutoFit/>
+          </a:bodyPr>
+          <a:lstStyle/>
+          <a:p>
+            <a:pPr algn="l">
+              <a:spcAft>
+                <a:spcPts val="400"/>
+              </a:spcAft>
+            </a:pPr>
+            <a:r>
+              <a:rPr sz="1400" b="1">
+                <a:solidFill>
+                  <a:srgbClr val="E4573D"/>
+                </a:solidFill>
+                <a:latin typeface="Cambria"/>
+              </a:rPr>
+              <a:t>Where it breaks</a:t>
+            </a:r>
+          </a:p>
+          <a:p>
+            <a:pPr algn="l">
+              <a:spcAft>
+                <a:spcPts val="600"/>
+              </a:spcAft>
+            </a:pPr>
+            <a:r>
+              <a:rPr sz="1200" b="0">
+                <a:solidFill>
+                  <a:srgbClr val="6B6B6B"/>
+                </a:solidFill>
+                <a:latin typeface="Calibri"/>
+              </a:rPr>
+              <a:t>Everything the rule does not take sits in one queue: the $495 fraud case next to the $20 shirt. 3 fraud-flagged requests were approved without asking the fraud team; 2 of them charged back. 10 decisions went against the manager's own notes. 3 rejections were overturned on appeal; one of those customers closed the account.</a:t>
+            </a:r>
+          </a:p>
+        </p:txBody>
+      </p:sp>
+      <p:sp>
+        <p:nvSpPr>
+          <p:cNvPr id="5" name="Rounded Rectangle 4"/>
           <p:cNvSpPr/>
           <p:nvPr/>
         </p:nvSpPr>
         <p:spPr>
           <a:xfrm>
-            <a:off x="548640" y="1234440"/>
-            <a:ext cx="5440680" cy="5120640"/>
+            <a:off x="7863840" y="1234440"/>
+            <a:ext cx="3779215" cy="5120640"/>
           </a:xfrm>
           <a:prstGeom prst="roundRect">
             <a:avLst/>
@@ -5049,14 +4915,14 @@
       </p:sp>
       <p:sp>
         <p:nvSpPr>
-          <p:cNvPr id="4" name="TextBox 3"/>
+          <p:cNvPr id="6" name="TextBox 5"/>
           <p:cNvSpPr txBox="1"/>
           <p:nvPr/>
         </p:nvSpPr>
         <p:spPr>
           <a:xfrm>
-            <a:off x="777240" y="1371600"/>
-            <a:ext cx="4983480" cy="411480"/>
+            <a:off x="8092440" y="1371600"/>
+            <a:ext cx="3322015" cy="411480"/>
           </a:xfrm>
           <a:prstGeom prst="rect">
             <a:avLst/>
@@ -5081,21 +4947,21 @@
                 </a:solidFill>
                 <a:latin typeface="Cambria"/>
               </a:rPr>
-              <a:t>Left out on purpose</a:t>
-            </a:r>
-          </a:p>
-        </p:txBody>
-      </p:sp>
-      <p:sp>
-        <p:nvSpPr>
-          <p:cNvPr id="5" name="TextBox 4"/>
+              <a:t>What we read off it</a:t>
+            </a:r>
+          </a:p>
+        </p:txBody>
+      </p:sp>
+      <p:sp>
+        <p:nvSpPr>
+          <p:cNvPr id="7" name="TextBox 6"/>
           <p:cNvSpPr txBox="1"/>
           <p:nvPr/>
         </p:nvSpPr>
         <p:spPr>
           <a:xfrm>
-            <a:off x="777240" y="1874519"/>
-            <a:ext cx="4983480" cy="4343400"/>
+            <a:off x="8092440" y="1874519"/>
+            <a:ext cx="3322015" cy="4343400"/>
           </a:xfrm>
           <a:prstGeom prst="rect">
             <a:avLst/>
@@ -5120,7 +4986,7 @@
                 </a:solidFill>
                 <a:latin typeface="Calibri"/>
               </a:rPr>
-              <a:t>•  Login, hosting, real payments, a real fraud-team workflow, a database, notifications.</a:t>
+              <a:t>•  Nobody wrote the old rule down, so we found it in 248 past decisions: every automatic approval is $54 or less, from an account 9 months or older, with no earlier refund.</a:t>
             </a:r>
           </a:p>
           <a:p>
@@ -5136,7 +5002,7 @@
                 </a:solidFill>
                 <a:latin typeface="Calibri"/>
               </a:rPr>
-              <a:t>•  Editing an existing rule in place: today it is done by sentence, or by switching one rule off and adding another.</a:t>
+              <a:t>•  It reads nothing: not the reason, not the notes, not the fraud flag beyond 'not yes'.</a:t>
             </a:r>
           </a:p>
           <a:p>
@@ -5152,115 +5018,9 @@
                 </a:solidFill>
                 <a:latin typeface="Calibri"/>
               </a:rPr>
-              <a:t>•  Approval rules sit below the guard rules by default; moving one up is possible, and the red list in the dry run is the safety net.</a:t>
-            </a:r>
-          </a:p>
-        </p:txBody>
-      </p:sp>
-      <p:sp>
-        <p:nvSpPr>
-          <p:cNvPr id="6" name="Rounded Rectangle 5"/>
-          <p:cNvSpPr/>
-          <p:nvPr/>
-        </p:nvSpPr>
-        <p:spPr>
-          <a:xfrm>
-            <a:off x="6217920" y="1234440"/>
-            <a:ext cx="5440680" cy="5120640"/>
-          </a:xfrm>
-          <a:prstGeom prst="roundRect">
-            <a:avLst/>
-          </a:prstGeom>
-          <a:solidFill>
-            <a:srgbClr val="F1EDE4"/>
-          </a:solidFill>
-          <a:ln>
-            <a:noFill/>
-          </a:ln>
-          <a:effectLst/>
-        </p:spPr>
-        <p:style>
-          <a:lnRef idx="1">
-            <a:schemeClr val="accent1"/>
-          </a:lnRef>
-          <a:fillRef idx="3">
-            <a:schemeClr val="accent1"/>
-          </a:fillRef>
-          <a:effectRef idx="2">
-            <a:schemeClr val="accent1"/>
-          </a:effectRef>
-          <a:fontRef idx="minor">
-            <a:schemeClr val="lt1"/>
-          </a:fontRef>
-        </p:style>
-        <p:txBody>
-          <a:bodyPr rtlCol="0" anchor="ctr"/>
-          <a:lstStyle/>
-          <a:p>
-            <a:pPr algn="ctr"/>
-          </a:p>
-        </p:txBody>
-      </p:sp>
-      <p:sp>
-        <p:nvSpPr>
-          <p:cNvPr id="7" name="TextBox 6"/>
-          <p:cNvSpPr txBox="1"/>
-          <p:nvPr/>
-        </p:nvSpPr>
-        <p:spPr>
-          <a:xfrm>
-            <a:off x="6446520" y="1371600"/>
-            <a:ext cx="4983480" cy="411480"/>
-          </a:xfrm>
-          <a:prstGeom prst="rect">
-            <a:avLst/>
-          </a:prstGeom>
-          <a:noFill/>
-        </p:spPr>
-        <p:txBody>
-          <a:bodyPr wrap="square" anchor="t" lIns="45720" rIns="45720" tIns="27432" bIns="27432">
-            <a:spAutoFit/>
-          </a:bodyPr>
-          <a:lstStyle/>
-          <a:p>
-            <a:pPr algn="l">
-              <a:spcAft>
-                <a:spcPts val="600"/>
-              </a:spcAft>
-            </a:pPr>
-            <a:r>
-              <a:rPr sz="1600" b="1">
-                <a:solidFill>
-                  <a:srgbClr val="E4573D"/>
-                </a:solidFill>
-                <a:latin typeface="Cambria"/>
-              </a:rPr>
-              <a:t>Next</a:t>
-            </a:r>
-          </a:p>
-        </p:txBody>
-      </p:sp>
-      <p:sp>
-        <p:nvSpPr>
-          <p:cNvPr id="8" name="TextBox 7"/>
-          <p:cNvSpPr txBox="1"/>
-          <p:nvPr/>
-        </p:nvSpPr>
-        <p:spPr>
-          <a:xfrm>
-            <a:off x="6446520" y="1874519"/>
-            <a:ext cx="4983480" cy="4343400"/>
-          </a:xfrm>
-          <a:prstGeom prst="rect">
-            <a:avLst/>
-          </a:prstGeom>
-          <a:noFill/>
-        </p:spPr>
-        <p:txBody>
-          <a:bodyPr wrap="square" anchor="t" lIns="45720" rIns="45720" tIns="27432" bIns="27432">
-            <a:spAutoFit/>
-          </a:bodyPr>
-          <a:lstStyle/>
+              <a:t>•  6 requests inside that box were still decided by a person (3 approved, 3 rejected). Most carry a note, so the rule probably skips anything with free text.</a:t>
+            </a:r>
+          </a:p>
           <a:p>
             <a:pPr algn="l">
               <a:spcAft>
@@ -5274,7 +5034,7 @@
                 </a:solidFill>
                 <a:latin typeface="Calibri"/>
               </a:rPr>
-              <a:t>•  A monitoring page fed by the decision logs: the five weekly numbers, with the rollback lines drawn on.</a:t>
+              <a:t>•  22 small, clean requests fell just outside it because the account was under 9 months old. A person approved 21 of them: the 'two minutes clicking approve'.</a:t>
             </a:r>
           </a:p>
           <a:p>
@@ -5290,55 +5050,7 @@
                 </a:solidFill>
                 <a:latin typeface="Calibri"/>
               </a:rPr>
-              <a:t>•  Re-check a sample of the model's answers every week; alert if a question's accuracy drops.</a:t>
-            </a:r>
-          </a:p>
-          <a:p>
-            <a:pPr algn="l">
-              <a:spcAft>
-                <a:spcPts val="800"/>
-              </a:spcAft>
-            </a:pPr>
-            <a:r>
-              <a:rPr sz="1200" b="0">
-                <a:solidFill>
-                  <a:srgbClr val="1B1B1B"/>
-                </a:solidFill>
-                <a:latin typeface="Calibri"/>
-              </a:rPr>
-              <a:t>•  Make the engine always run guard rules before approval rules, and let one sentence become several changes ('stolen-card cases go straight through' really means: narrow the fraud guard, then add an approval).</a:t>
-            </a:r>
-          </a:p>
-          <a:p>
-            <a:pPr algn="l">
-              <a:spcAft>
-                <a:spcPts val="800"/>
-              </a:spcAft>
-            </a:pPr>
-            <a:r>
-              <a:rPr sz="1200" b="0">
-                <a:solidFill>
-                  <a:srgbClr val="1B1B1B"/>
-                </a:solidFill>
-                <a:latin typeface="Calibri"/>
-              </a:rPr>
-              <a:t>•  Real carrier data for signatures and traces, instead of reading support shorthand.</a:t>
-            </a:r>
-          </a:p>
-          <a:p>
-            <a:pPr algn="l">
-              <a:spcAft>
-                <a:spcPts val="800"/>
-              </a:spcAft>
-            </a:pPr>
-            <a:r>
-              <a:rPr sz="1200" b="0">
-                <a:solidFill>
-                  <a:srgbClr val="1B1B1B"/>
-                </a:solidFill>
-                <a:latin typeface="Calibri"/>
-              </a:rPr>
-              <a:t>•  When a reviewer overrides a routed case, suggest the rule change that would have automated it.</a:t>
+              <a:t>•  111 of 248 requests (45%), but only $3,377, 14% of the money. One of its approvals charged back: $49, with no note to read.</a:t>
             </a:r>
           </a:p>
         </p:txBody>
@@ -5351,7 +5063,7 @@
 </p:sld>
 </file>
 
-<file path=ppt/slides/slide11.xml><?xml version="1.0" encoding="utf-8"?>
+<file path=ppt/slides/slide3.xml><?xml version="1.0" encoding="utf-8"?>
 <p:sld xmlns:a="http://schemas.openxmlformats.org/drawingml/2006/main" xmlns:p="http://schemas.openxmlformats.org/presentationml/2006/main" xmlns:r="http://schemas.openxmlformats.org/officeDocument/2006/relationships">
   <p:cSld>
     <p:spTree>
@@ -5395,7 +5107,7 @@
                 </a:solidFill>
                 <a:latin typeface="Cambria"/>
               </a:rPr>
-              <a:t>Appendix: the data, and what was wrong with it</a:t>
+              <a:t>The new line: her notes set the rules, the data sets the numbers</a:t>
             </a:r>
           </a:p>
         </p:txBody>
@@ -5410,7 +5122,7 @@
         </p:nvGraphicFramePr>
         <p:xfrm>
           <a:off x="548640" y="1234440"/>
-          <a:ext cx="5440680" cy="2340864"/>
+          <a:ext cx="5440680" cy="2048256"/>
         </p:xfrm>
         <a:graphic>
           <a:graphicData uri="http://schemas.openxmlformats.org/drawingml/2006/table">
@@ -5419,9 +5131,8 @@
                 <a:tableStyleId>{5C22544A-7EE6-4342-B048-85BDC9FD1C3A}</a:tableStyleId>
               </a:tblPr>
               <a:tblGrid>
-                <a:gridCol w="2377440"/>
-                <a:gridCol w="1051560"/>
-                <a:gridCol w="2011680"/>
+                <a:gridCol w="2514600"/>
+                <a:gridCol w="2926080"/>
               </a:tblGrid>
               <a:tr h="292608">
                 <a:tc>
@@ -5438,7 +5149,7 @@
                         </a:defRPr>
                       </a:pPr>
                       <a:r>
-                        <a:t>problem in the file</a:t>
+                        <a:t>the manager wrote</a:t>
                       </a:r>
                     </a:p>
                   </a:txBody>
@@ -5462,31 +5173,7 @@
                         </a:defRPr>
                       </a:pPr>
                       <a:r>
-                        <a:t>how many</a:t>
-                      </a:r>
-                    </a:p>
-                  </a:txBody>
-                  <a:tcPr marL="54864" marR="54864" marT="27432" marB="27432">
-                    <a:solidFill>
-                      <a:srgbClr val="0F6E6E"/>
-                    </a:solidFill>
-                  </a:tcPr>
-                </a:tc>
-                <a:tc>
-                  <a:txBody>
-                    <a:bodyPr/>
-                    <a:lstStyle/>
-                    <a:p>
-                      <a:pPr>
-                        <a:defRPr sz="1000" b="1">
-                          <a:solidFill>
-                            <a:srgbClr val="FFFFFF"/>
-                          </a:solidFill>
-                          <a:latin typeface="Calibri"/>
-                        </a:defRPr>
-                      </a:pPr>
-                      <a:r>
-                        <a:t>what we do</a:t>
+                        <a:t>what the rules do</a:t>
                       </a:r>
                     </a:p>
                   </a:txBody>
@@ -5512,7 +5199,7 @@
                         </a:defRPr>
                       </a:pPr>
                       <a:r>
-                        <a:t>same request id twice</a:t>
+                        <a:t>1. small stuff from good customers goes through</a:t>
                       </a:r>
                     </a:p>
                   </a:txBody>
@@ -5536,31 +5223,7 @@
                         </a:defRPr>
                       </a:pPr>
                       <a:r>
-                        <a:t>3 (+1 pending)</a:t>
-                      </a:r>
-                    </a:p>
-                  </a:txBody>
-                  <a:tcPr marL="54864" marR="54864" marT="27432" marB="27432">
-                    <a:solidFill>
-                      <a:srgbClr val="F1EDE4"/>
-                    </a:solidFill>
-                  </a:tcPr>
-                </a:tc>
-                <a:tc>
-                  <a:txBody>
-                    <a:bodyPr/>
-                    <a:lstStyle/>
-                    <a:p>
-                      <a:pPr>
-                        <a:defRPr sz="1000" b="0">
-                          <a:solidFill>
-                            <a:srgbClr val="1B1B1B"/>
-                          </a:solidFill>
-                          <a:latin typeface="Calibri"/>
-                        </a:defRPr>
-                      </a:pPr>
-                      <a:r>
-                        <a:t>keep the first; if details differ, a person</a:t>
+                        <a:t>up to $200 with no red flag: approve (numbers on the right)</a:t>
                       </a:r>
                     </a:p>
                   </a:txBody>
@@ -5586,7 +5249,7 @@
                         </a:defRPr>
                       </a:pPr>
                       <a:r>
-                        <a:t>fraud flag as Y, N, false, blank</a:t>
+                        <a:t>2. change of mind: 14 days, no exceptions</a:t>
                       </a:r>
                     </a:p>
                   </a:txBody>
@@ -5610,31 +5273,7 @@
                         </a:defRPr>
                       </a:pPr>
                       <a:r>
-                        <a:t>10</a:t>
-                      </a:r>
-                    </a:p>
-                  </a:txBody>
-                  <a:tcPr marL="54864" marR="54864" marT="27432" marB="27432">
-                    <a:solidFill>
-                      <a:srgbClr val="FFFFFF"/>
-                    </a:solidFill>
-                  </a:tcPr>
-                </a:tc>
-                <a:tc>
-                  <a:txBody>
-                    <a:bodyPr/>
-                    <a:lstStyle/>
-                    <a:p>
-                      <a:pPr>
-                        <a:defRPr sz="1000" b="0">
-                          <a:solidFill>
-                            <a:srgbClr val="1B1B1B"/>
-                          </a:solidFill>
-                          <a:latin typeface="Calibri"/>
-                        </a:defRPr>
-                      </a:pPr>
-                      <a:r>
-                        <a:t>read them; blank = unknown = a person</a:t>
+                        <a:t>within 14 days: approve; after: a person (the system never rejects)</a:t>
                       </a:r>
                     </a:p>
                   </a:txBody>
@@ -5660,7 +5299,7 @@
                         </a:defRPr>
                       </a:pPr>
                       <a:r>
-                        <a:t>reason spelled differently</a:t>
+                        <a:t>3. damage: a photo for anything over $50</a:t>
                       </a:r>
                     </a:p>
                   </a:txBody>
@@ -5684,31 +5323,7 @@
                         </a:defRPr>
                       </a:pPr>
                       <a:r>
-                        <a:t>6</a:t>
-                      </a:r>
-                    </a:p>
-                  </a:txBody>
-                  <a:tcPr marL="54864" marR="54864" marT="27432" marB="27432">
-                    <a:solidFill>
-                      <a:srgbClr val="F1EDE4"/>
-                    </a:solidFill>
-                  </a:tcPr>
-                </a:tc>
-                <a:tc>
-                  <a:txBody>
-                    <a:bodyPr/>
-                    <a:lstStyle/>
-                    <a:p>
-                      <a:pPr>
-                        <a:defRPr sz="1000" b="0">
-                          <a:solidFill>
-                            <a:srgbClr val="1B1B1B"/>
-                          </a:solidFill>
-                          <a:latin typeface="Calibri"/>
-                        </a:defRPr>
-                      </a:pPr>
-                      <a:r>
-                        <a:t>map to the six official reasons</a:t>
+                        <a:t>$50 or less: approve; over: only if the note says the photo shows damage</a:t>
                       </a:r>
                     </a:p>
                   </a:txBody>
@@ -5734,7 +5349,7 @@
                         </a:defRPr>
                       </a:pPr>
                       <a:r>
-                        <a:t>amounts like 'USD 120.00'</a:t>
+                        <a:t>4. never arrived: signature means reject</a:t>
                       </a:r>
                     </a:p>
                   </a:txBody>
@@ -5758,31 +5373,7 @@
                         </a:defRPr>
                       </a:pPr>
                       <a:r>
-                        <a:t>6</a:t>
-                      </a:r>
-                    </a:p>
-                  </a:txBody>
-                  <a:tcPr marL="54864" marR="54864" marT="27432" marB="27432">
-                    <a:solidFill>
-                      <a:srgbClr val="FFFFFF"/>
-                    </a:solidFill>
-                  </a:tcPr>
-                </a:tc>
-                <a:tc>
-                  <a:txBody>
-                    <a:bodyPr/>
-                    <a:lstStyle/>
-                    <a:p>
-                      <a:pPr>
-                        <a:defRPr sz="1000" b="0">
-                          <a:solidFill>
-                            <a:srgbClr val="1B1B1B"/>
-                          </a:solidFill>
-                          <a:latin typeface="Calibri"/>
-                        </a:defRPr>
-                      </a:pPr>
-                      <a:r>
-                        <a:t>read them; unreadable = a person</a:t>
+                        <a:t>always a person; a rejection is a person's call</a:t>
                       </a:r>
                     </a:p>
                   </a:txBody>
@@ -5808,7 +5399,7 @@
                         </a:defRPr>
                       </a:pPr>
                       <a:r>
-                        <a:t>dates in three formats</a:t>
+                        <a:t>5. fraud flag goes to the fraud team</a:t>
                       </a:r>
                     </a:p>
                   </a:txBody>
@@ -5832,31 +5423,7 @@
                         </a:defRPr>
                       </a:pPr>
                       <a:r>
-                        <a:t>8</a:t>
-                      </a:r>
-                    </a:p>
-                  </a:txBody>
-                  <a:tcPr marL="54864" marR="54864" marT="27432" marB="27432">
-                    <a:solidFill>
-                      <a:srgbClr val="F1EDE4"/>
-                    </a:solidFill>
-                  </a:tcPr>
-                </a:tc>
-                <a:tc>
-                  <a:txBody>
-                    <a:bodyPr/>
-                    <a:lstStyle/>
-                    <a:p>
-                      <a:pPr>
-                        <a:defRPr sz="1000" b="0">
-                          <a:solidFill>
-                            <a:srgbClr val="1B1B1B"/>
-                          </a:solidFill>
-                          <a:latin typeface="Calibri"/>
-                        </a:defRPr>
-                      </a:pPr>
-                      <a:r>
-                        <a:t>read them</a:t>
+                        <a:t>fraud queue, always; a blank flag is unreadable: a person</a:t>
                       </a:r>
                     </a:p>
                   </a:txBody>
@@ -5882,7 +5449,7 @@
                         </a:defRPr>
                       </a:pPr>
                       <a:r>
-                        <a:t>card or phone number in a note</a:t>
+                        <a:t>6. our mistake: full refund; partials are the reviewer's call</a:t>
                       </a:r>
                     </a:p>
                   </a:txBody>
@@ -5906,7 +5473,391 @@
                         </a:defRPr>
                       </a:pPr>
                       <a:r>
-                        <a:t>1</a:t>
+                        <a:t>picking error confirmed in the note: approve; late delivery: a person</a:t>
+                      </a:r>
+                    </a:p>
+                  </a:txBody>
+                  <a:tcPr marL="54864" marR="54864" marT="27432" marB="27432">
+                    <a:solidFill>
+                      <a:srgbClr val="FFFFFF"/>
+                    </a:solidFill>
+                  </a:tcPr>
+                </a:tc>
+              </a:tr>
+            </a:tbl>
+          </a:graphicData>
+        </a:graphic>
+      </p:graphicFrame>
+      <p:sp>
+        <p:nvSpPr>
+          <p:cNvPr id="4" name="TextBox 3"/>
+          <p:cNvSpPr txBox="1"/>
+          <p:nvPr/>
+        </p:nvSpPr>
+        <p:spPr>
+          <a:xfrm>
+            <a:off x="548640" y="4206240"/>
+            <a:ext cx="5440680" cy="2148840"/>
+          </a:xfrm>
+          <a:prstGeom prst="rect">
+            <a:avLst/>
+          </a:prstGeom>
+          <a:noFill/>
+        </p:spPr>
+        <p:txBody>
+          <a:bodyPr wrap="square" anchor="t" lIns="45720" rIns="45720" tIns="27432" bIns="27432">
+            <a:spAutoFit/>
+          </a:bodyPr>
+          <a:lstStyle/>
+          <a:p>
+            <a:pPr algn="l">
+              <a:spcAft>
+                <a:spcPts val="400"/>
+              </a:spcAft>
+            </a:pPr>
+            <a:r>
+              <a:rPr sz="1400" b="1">
+                <a:solidFill>
+                  <a:srgbClr val="0A4A4A"/>
+                </a:solidFill>
+                <a:latin typeface="Cambria"/>
+              </a:rPr>
+              <a:t>Four of the six turn on what the note says</a:t>
+            </a:r>
+          </a:p>
+          <a:p>
+            <a:pPr algn="l">
+              <a:spcAft>
+                <a:spcPts val="800"/>
+              </a:spcAft>
+            </a:pPr>
+            <a:r>
+              <a:rPr sz="1200" b="0">
+                <a:solidFill>
+                  <a:srgbClr val="1B1B1B"/>
+                </a:solidFill>
+                <a:latin typeface="Calibri"/>
+              </a:rPr>
+              <a:t>A photo, carrier proof, a stolen card, a confirmed picking error. Those became five yes/no questions a model answers, each with the quote it relied on; 'unknown' never approves.</a:t>
+            </a:r>
+          </a:p>
+          <a:p>
+            <a:pPr algn="l">
+              <a:spcAft>
+                <a:spcPts val="600"/>
+              </a:spcAft>
+            </a:pPr>
+            <a:r>
+              <a:rPr sz="1200" b="0">
+                <a:solidFill>
+                  <a:srgbClr val="1B1B1B"/>
+                </a:solidFill>
+                <a:latin typeface="Calibri"/>
+              </a:rPr>
+              <a:t>The replay corrected us once: the first question was 'photo attached', and it approved two claims where the photo showed the item was fine. It became 'does the photo show damage'.</a:t>
+            </a:r>
+          </a:p>
+        </p:txBody>
+      </p:sp>
+      <p:pic>
+        <p:nvPicPr>
+          <p:cNvPr id="5" name="Picture 4" descr="fig2_amount_vs_decider.png"/>
+          <p:cNvPicPr>
+            <a:picLocks noChangeAspect="1"/>
+          </p:cNvPicPr>
+          <p:nvPr/>
+        </p:nvPicPr>
+        <p:blipFill>
+          <a:blip r:embed="rId2"/>
+          <a:stretch>
+            <a:fillRect/>
+          </a:stretch>
+        </p:blipFill>
+        <p:spPr>
+          <a:xfrm>
+            <a:off x="6217920" y="1234440"/>
+            <a:ext cx="5440680" cy="2266950"/>
+          </a:xfrm>
+          <a:prstGeom prst="rect">
+            <a:avLst/>
+          </a:prstGeom>
+        </p:spPr>
+      </p:pic>
+      <p:sp>
+        <p:nvSpPr>
+          <p:cNvPr id="6" name="TextBox 5"/>
+          <p:cNvSpPr txBox="1"/>
+          <p:nvPr/>
+        </p:nvSpPr>
+        <p:spPr>
+          <a:xfrm>
+            <a:off x="6217920" y="3638550"/>
+            <a:ext cx="5440680" cy="365760"/>
+          </a:xfrm>
+          <a:prstGeom prst="rect">
+            <a:avLst/>
+          </a:prstGeom>
+          <a:noFill/>
+        </p:spPr>
+        <p:txBody>
+          <a:bodyPr wrap="square" anchor="t" lIns="45720" rIns="45720" tIns="27432" bIns="27432">
+            <a:spAutoFit/>
+          </a:bodyPr>
+          <a:lstStyle/>
+          <a:p>
+            <a:pPr algn="l">
+              <a:spcAft>
+                <a:spcPts val="600"/>
+              </a:spcAft>
+            </a:pPr>
+            <a:r>
+              <a:rPr sz="1400" b="1">
+                <a:solidFill>
+                  <a:srgbClr val="0A4A4A"/>
+                </a:solidFill>
+                <a:latin typeface="Cambria"/>
+              </a:rPr>
+              <a:t>Numbers from the data: the cap</a:t>
+            </a:r>
+          </a:p>
+        </p:txBody>
+      </p:sp>
+      <p:graphicFrame>
+        <p:nvGraphicFramePr>
+          <p:cNvPr id="7" name="Table 6"/>
+          <p:cNvGraphicFramePr>
+            <a:graphicFrameLocks noGrp="1"/>
+          </p:cNvGraphicFramePr>
+          <p:nvPr/>
+        </p:nvGraphicFramePr>
+        <p:xfrm>
+          <a:off x="6217920" y="4050029"/>
+          <a:ext cx="5440680" cy="1463040"/>
+        </p:xfrm>
+        <a:graphic>
+          <a:graphicData uri="http://schemas.openxmlformats.org/drawingml/2006/table">
+            <a:tbl>
+              <a:tblPr firstRow="1" bandRow="1">
+                <a:tableStyleId>{5C22544A-7EE6-4342-B048-85BDC9FD1C3A}</a:tableStyleId>
+              </a:tblPr>
+              <a:tblGrid>
+                <a:gridCol w="1188720"/>
+                <a:gridCol w="1188720"/>
+                <a:gridCol w="1417320"/>
+                <a:gridCol w="1645920"/>
+              </a:tblGrid>
+              <a:tr h="292608">
+                <a:tc>
+                  <a:txBody>
+                    <a:bodyPr/>
+                    <a:lstStyle/>
+                    <a:p>
+                      <a:pPr>
+                        <a:defRPr sz="1000" b="1">
+                          <a:solidFill>
+                            <a:srgbClr val="FFFFFF"/>
+                          </a:solidFill>
+                          <a:latin typeface="Calibri"/>
+                        </a:defRPr>
+                      </a:pPr>
+                      <a:r>
+                        <a:t>cap</a:t>
+                      </a:r>
+                    </a:p>
+                  </a:txBody>
+                  <a:tcPr marL="54864" marR="54864" marT="27432" marB="27432">
+                    <a:solidFill>
+                      <a:srgbClr val="0F6E6E"/>
+                    </a:solidFill>
+                  </a:tcPr>
+                </a:tc>
+                <a:tc>
+                  <a:txBody>
+                    <a:bodyPr/>
+                    <a:lstStyle/>
+                    <a:p>
+                      <a:pPr>
+                        <a:defRPr sz="1000" b="1">
+                          <a:solidFill>
+                            <a:srgbClr val="FFFFFF"/>
+                          </a:solidFill>
+                          <a:latin typeface="Calibri"/>
+                        </a:defRPr>
+                      </a:pPr>
+                      <a:r>
+                        <a:t>approved alone</a:t>
+                      </a:r>
+                    </a:p>
+                  </a:txBody>
+                  <a:tcPr marL="54864" marR="54864" marT="27432" marB="27432">
+                    <a:solidFill>
+                      <a:srgbClr val="0F6E6E"/>
+                    </a:solidFill>
+                  </a:tcPr>
+                </a:tc>
+                <a:tc>
+                  <a:txBody>
+                    <a:bodyPr/>
+                    <a:lstStyle/>
+                    <a:p>
+                      <a:pPr>
+                        <a:defRPr sz="1000" b="1">
+                          <a:solidFill>
+                            <a:srgbClr val="FFFFFF"/>
+                          </a:solidFill>
+                          <a:latin typeface="Calibri"/>
+                        </a:defRPr>
+                      </a:pPr>
+                      <a:r>
+                        <a:t>reviewer minutes saved</a:t>
+                      </a:r>
+                    </a:p>
+                  </a:txBody>
+                  <a:tcPr marL="54864" marR="54864" marT="27432" marB="27432">
+                    <a:solidFill>
+                      <a:srgbClr val="0F6E6E"/>
+                    </a:solidFill>
+                  </a:tcPr>
+                </a:tc>
+                <a:tc>
+                  <a:txBody>
+                    <a:bodyPr/>
+                    <a:lstStyle/>
+                    <a:p>
+                      <a:pPr>
+                        <a:defRPr sz="1000" b="1">
+                          <a:solidFill>
+                            <a:srgbClr val="FFFFFF"/>
+                          </a:solidFill>
+                          <a:latin typeface="Calibri"/>
+                        </a:defRPr>
+                      </a:pPr>
+                      <a:r>
+                        <a:t>bad approvals a note could catch</a:t>
+                      </a:r>
+                    </a:p>
+                  </a:txBody>
+                  <a:tcPr marL="54864" marR="54864" marT="27432" marB="27432">
+                    <a:solidFill>
+                      <a:srgbClr val="0F6E6E"/>
+                    </a:solidFill>
+                  </a:tcPr>
+                </a:tc>
+              </a:tr>
+              <a:tr h="292608">
+                <a:tc>
+                  <a:txBody>
+                    <a:bodyPr/>
+                    <a:lstStyle/>
+                    <a:p>
+                      <a:pPr>
+                        <a:defRPr sz="1000" b="0">
+                          <a:solidFill>
+                            <a:srgbClr val="1B1B1B"/>
+                          </a:solidFill>
+                          <a:latin typeface="Calibri"/>
+                        </a:defRPr>
+                      </a:pPr>
+                      <a:r>
+                        <a:t>$54 (old)</a:t>
+                      </a:r>
+                    </a:p>
+                  </a:txBody>
+                  <a:tcPr marL="54864" marR="54864" marT="27432" marB="27432">
+                    <a:solidFill>
+                      <a:srgbClr val="F1EDE4"/>
+                    </a:solidFill>
+                  </a:tcPr>
+                </a:tc>
+                <a:tc>
+                  <a:txBody>
+                    <a:bodyPr/>
+                    <a:lstStyle/>
+                    <a:p>
+                      <a:pPr>
+                        <a:defRPr sz="1000" b="0">
+                          <a:solidFill>
+                            <a:srgbClr val="1B1B1B"/>
+                          </a:solidFill>
+                          <a:latin typeface="Calibri"/>
+                        </a:defRPr>
+                      </a:pPr>
+                      <a:r>
+                        <a:t>104 (42%)</a:t>
+                      </a:r>
+                    </a:p>
+                  </a:txBody>
+                  <a:tcPr marL="54864" marR="54864" marT="27432" marB="27432">
+                    <a:solidFill>
+                      <a:srgbClr val="F1EDE4"/>
+                    </a:solidFill>
+                  </a:tcPr>
+                </a:tc>
+                <a:tc>
+                  <a:txBody>
+                    <a:bodyPr/>
+                    <a:lstStyle/>
+                    <a:p>
+                      <a:pPr>
+                        <a:defRPr sz="1000" b="0">
+                          <a:solidFill>
+                            <a:srgbClr val="1B1B1B"/>
+                          </a:solidFill>
+                          <a:latin typeface="Calibri"/>
+                        </a:defRPr>
+                      </a:pPr>
+                      <a:r>
+                        <a:t>48</a:t>
+                      </a:r>
+                    </a:p>
+                  </a:txBody>
+                  <a:tcPr marL="54864" marR="54864" marT="27432" marB="27432">
+                    <a:solidFill>
+                      <a:srgbClr val="F1EDE4"/>
+                    </a:solidFill>
+                  </a:tcPr>
+                </a:tc>
+                <a:tc>
+                  <a:txBody>
+                    <a:bodyPr/>
+                    <a:lstStyle/>
+                    <a:p>
+                      <a:pPr>
+                        <a:defRPr sz="1000" b="0">
+                          <a:solidFill>
+                            <a:srgbClr val="1B1B1B"/>
+                          </a:solidFill>
+                          <a:latin typeface="Calibri"/>
+                        </a:defRPr>
+                      </a:pPr>
+                      <a:r>
+                        <a:t>0</a:t>
+                      </a:r>
+                    </a:p>
+                  </a:txBody>
+                  <a:tcPr marL="54864" marR="54864" marT="27432" marB="27432">
+                    <a:solidFill>
+                      <a:srgbClr val="F1EDE4"/>
+                    </a:solidFill>
+                  </a:tcPr>
+                </a:tc>
+              </a:tr>
+              <a:tr h="292608">
+                <a:tc>
+                  <a:txBody>
+                    <a:bodyPr/>
+                    <a:lstStyle/>
+                    <a:p>
+                      <a:pPr>
+                        <a:defRPr sz="1000" b="0">
+                          <a:solidFill>
+                            <a:srgbClr val="1B1B1B"/>
+                          </a:solidFill>
+                          <a:latin typeface="Calibri"/>
+                        </a:defRPr>
+                      </a:pPr>
+                      <a:r>
+                        <a:t>$100</a:t>
                       </a:r>
                     </a:p>
                   </a:txBody>
@@ -5930,7 +5881,55 @@
                         </a:defRPr>
                       </a:pPr>
                       <a:r>
-                        <a:t>hidden before the model or a log sees it</a:t>
+                        <a:t>111 (45%)</a:t>
+                      </a:r>
+                    </a:p>
+                  </a:txBody>
+                  <a:tcPr marL="54864" marR="54864" marT="27432" marB="27432">
+                    <a:solidFill>
+                      <a:srgbClr val="FFFFFF"/>
+                    </a:solidFill>
+                  </a:tcPr>
+                </a:tc>
+                <a:tc>
+                  <a:txBody>
+                    <a:bodyPr/>
+                    <a:lstStyle/>
+                    <a:p>
+                      <a:pPr>
+                        <a:defRPr sz="1000" b="0">
+                          <a:solidFill>
+                            <a:srgbClr val="1B1B1B"/>
+                          </a:solidFill>
+                          <a:latin typeface="Calibri"/>
+                        </a:defRPr>
+                      </a:pPr>
+                      <a:r>
+                        <a:t>86</a:t>
+                      </a:r>
+                    </a:p>
+                  </a:txBody>
+                  <a:tcPr marL="54864" marR="54864" marT="27432" marB="27432">
+                    <a:solidFill>
+                      <a:srgbClr val="FFFFFF"/>
+                    </a:solidFill>
+                  </a:tcPr>
+                </a:tc>
+                <a:tc>
+                  <a:txBody>
+                    <a:bodyPr/>
+                    <a:lstStyle/>
+                    <a:p>
+                      <a:pPr>
+                        <a:defRPr sz="1000" b="0">
+                          <a:solidFill>
+                            <a:srgbClr val="1B1B1B"/>
+                          </a:solidFill>
+                          <a:latin typeface="Calibri"/>
+                        </a:defRPr>
+                      </a:pPr>
+                      <a:r>
+                        <a:t>0</a:t>
                       </a:r>
                     </a:p>
                   </a:txBody>
@@ -5956,7 +5955,7 @@
                         </a:defRPr>
                       </a:pPr>
                       <a:r>
-                        <a:t>reviewer went against the written policy</a:t>
+                        <a:t>$150</a:t>
                       </a:r>
                     </a:p>
                   </a:txBody>
@@ -5980,7 +5979,7 @@
                         </a:defRPr>
                       </a:pPr>
                       <a:r>
-                        <a:t>10</a:t>
+                        <a:t>115 (46%)</a:t>
                       </a:r>
                     </a:p>
                   </a:txBody>
@@ -6004,7 +6003,31 @@
                         </a:defRPr>
                       </a:pPr>
                       <a:r>
-                        <a:t>truth = what happened after appeals</a:t>
+                        <a:t>104</a:t>
+                      </a:r>
+                    </a:p>
+                  </a:txBody>
+                  <a:tcPr marL="54864" marR="54864" marT="27432" marB="27432">
+                    <a:solidFill>
+                      <a:srgbClr val="F1EDE4"/>
+                    </a:solidFill>
+                  </a:tcPr>
+                </a:tc>
+                <a:tc>
+                  <a:txBody>
+                    <a:bodyPr/>
+                    <a:lstStyle/>
+                    <a:p>
+                      <a:pPr>
+                        <a:defRPr sz="1000" b="0">
+                          <a:solidFill>
+                            <a:srgbClr val="1B1B1B"/>
+                          </a:solidFill>
+                          <a:latin typeface="Calibri"/>
+                        </a:defRPr>
+                      </a:pPr>
+                      <a:r>
+                        <a:t>0</a:t>
                       </a:r>
                     </a:p>
                   </a:txBody>
@@ -6015,44 +6038,118 @@
                   </a:tcPr>
                 </a:tc>
               </a:tr>
+              <a:tr h="292608">
+                <a:tc>
+                  <a:txBody>
+                    <a:bodyPr/>
+                    <a:lstStyle/>
+                    <a:p>
+                      <a:pPr>
+                        <a:defRPr sz="1000" b="0">
+                          <a:solidFill>
+                            <a:srgbClr val="1B1B1B"/>
+                          </a:solidFill>
+                          <a:latin typeface="Calibri"/>
+                        </a:defRPr>
+                      </a:pPr>
+                      <a:r>
+                        <a:t>$200 (chosen)</a:t>
+                      </a:r>
+                    </a:p>
+                  </a:txBody>
+                  <a:tcPr marL="54864" marR="54864" marT="27432" marB="27432">
+                    <a:solidFill>
+                      <a:srgbClr val="FFFFFF"/>
+                    </a:solidFill>
+                  </a:tcPr>
+                </a:tc>
+                <a:tc>
+                  <a:txBody>
+                    <a:bodyPr/>
+                    <a:lstStyle/>
+                    <a:p>
+                      <a:pPr>
+                        <a:defRPr sz="1000" b="0">
+                          <a:solidFill>
+                            <a:srgbClr val="1B1B1B"/>
+                          </a:solidFill>
+                          <a:latin typeface="Calibri"/>
+                        </a:defRPr>
+                      </a:pPr>
+                      <a:r>
+                        <a:t>120 (48%)</a:t>
+                      </a:r>
+                    </a:p>
+                  </a:txBody>
+                  <a:tcPr marL="54864" marR="54864" marT="27432" marB="27432">
+                    <a:solidFill>
+                      <a:srgbClr val="FFFFFF"/>
+                    </a:solidFill>
+                  </a:tcPr>
+                </a:tc>
+                <a:tc>
+                  <a:txBody>
+                    <a:bodyPr/>
+                    <a:lstStyle/>
+                    <a:p>
+                      <a:pPr>
+                        <a:defRPr sz="1000" b="0">
+                          <a:solidFill>
+                            <a:srgbClr val="1B1B1B"/>
+                          </a:solidFill>
+                          <a:latin typeface="Calibri"/>
+                        </a:defRPr>
+                      </a:pPr>
+                      <a:r>
+                        <a:t>156</a:t>
+                      </a:r>
+                    </a:p>
+                  </a:txBody>
+                  <a:tcPr marL="54864" marR="54864" marT="27432" marB="27432">
+                    <a:solidFill>
+                      <a:srgbClr val="FFFFFF"/>
+                    </a:solidFill>
+                  </a:tcPr>
+                </a:tc>
+                <a:tc>
+                  <a:txBody>
+                    <a:bodyPr/>
+                    <a:lstStyle/>
+                    <a:p>
+                      <a:pPr>
+                        <a:defRPr sz="1000" b="0">
+                          <a:solidFill>
+                            <a:srgbClr val="1B1B1B"/>
+                          </a:solidFill>
+                          <a:latin typeface="Calibri"/>
+                        </a:defRPr>
+                      </a:pPr>
+                      <a:r>
+                        <a:t>0</a:t>
+                      </a:r>
+                    </a:p>
+                  </a:txBody>
+                  <a:tcPr marL="54864" marR="54864" marT="27432" marB="27432">
+                    <a:solidFill>
+                      <a:srgbClr val="FFFFFF"/>
+                    </a:solidFill>
+                  </a:tcPr>
+                </a:tc>
+              </a:tr>
             </a:tbl>
           </a:graphicData>
         </a:graphic>
       </p:graphicFrame>
-      <p:pic>
-        <p:nvPicPr>
-          <p:cNvPr id="4" name="Picture 3" descr="fig5_bad_outcomes.png"/>
-          <p:cNvPicPr>
-            <a:picLocks noChangeAspect="1"/>
-          </p:cNvPicPr>
-          <p:nvPr/>
-        </p:nvPicPr>
-        <p:blipFill>
-          <a:blip r:embed="rId2"/>
-          <a:stretch>
-            <a:fillRect/>
-          </a:stretch>
-        </p:blipFill>
-        <p:spPr>
-          <a:xfrm>
-            <a:off x="6217920" y="1234440"/>
-            <a:ext cx="5440680" cy="2493645"/>
-          </a:xfrm>
-          <a:prstGeom prst="rect">
-            <a:avLst/>
-          </a:prstGeom>
-        </p:spPr>
-      </p:pic>
-      <p:sp>
-        <p:nvSpPr>
-          <p:cNvPr id="5" name="TextBox 4"/>
+      <p:sp>
+        <p:nvSpPr>
+          <p:cNvPr id="8" name="TextBox 7"/>
           <p:cNvSpPr txBox="1"/>
           <p:nvPr/>
         </p:nvSpPr>
         <p:spPr>
           <a:xfrm>
-            <a:off x="6217920" y="3910965"/>
-            <a:ext cx="5440680" cy="1371600"/>
+            <a:off x="6217920" y="5650230"/>
+            <a:ext cx="5440680" cy="1097280"/>
           </a:xfrm>
           <a:prstGeom prst="rect">
             <a:avLst/>
@@ -6071,13 +6168,13 @@
               </a:spcAft>
             </a:pPr>
             <a:r>
-              <a:rPr sz="1200" b="0">
+              <a:rPr sz="1100" b="0">
                 <a:solidFill>
                   <a:srgbClr val="6B6B6B"/>
                 </a:solidFill>
                 <a:latin typeface="Calibri"/>
               </a:rPr>
-              <a:t>The bad outcomes sit above $150, on fraud flags, or on 'never arrived' claims where the carrier had a signature. Three rejections were overturned on appeal; one of those customers closed the account.</a:t>
+              <a:t>$200 is the highest cap with zero catchable bad approvals, and the chargebacks sit above $150. Above $150 there are only 5 past cases, so the evidence is thin; the manager can lower it with one change. Also from the data: accounts under 3 months (both fraud-flagged chargebacks were 1 to 2 months old) and customers with two earlier refunds go to a person.</a:t>
             </a:r>
           </a:p>
         </p:txBody>
@@ -6090,7 +6187,7 @@
 </p:sld>
 </file>
 
-<file path=ppt/slides/slide2.xml><?xml version="1.0" encoding="utf-8"?>
+<file path=ppt/slides/slide4.xml><?xml version="1.0" encoding="utf-8"?>
 <p:sld xmlns:a="http://schemas.openxmlformats.org/drawingml/2006/main" xmlns:p="http://schemas.openxmlformats.org/presentationml/2006/main" xmlns:r="http://schemas.openxmlformats.org/officeDocument/2006/relationships">
   <p:cSld>
     <p:spTree>
@@ -6134,7 +6231,7 @@
                 </a:solidFill>
                 <a:latin typeface="Cambria"/>
               </a:rPr>
-              <a:t>Today: one old rule, then one queue for everything else</a:t>
+              <a:t>What we added: rules, a note reader, two screens, and a test</a:t>
             </a:r>
           </a:p>
         </p:txBody>
@@ -6148,7 +6245,7 @@
         <p:spPr>
           <a:xfrm>
             <a:off x="548640" y="1234440"/>
-            <a:ext cx="5440680" cy="731520"/>
+            <a:ext cx="1371600" cy="1463040"/>
           </a:xfrm>
           <a:prstGeom prst="roundRect">
             <a:avLst/>
@@ -6192,7 +6289,7 @@
         <p:spPr>
           <a:xfrm>
             <a:off x="685800" y="1307592"/>
-            <a:ext cx="5166360" cy="585216"/>
+            <a:ext cx="1097280" cy="1316736"/>
           </a:xfrm>
           <a:prstGeom prst="rect">
             <a:avLst/>
@@ -6217,7 +6314,7 @@
                 </a:solidFill>
                 <a:latin typeface="Cambria"/>
               </a:rPr>
-              <a:t>A refund request arrives</a:t>
+              <a:t>A request</a:t>
             </a:r>
           </a:p>
           <a:p>
@@ -6233,23 +6330,23 @@
                 </a:solidFill>
                 <a:latin typeface="Calibri"/>
               </a:rPr>
-              <a:t>From the web form or the support desk. About 22 a week; 248 in the 3 months we looked at.</a:t>
-            </a:r>
-          </a:p>
-        </p:txBody>
-      </p:sp>
-      <p:sp>
-        <p:nvSpPr>
-          <p:cNvPr id="5" name="Down Arrow 4"/>
+              <a:t>From the web form or the support desk, as a CSV.</a:t>
+            </a:r>
+          </a:p>
+        </p:txBody>
+      </p:sp>
+      <p:sp>
+        <p:nvSpPr>
+          <p:cNvPr id="5" name="Right Arrow 4"/>
           <p:cNvSpPr/>
           <p:nvPr/>
         </p:nvSpPr>
         <p:spPr>
           <a:xfrm>
-            <a:off x="3113532" y="1965960"/>
-            <a:ext cx="310896" cy="274320"/>
-          </a:xfrm>
-          <a:prstGeom prst="downArrow">
+            <a:off x="1965960" y="1810512"/>
+            <a:ext cx="274320" cy="310896"/>
+          </a:xfrm>
+          <a:prstGeom prst="rightArrow">
             <a:avLst/>
           </a:prstGeom>
           <a:solidFill>
@@ -6290,8 +6387,8 @@
         </p:nvSpPr>
         <p:spPr>
           <a:xfrm>
-            <a:off x="548640" y="2240280"/>
-            <a:ext cx="5440680" cy="960120"/>
+            <a:off x="2286000" y="1234440"/>
+            <a:ext cx="1920240" cy="1463040"/>
           </a:xfrm>
           <a:prstGeom prst="roundRect">
             <a:avLst/>
@@ -6334,8 +6431,8 @@
         </p:nvSpPr>
         <p:spPr>
           <a:xfrm>
-            <a:off x="685800" y="2313432"/>
-            <a:ext cx="5166360" cy="813816"/>
+            <a:off x="2423160" y="1307592"/>
+            <a:ext cx="1645920" cy="1316736"/>
           </a:xfrm>
           <a:prstGeom prst="rect">
             <a:avLst/>
@@ -6360,7 +6457,7 @@
                 </a:solidFill>
                 <a:latin typeface="Cambria"/>
               </a:rPr>
-              <a:t>An old automatic rule, set up by IT last year</a:t>
+              <a:t>Clean the file</a:t>
             </a:r>
           </a:p>
           <a:p>
@@ -6376,23 +6473,23 @@
                 </a:solidFill>
                 <a:latin typeface="Calibri"/>
               </a:rPr>
-              <a:t>Nobody remembers its logic. Worked out from the data: $54 or less, no earlier refunds, account 9 months or older. It reads nothing in the notes.</a:t>
-            </a:r>
-          </a:p>
-        </p:txBody>
-      </p:sp>
-      <p:sp>
-        <p:nvSpPr>
-          <p:cNvPr id="8" name="Down Arrow 7"/>
+              <a:t>Fix dates, amounts, Y/N flags and reason spellings. Hide card numbers. Flag duplicate ids.</a:t>
+            </a:r>
+          </a:p>
+        </p:txBody>
+      </p:sp>
+      <p:sp>
+        <p:nvSpPr>
+          <p:cNvPr id="8" name="Right Arrow 7"/>
           <p:cNvSpPr/>
           <p:nvPr/>
         </p:nvSpPr>
         <p:spPr>
           <a:xfrm>
-            <a:off x="1696212" y="3200400"/>
-            <a:ext cx="310896" cy="274320"/>
-          </a:xfrm>
-          <a:prstGeom prst="downArrow">
+            <a:off x="4251959" y="1810512"/>
+            <a:ext cx="274320" cy="310896"/>
+          </a:xfrm>
+          <a:prstGeom prst="rightArrow">
             <a:avLst/>
           </a:prstGeom>
           <a:solidFill>
@@ -6427,20 +6524,20 @@
       </p:sp>
       <p:sp>
         <p:nvSpPr>
-          <p:cNvPr id="9" name="Down Arrow 8"/>
+          <p:cNvPr id="9" name="Rounded Rectangle 8"/>
           <p:cNvSpPr/>
           <p:nvPr/>
         </p:nvSpPr>
         <p:spPr>
           <a:xfrm>
-            <a:off x="4530852" y="3200400"/>
-            <a:ext cx="310896" cy="274320"/>
-          </a:xfrm>
-          <a:prstGeom prst="downArrow">
+            <a:off x="4572000" y="1234440"/>
+            <a:ext cx="2377440" cy="1463040"/>
+          </a:xfrm>
+          <a:prstGeom prst="roundRect">
             <a:avLst/>
           </a:prstGeom>
           <a:solidFill>
-            <a:srgbClr val="0F6E6E"/>
+            <a:srgbClr val="0A4A4A"/>
           </a:solidFill>
           <a:ln>
             <a:noFill/>
@@ -6471,20 +6568,75 @@
       </p:sp>
       <p:sp>
         <p:nvSpPr>
-          <p:cNvPr id="10" name="Rounded Rectangle 9"/>
+          <p:cNvPr id="10" name="TextBox 9"/>
+          <p:cNvSpPr txBox="1"/>
+          <p:nvPr/>
+        </p:nvSpPr>
+        <p:spPr>
+          <a:xfrm>
+            <a:off x="4709160" y="1307592"/>
+            <a:ext cx="2103120" cy="1316736"/>
+          </a:xfrm>
+          <a:prstGeom prst="rect">
+            <a:avLst/>
+          </a:prstGeom>
+          <a:noFill/>
+        </p:spPr>
+        <p:txBody>
+          <a:bodyPr wrap="square" anchor="t" lIns="45720" rIns="45720" tIns="27432" bIns="27432">
+            <a:spAutoFit/>
+          </a:bodyPr>
+          <a:lstStyle/>
+          <a:p>
+            <a:pPr algn="l">
+              <a:spcAft>
+                <a:spcPts val="300"/>
+              </a:spcAft>
+            </a:pPr>
+            <a:r>
+              <a:rPr sz="1300" b="1">
+                <a:solidFill>
+                  <a:srgbClr val="FFFFFF"/>
+                </a:solidFill>
+                <a:latin typeface="Cambria"/>
+              </a:rPr>
+              <a:t>Written rules decide</a:t>
+            </a:r>
+          </a:p>
+          <a:p>
+            <a:pPr algn="l">
+              <a:spcAft>
+                <a:spcPts val="0"/>
+              </a:spcAft>
+            </a:pPr>
+            <a:r>
+              <a:rPr sz="1100" b="0">
+                <a:solidFill>
+                  <a:srgbClr val="FFFFFF"/>
+                </a:solidFill>
+                <a:latin typeface="Calibri"/>
+              </a:rPr>
+              <a:t>An ordered list in a versioned file: 7 'send to a person' rules first, 4 'approve' rules after. First match wins. Unknown never approves.</a:t>
+            </a:r>
+          </a:p>
+        </p:txBody>
+      </p:sp>
+      <p:sp>
+        <p:nvSpPr>
+          <p:cNvPr id="11" name="Right Arrow 10"/>
           <p:cNvSpPr/>
           <p:nvPr/>
         </p:nvSpPr>
         <p:spPr>
           <a:xfrm>
-            <a:off x="548640" y="3474720"/>
-            <a:ext cx="2606040" cy="1325880"/>
-          </a:xfrm>
-          <a:prstGeom prst="roundRect">
+            <a:off x="6995159" y="1810512"/>
+            <a:ext cx="274320" cy="310896"/>
+          </a:xfrm>
+          <a:prstGeom prst="rightArrow">
             <a:avLst/>
           </a:prstGeom>
           <a:solidFill>
-            <a:srgbClr val="F1EDE4"/>
+            <a:srgbClr val="0F6E6E"/>
           </a:solidFill>
           <a:ln>
             <a:noFill/>
@@ -6515,69 +6667,14 @@
       </p:sp>
       <p:sp>
         <p:nvSpPr>
-          <p:cNvPr id="11" name="TextBox 10"/>
-          <p:cNvSpPr txBox="1"/>
-          <p:nvPr/>
-        </p:nvSpPr>
-        <p:spPr>
-          <a:xfrm>
-            <a:off x="685800" y="3547872"/>
-            <a:ext cx="2331720" cy="1179576"/>
-          </a:xfrm>
-          <a:prstGeom prst="rect">
-            <a:avLst/>
-          </a:prstGeom>
-          <a:noFill/>
-        </p:spPr>
-        <p:txBody>
-          <a:bodyPr wrap="square" anchor="t" lIns="45720" rIns="45720" tIns="27432" bIns="27432">
-            <a:spAutoFit/>
-          </a:bodyPr>
-          <a:lstStyle/>
-          <a:p>
-            <a:pPr algn="l">
-              <a:spcAft>
-                <a:spcPts val="300"/>
-              </a:spcAft>
-            </a:pPr>
-            <a:r>
-              <a:rPr sz="1300" b="1">
-                <a:solidFill>
-                  <a:srgbClr val="0A4A4A"/>
-                </a:solidFill>
-                <a:latin typeface="Cambria"/>
-              </a:rPr>
-              <a:t>Approved, no record of why</a:t>
-            </a:r>
-          </a:p>
-          <a:p>
-            <a:pPr algn="l">
-              <a:spcAft>
-                <a:spcPts val="0"/>
-              </a:spcAft>
-            </a:pPr>
-            <a:r>
-              <a:rPr sz="1100" b="0">
-                <a:solidFill>
-                  <a:srgbClr val="1B1B1B"/>
-                </a:solidFill>
-                <a:latin typeface="Calibri"/>
-              </a:rPr>
-              <a:t>111 of 248 requests (45%), but only $3,377: 14% of the money. One of them later charged back.</a:t>
-            </a:r>
-          </a:p>
-        </p:txBody>
-      </p:sp>
-      <p:sp>
-        <p:nvSpPr>
           <p:cNvPr id="12" name="Rounded Rectangle 11"/>
           <p:cNvSpPr/>
           <p:nvPr/>
         </p:nvSpPr>
         <p:spPr>
           <a:xfrm>
-            <a:off x="3383280" y="3474720"/>
-            <a:ext cx="2606040" cy="1325880"/>
+            <a:off x="7315200" y="1234440"/>
+            <a:ext cx="1828800" cy="685800"/>
           </a:xfrm>
           <a:prstGeom prst="roundRect">
             <a:avLst/>
@@ -6620,8 +6717,8 @@
         </p:nvSpPr>
         <p:spPr>
           <a:xfrm>
-            <a:off x="3520440" y="3547872"/>
-            <a:ext cx="2331720" cy="1179576"/>
+            <a:off x="7452360" y="1307592"/>
+            <a:ext cx="1554480" cy="539496"/>
           </a:xfrm>
           <a:prstGeom prst="rect">
             <a:avLst/>
@@ -6646,7 +6743,7 @@
                 </a:solidFill>
                 <a:latin typeface="Cambria"/>
               </a:rPr>
-              <a:t>One queue; four people read the rest</a:t>
+              <a:t>Approve</a:t>
             </a:r>
           </a:p>
           <a:p>
@@ -6662,27 +6759,27 @@
                 </a:solidFill>
                 <a:latin typeface="Calibri"/>
               </a:rPr>
-              <a:t>137 requests, 8 minutes each: 1,119 minutes. No order: a $20 shirt in the wrong size waits behind a $495 fraud case.</a:t>
-            </a:r>
-          </a:p>
-        </p:txBody>
-      </p:sp>
-      <p:sp>
-        <p:nvSpPr>
-          <p:cNvPr id="14" name="Down Arrow 13"/>
+              <a:t>120 of 248 (48%); rule and quote recorded.</a:t>
+            </a:r>
+          </a:p>
+        </p:txBody>
+      </p:sp>
+      <p:sp>
+        <p:nvSpPr>
+          <p:cNvPr id="14" name="Rounded Rectangle 13"/>
           <p:cNvSpPr/>
           <p:nvPr/>
         </p:nvSpPr>
         <p:spPr>
           <a:xfrm>
-            <a:off x="4530852" y="4800600"/>
-            <a:ext cx="310896" cy="274320"/>
-          </a:xfrm>
-          <a:prstGeom prst="downArrow">
+            <a:off x="7315200" y="2011680"/>
+            <a:ext cx="1828800" cy="685800"/>
+          </a:xfrm>
+          <a:prstGeom prst="roundRect">
             <a:avLst/>
           </a:prstGeom>
           <a:solidFill>
-            <a:srgbClr val="0F6E6E"/>
+            <a:srgbClr val="F1EDE4"/>
           </a:solidFill>
           <a:ln>
             <a:noFill/>
@@ -6713,20 +6810,75 @@
       </p:sp>
       <p:sp>
         <p:nvSpPr>
-          <p:cNvPr id="15" name="Rounded Rectangle 14"/>
+          <p:cNvPr id="15" name="TextBox 14"/>
+          <p:cNvSpPr txBox="1"/>
+          <p:nvPr/>
+        </p:nvSpPr>
+        <p:spPr>
+          <a:xfrm>
+            <a:off x="7452360" y="2084832"/>
+            <a:ext cx="1554480" cy="539496"/>
+          </a:xfrm>
+          <a:prstGeom prst="rect">
+            <a:avLst/>
+          </a:prstGeom>
+          <a:noFill/>
+        </p:spPr>
+        <p:txBody>
+          <a:bodyPr wrap="square" anchor="t" lIns="45720" rIns="45720" tIns="27432" bIns="27432">
+            <a:spAutoFit/>
+          </a:bodyPr>
+          <a:lstStyle/>
+          <a:p>
+            <a:pPr algn="l">
+              <a:spcAft>
+                <a:spcPts val="300"/>
+              </a:spcAft>
+            </a:pPr>
+            <a:r>
+              <a:rPr sz="1300" b="1">
+                <a:solidFill>
+                  <a:srgbClr val="0A4A4A"/>
+                </a:solidFill>
+                <a:latin typeface="Cambria"/>
+              </a:rPr>
+              <a:t>To a person</a:t>
+            </a:r>
+          </a:p>
+          <a:p>
+            <a:pPr algn="l">
+              <a:spcAft>
+                <a:spcPts val="0"/>
+              </a:spcAft>
+            </a:pPr>
+            <a:r>
+              <a:rPr sz="1100" b="0">
+                <a:solidFill>
+                  <a:srgbClr val="1B1B1B"/>
+                </a:solidFill>
+                <a:latin typeface="Calibri"/>
+              </a:rPr>
+              <a:t>128 of 248, with the reason in plain words.</a:t>
+            </a:r>
+          </a:p>
+        </p:txBody>
+      </p:sp>
+      <p:sp>
+        <p:nvSpPr>
+          <p:cNvPr id="16" name="Right Arrow 15"/>
           <p:cNvSpPr/>
           <p:nvPr/>
         </p:nvSpPr>
         <p:spPr>
           <a:xfrm>
-            <a:off x="3383280" y="5074920"/>
-            <a:ext cx="2606040" cy="1280160"/>
-          </a:xfrm>
-          <a:prstGeom prst="roundRect">
+            <a:off x="9189720" y="2199132"/>
+            <a:ext cx="274320" cy="310896"/>
+          </a:xfrm>
+          <a:prstGeom prst="rightArrow">
             <a:avLst/>
           </a:prstGeom>
           <a:solidFill>
-            <a:srgbClr val="F1EDE4"/>
+            <a:srgbClr val="0F6E6E"/>
           </a:solidFill>
           <a:ln>
             <a:noFill/>
@@ -6757,108 +6909,14 @@
       </p:sp>
       <p:sp>
         <p:nvSpPr>
-          <p:cNvPr id="16" name="TextBox 15"/>
-          <p:cNvSpPr txBox="1"/>
-          <p:nvPr/>
-        </p:nvSpPr>
-        <p:spPr>
-          <a:xfrm>
-            <a:off x="3520440" y="5148072"/>
-            <a:ext cx="2331720" cy="1133856"/>
-          </a:xfrm>
-          <a:prstGeom prst="rect">
-            <a:avLst/>
-          </a:prstGeom>
-          <a:noFill/>
-        </p:spPr>
-        <p:txBody>
-          <a:bodyPr wrap="square" anchor="t" lIns="45720" rIns="45720" tIns="27432" bIns="27432">
-            <a:spAutoFit/>
-          </a:bodyPr>
-          <a:lstStyle/>
-          <a:p>
-            <a:pPr algn="l">
-              <a:spcAft>
-                <a:spcPts val="300"/>
-              </a:spcAft>
-            </a:pPr>
-            <a:r>
-              <a:rPr sz="1300" b="1">
-                <a:solidFill>
-                  <a:srgbClr val="0A4A4A"/>
-                </a:solidFill>
-                <a:latin typeface="Cambria"/>
-              </a:rPr>
-              <a:t>Approve, partial, reject, or fraud team</a:t>
-            </a:r>
-          </a:p>
-          <a:p>
-            <a:pPr algn="l">
-              <a:spcAft>
-                <a:spcPts val="0"/>
-              </a:spcAft>
-            </a:pPr>
-            <a:r>
-              <a:rPr sz="1100" b="0">
-                <a:solidFill>
-                  <a:srgbClr val="1B1B1B"/>
-                </a:solidFill>
-                <a:latin typeface="Calibri"/>
-              </a:rPr>
-              <a:t>Guided by seven notes from the manager that live in her email, not in any tool. 10 decisions went against them.</a:t>
-            </a:r>
-          </a:p>
-        </p:txBody>
-      </p:sp>
-      <p:sp>
-        <p:nvSpPr>
-          <p:cNvPr id="17" name="TextBox 16"/>
-          <p:cNvSpPr txBox="1"/>
-          <p:nvPr/>
-        </p:nvSpPr>
-        <p:spPr>
-          <a:xfrm>
-            <a:off x="548640" y="5074920"/>
-            <a:ext cx="2606040" cy="1280160"/>
-          </a:xfrm>
-          <a:prstGeom prst="rect">
-            <a:avLst/>
-          </a:prstGeom>
-          <a:noFill/>
-        </p:spPr>
-        <p:txBody>
-          <a:bodyPr wrap="square" anchor="t" lIns="45720" rIns="45720" tIns="27432" bIns="27432">
-            <a:spAutoFit/>
-          </a:bodyPr>
-          <a:lstStyle/>
-          <a:p>
-            <a:pPr algn="l">
-              <a:spcAft>
-                <a:spcPts val="600"/>
-              </a:spcAft>
-            </a:pPr>
-            <a:r>
-              <a:rPr sz="1200" b="0">
-                <a:solidFill>
-                  <a:srgbClr val="6B6B6B"/>
-                </a:solidFill>
-                <a:latin typeface="Calibri"/>
-              </a:rPr>
-              <a:t>The rule cannot be changed by the people who own the policy: nobody knows where it lives or what it says.</a:t>
-            </a:r>
-          </a:p>
-        </p:txBody>
-      </p:sp>
-      <p:sp>
-        <p:nvSpPr>
-          <p:cNvPr id="18" name="Rounded Rectangle 17"/>
+          <p:cNvPr id="17" name="Rounded Rectangle 16"/>
           <p:cNvSpPr/>
           <p:nvPr/>
         </p:nvSpPr>
         <p:spPr>
           <a:xfrm>
-            <a:off x="6217920" y="1234440"/>
-            <a:ext cx="5440680" cy="5120640"/>
+            <a:off x="9509760" y="1234440"/>
+            <a:ext cx="2133295" cy="1463040"/>
           </a:xfrm>
           <a:prstGeom prst="roundRect">
             <a:avLst/>
@@ -6895,14 +6953,14 @@
       </p:sp>
       <p:sp>
         <p:nvSpPr>
-          <p:cNvPr id="19" name="TextBox 18"/>
+          <p:cNvPr id="18" name="TextBox 17"/>
           <p:cNvSpPr txBox="1"/>
           <p:nvPr/>
         </p:nvSpPr>
         <p:spPr>
           <a:xfrm>
-            <a:off x="6446520" y="1371600"/>
-            <a:ext cx="4983480" cy="411480"/>
+            <a:off x="9646920" y="1307592"/>
+            <a:ext cx="1858975" cy="1316736"/>
           </a:xfrm>
           <a:prstGeom prst="rect">
             <a:avLst/>
@@ -6917,197 +6975,53 @@
           <a:p>
             <a:pPr algn="l">
               <a:spcAft>
-                <a:spcPts val="600"/>
+                <a:spcPts val="300"/>
               </a:spcAft>
             </a:pPr>
             <a:r>
-              <a:rPr sz="1600" b="1">
+              <a:rPr sz="1300" b="1">
                 <a:solidFill>
-                  <a:srgbClr val="E4573D"/>
+                  <a:srgbClr val="0A4A4A"/>
                 </a:solidFill>
                 <a:latin typeface="Cambria"/>
               </a:rPr>
-              <a:t>What it costs</a:t>
-            </a:r>
-          </a:p>
-        </p:txBody>
-      </p:sp>
-      <p:sp>
-        <p:nvSpPr>
-          <p:cNvPr id="20" name="TextBox 19"/>
-          <p:cNvSpPr txBox="1"/>
-          <p:nvPr/>
-        </p:nvSpPr>
-        <p:spPr>
-          <a:xfrm>
-            <a:off x="6446520" y="1874519"/>
-            <a:ext cx="4983480" cy="4343400"/>
-          </a:xfrm>
-          <a:prstGeom prst="rect">
-            <a:avLst/>
-          </a:prstGeom>
-          <a:noFill/>
-        </p:spPr>
-        <p:txBody>
-          <a:bodyPr wrap="square" anchor="t" lIns="45720" rIns="45720" tIns="27432" bIns="27432">
-            <a:spAutoFit/>
-          </a:bodyPr>
-          <a:lstStyle/>
+              <a:t>Two queues</a:t>
+            </a:r>
+          </a:p>
           <a:p>
             <a:pPr algn="l">
               <a:spcAft>
-                <a:spcPts val="800"/>
+                <a:spcPts val="0"/>
               </a:spcAft>
             </a:pPr>
             <a:r>
-              <a:rPr sz="1200" b="0">
+              <a:rPr sz="1100" b="0">
                 <a:solidFill>
                   <a:srgbClr val="1B1B1B"/>
                 </a:solidFill>
                 <a:latin typeface="Calibri"/>
               </a:rPr>
-              <a:t>•  Reviewer time goes to easy cases: 28 requests of $50 or less were approved in full after a person read them. 22 reached a person only because the account was new; 21 of those were approved anyway.</a:t>
-            </a:r>
-          </a:p>
-          <a:p>
-            <a:pPr algn="l">
-              <a:spcAft>
-                <a:spcPts val="800"/>
-              </a:spcAft>
-            </a:pPr>
-            <a:r>
-              <a:rPr sz="1200" b="0">
-                <a:solidFill>
-                  <a:srgbClr val="1B1B1B"/>
-                </a:solidFill>
-                <a:latin typeface="Calibri"/>
-              </a:rPr>
-              <a:t>•  Fraud-flagged cases sit in the same queue as everything else. 3 were approved without asking the fraud team; 2 of those charged back.</a:t>
-            </a:r>
-          </a:p>
-          <a:p>
-            <a:pPr algn="l">
-              <a:spcAft>
-                <a:spcPts val="800"/>
-              </a:spcAft>
-            </a:pPr>
-            <a:r>
-              <a:rPr sz="1200" b="0">
-                <a:solidFill>
-                  <a:srgbClr val="1B1B1B"/>
-                </a:solidFill>
-                <a:latin typeface="Calibri"/>
-              </a:rPr>
-              <a:t>•  8 chargebacks in 3 months, about $2,519 including the $25 fees. 7 of the 8 were approved by a person, and most carried a sign that could have been read: a fraud flag, or a carrier signature on a 'never arrived' claim.</a:t>
-            </a:r>
-          </a:p>
-          <a:p>
-            <a:pPr algn="l">
-              <a:spcAft>
-                <a:spcPts val="800"/>
-              </a:spcAft>
-            </a:pPr>
-            <a:r>
-              <a:rPr sz="1200" b="0">
-                <a:solidFill>
-                  <a:srgbClr val="1B1B1B"/>
-                </a:solidFill>
-                <a:latin typeface="Calibri"/>
-              </a:rPr>
-              <a:t>•  3 rejections were overturned on appeal; one of those customers closed the account.</a:t>
-            </a:r>
-          </a:p>
-          <a:p>
-            <a:pPr algn="l">
-              <a:spcAft>
-                <a:spcPts val="800"/>
-              </a:spcAft>
-            </a:pPr>
-            <a:r>
-              <a:rPr sz="1200" b="0">
-                <a:solidFill>
-                  <a:srgbClr val="1B1B1B"/>
-                </a:solidFill>
-                <a:latin typeface="Calibri"/>
-              </a:rPr>
-              <a:t>•  When something goes wrong, there is no record of why the request was approved, and no way to test a different rule before trying it on real customers.</a:t>
-            </a:r>
-          </a:p>
-        </p:txBody>
-      </p:sp>
-    </p:spTree>
-  </p:cSld>
-  <p:clrMapOvr>
-    <a:masterClrMapping/>
-  </p:clrMapOvr>
-</p:sld>
-</file>
-
-<file path=ppt/slides/slide3.xml><?xml version="1.0" encoding="utf-8"?>
-<p:sld xmlns:a="http://schemas.openxmlformats.org/drawingml/2006/main" xmlns:p="http://schemas.openxmlformats.org/presentationml/2006/main" xmlns:r="http://schemas.openxmlformats.org/officeDocument/2006/relationships">
-  <p:cSld>
-    <p:spTree>
-      <p:nvGrpSpPr>
-        <p:cNvPr id="1" name=""/>
-        <p:cNvGrpSpPr/>
-        <p:nvPr/>
-      </p:nvGrpSpPr>
-      <p:grpSpPr/>
-      <p:sp>
-        <p:nvSpPr>
-          <p:cNvPr id="2" name="TextBox 1"/>
-          <p:cNvSpPr txBox="1"/>
-          <p:nvPr/>
-        </p:nvSpPr>
-        <p:spPr>
-          <a:xfrm>
-            <a:off x="548640" y="365760"/>
-            <a:ext cx="11094415" cy="685800"/>
-          </a:xfrm>
-          <a:prstGeom prst="rect">
-            <a:avLst/>
-          </a:prstGeom>
-          <a:noFill/>
-        </p:spPr>
-        <p:txBody>
-          <a:bodyPr wrap="square" anchor="t" lIns="45720" rIns="45720" tIns="27432" bIns="27432">
-            <a:spAutoFit/>
-          </a:bodyPr>
-          <a:lstStyle/>
-          <a:p>
-            <a:pPr algn="l">
-              <a:spcAft>
-                <a:spcPts val="600"/>
-              </a:spcAft>
-            </a:pPr>
-            <a:r>
-              <a:rPr sz="2800" b="1">
-                <a:solidFill>
-                  <a:srgbClr val="0A4A4A"/>
-                </a:solidFill>
-                <a:latin typeface="Cambria"/>
-              </a:rPr>
-              <a:t>What we added: rules, a note reader, two screens, and a test</a:t>
-            </a:r>
-          </a:p>
-        </p:txBody>
-      </p:sp>
-      <p:sp>
-        <p:nvSpPr>
-          <p:cNvPr id="3" name="Rounded Rectangle 2"/>
+              <a:t>The reviewer queue, oldest first. The fraud queue for flagged cases.</a:t>
+            </a:r>
+          </a:p>
+        </p:txBody>
+      </p:sp>
+      <p:sp>
+        <p:nvSpPr>
+          <p:cNvPr id="19" name="Up Arrow 18"/>
           <p:cNvSpPr/>
           <p:nvPr/>
         </p:nvSpPr>
         <p:spPr>
           <a:xfrm>
-            <a:off x="548640" y="1234440"/>
-            <a:ext cx="1371600" cy="1463040"/>
-          </a:xfrm>
-          <a:prstGeom prst="roundRect">
+            <a:off x="5605272" y="2752344"/>
+            <a:ext cx="310896" cy="256032"/>
+          </a:xfrm>
+          <a:prstGeom prst="upArrow">
             <a:avLst/>
           </a:prstGeom>
           <a:solidFill>
-            <a:srgbClr val="F1EDE4"/>
+            <a:srgbClr val="0F6E6E"/>
           </a:solidFill>
           <a:ln>
             <a:noFill/>
@@ -7138,75 +7052,20 @@
       </p:sp>
       <p:sp>
         <p:nvSpPr>
-          <p:cNvPr id="4" name="TextBox 3"/>
-          <p:cNvSpPr txBox="1"/>
-          <p:nvPr/>
-        </p:nvSpPr>
-        <p:spPr>
-          <a:xfrm>
-            <a:off x="685800" y="1307592"/>
-            <a:ext cx="1097280" cy="1316736"/>
-          </a:xfrm>
-          <a:prstGeom prst="rect">
-            <a:avLst/>
-          </a:prstGeom>
-          <a:noFill/>
-        </p:spPr>
-        <p:txBody>
-          <a:bodyPr wrap="square" anchor="t" lIns="45720" rIns="45720" tIns="27432" bIns="27432">
-            <a:spAutoFit/>
-          </a:bodyPr>
-          <a:lstStyle/>
-          <a:p>
-            <a:pPr algn="l">
-              <a:spcAft>
-                <a:spcPts val="300"/>
-              </a:spcAft>
-            </a:pPr>
-            <a:r>
-              <a:rPr sz="1300" b="1">
-                <a:solidFill>
-                  <a:srgbClr val="0A4A4A"/>
-                </a:solidFill>
-                <a:latin typeface="Cambria"/>
-              </a:rPr>
-              <a:t>A request</a:t>
-            </a:r>
-          </a:p>
-          <a:p>
-            <a:pPr algn="l">
-              <a:spcAft>
-                <a:spcPts val="0"/>
-              </a:spcAft>
-            </a:pPr>
-            <a:r>
-              <a:rPr sz="1100" b="0">
-                <a:solidFill>
-                  <a:srgbClr val="1B1B1B"/>
-                </a:solidFill>
-                <a:latin typeface="Calibri"/>
-              </a:rPr>
-              <a:t>From the web form or the support desk, as a CSV.</a:t>
-            </a:r>
-          </a:p>
-        </p:txBody>
-      </p:sp>
-      <p:sp>
-        <p:nvSpPr>
-          <p:cNvPr id="5" name="Right Arrow 4"/>
+          <p:cNvPr id="20" name="Rounded Rectangle 19"/>
           <p:cNvSpPr/>
           <p:nvPr/>
         </p:nvSpPr>
         <p:spPr>
           <a:xfrm>
-            <a:off x="1965960" y="1810512"/>
-            <a:ext cx="274320" cy="310896"/>
-          </a:xfrm>
-          <a:prstGeom prst="rightArrow">
+            <a:off x="4572000" y="3063240"/>
+            <a:ext cx="2377440" cy="1188720"/>
+          </a:xfrm>
+          <a:prstGeom prst="roundRect">
             <a:avLst/>
           </a:prstGeom>
           <a:solidFill>
-            <a:srgbClr val="0F6E6E"/>
+            <a:srgbClr val="F1EDE4"/>
           </a:solidFill>
           <a:ln>
             <a:noFill/>
@@ -7237,14 +7096,179 @@
       </p:sp>
       <p:sp>
         <p:nvSpPr>
-          <p:cNvPr id="6" name="Rounded Rectangle 5"/>
+          <p:cNvPr id="21" name="TextBox 20"/>
+          <p:cNvSpPr txBox="1"/>
+          <p:nvPr/>
+        </p:nvSpPr>
+        <p:spPr>
+          <a:xfrm>
+            <a:off x="4709160" y="3136392"/>
+            <a:ext cx="2103120" cy="1042416"/>
+          </a:xfrm>
+          <a:prstGeom prst="rect">
+            <a:avLst/>
+          </a:prstGeom>
+          <a:noFill/>
+        </p:spPr>
+        <p:txBody>
+          <a:bodyPr wrap="square" anchor="t" lIns="45720" rIns="45720" tIns="27432" bIns="27432">
+            <a:spAutoFit/>
+          </a:bodyPr>
+          <a:lstStyle/>
+          <a:p>
+            <a:pPr algn="l">
+              <a:spcAft>
+                <a:spcPts val="300"/>
+              </a:spcAft>
+            </a:pPr>
+            <a:r>
+              <a:rPr sz="1300" b="1">
+                <a:solidFill>
+                  <a:srgbClr val="0A4A4A"/>
+                </a:solidFill>
+                <a:latin typeface="Cambria"/>
+              </a:rPr>
+              <a:t>A model reads the note, only when a rule asks</a:t>
+            </a:r>
+          </a:p>
+          <a:p>
+            <a:pPr algn="l">
+              <a:spcAft>
+                <a:spcPts val="0"/>
+              </a:spcAft>
+            </a:pPr>
+            <a:r>
+              <a:rPr sz="1100" b="0">
+                <a:solidFill>
+                  <a:srgbClr val="1B1B1B"/>
+                </a:solidFill>
+                <a:latin typeface="Calibri"/>
+              </a:rPr>
+              <a:t>Five yes/no questions, each with the quote it relied on. Answers are saved. No key means 'unknown', which goes to a person.</a:t>
+            </a:r>
+          </a:p>
+        </p:txBody>
+      </p:sp>
+      <p:sp>
+        <p:nvSpPr>
+          <p:cNvPr id="22" name="TextBox 21"/>
+          <p:cNvSpPr txBox="1"/>
+          <p:nvPr/>
+        </p:nvSpPr>
+        <p:spPr>
+          <a:xfrm>
+            <a:off x="548640" y="3063240"/>
+            <a:ext cx="3474720" cy="1188720"/>
+          </a:xfrm>
+          <a:prstGeom prst="rect">
+            <a:avLst/>
+          </a:prstGeom>
+          <a:noFill/>
+        </p:spPr>
+        <p:txBody>
+          <a:bodyPr wrap="square" anchor="t" lIns="45720" rIns="45720" tIns="27432" bIns="27432">
+            <a:spAutoFit/>
+          </a:bodyPr>
+          <a:lstStyle/>
+          <a:p>
+            <a:pPr algn="l">
+              <a:spcAft>
+                <a:spcPts val="400"/>
+              </a:spcAft>
+            </a:pPr>
+            <a:r>
+              <a:rPr sz="1200" b="1">
+                <a:solidFill>
+                  <a:srgbClr val="0A4A4A"/>
+                </a:solidFill>
+                <a:latin typeface="Calibri"/>
+              </a:rPr>
+              <a:t>The same path on the command line and in the app.</a:t>
+            </a:r>
+          </a:p>
+          <a:p>
+            <a:pPr algn="l">
+              <a:spcAft>
+                <a:spcPts val="600"/>
+              </a:spcAft>
+            </a:pPr>
+            <a:r>
+              <a:rPr sz="1200" b="0">
+                <a:solidFill>
+                  <a:srgbClr val="6B6B6B"/>
+                </a:solidFill>
+                <a:latin typeface="Calibri"/>
+              </a:rPr>
+              <a:t>refund-agent decide any.csv writes one line per request: the outcome, the rule that fired, the facts it used, the rules version. Nothing in the app is a mock.</a:t>
+            </a:r>
+          </a:p>
+        </p:txBody>
+      </p:sp>
+      <p:sp>
+        <p:nvSpPr>
+          <p:cNvPr id="23" name="TextBox 22"/>
+          <p:cNvSpPr txBox="1"/>
+          <p:nvPr/>
+        </p:nvSpPr>
+        <p:spPr>
+          <a:xfrm>
+            <a:off x="7315200" y="3063240"/>
+            <a:ext cx="4327855" cy="1188720"/>
+          </a:xfrm>
+          <a:prstGeom prst="rect">
+            <a:avLst/>
+          </a:prstGeom>
+          <a:noFill/>
+        </p:spPr>
+        <p:txBody>
+          <a:bodyPr wrap="square" anchor="t" lIns="45720" rIns="45720" tIns="27432" bIns="27432">
+            <a:spAutoFit/>
+          </a:bodyPr>
+          <a:lstStyle/>
+          <a:p>
+            <a:pPr algn="l">
+              <a:spcAft>
+                <a:spcPts val="400"/>
+              </a:spcAft>
+            </a:pPr>
+            <a:r>
+              <a:rPr sz="1200" b="1">
+                <a:solidFill>
+                  <a:srgbClr val="0A4A4A"/>
+                </a:solidFill>
+                <a:latin typeface="Calibri"/>
+              </a:rPr>
+              <a:t>Two outcomes only.</a:t>
+            </a:r>
+          </a:p>
+          <a:p>
+            <a:pPr algn="l">
+              <a:spcAft>
+                <a:spcPts val="600"/>
+              </a:spcAft>
+            </a:pPr>
+            <a:r>
+              <a:rPr sz="1200" b="0">
+                <a:solidFill>
+                  <a:srgbClr val="6B6B6B"/>
+                </a:solidFill>
+                <a:latin typeface="Calibri"/>
+              </a:rPr>
+              <a:t>Approve, or send to a person. The system never rejects: a wrong rejection costs an appeal and maybe the customer. Rejecting stays with people.</a:t>
+            </a:r>
+          </a:p>
+        </p:txBody>
+      </p:sp>
+      <p:sp>
+        <p:nvSpPr>
+          <p:cNvPr id="24" name="Rounded Rectangle 23"/>
           <p:cNvSpPr/>
           <p:nvPr/>
         </p:nvSpPr>
         <p:spPr>
           <a:xfrm>
-            <a:off x="2286000" y="1234440"/>
-            <a:ext cx="1920240" cy="1463040"/>
+            <a:off x="548640" y="4480560"/>
+            <a:ext cx="3545738" cy="1920239"/>
           </a:xfrm>
           <a:prstGeom prst="roundRect">
             <a:avLst/>
@@ -7281,14 +7305,14 @@
       </p:sp>
       <p:sp>
         <p:nvSpPr>
-          <p:cNvPr id="7" name="TextBox 6"/>
+          <p:cNvPr id="25" name="TextBox 24"/>
           <p:cNvSpPr txBox="1"/>
           <p:nvPr/>
         </p:nvSpPr>
         <p:spPr>
           <a:xfrm>
-            <a:off x="2423160" y="1307592"/>
-            <a:ext cx="1645920" cy="1316736"/>
+            <a:off x="777240" y="4617720"/>
+            <a:ext cx="3088538" cy="411480"/>
           </a:xfrm>
           <a:prstGeom prst="rect">
             <a:avLst/>
@@ -7303,23 +7327,46 @@
           <a:p>
             <a:pPr algn="l">
               <a:spcAft>
-                <a:spcPts val="300"/>
+                <a:spcPts val="600"/>
               </a:spcAft>
             </a:pPr>
             <a:r>
-              <a:rPr sz="1300" b="1">
+              <a:rPr sz="1600" b="1">
                 <a:solidFill>
                   <a:srgbClr val="0A4A4A"/>
                 </a:solidFill>
                 <a:latin typeface="Cambria"/>
               </a:rPr>
-              <a:t>Clean the file</a:t>
-            </a:r>
-          </a:p>
+              <a:t>The reviewer's screen</a:t>
+            </a:r>
+          </a:p>
+        </p:txBody>
+      </p:sp>
+      <p:sp>
+        <p:nvSpPr>
+          <p:cNvPr id="26" name="TextBox 25"/>
+          <p:cNvSpPr txBox="1"/>
+          <p:nvPr/>
+        </p:nvSpPr>
+        <p:spPr>
+          <a:xfrm>
+            <a:off x="777240" y="5074920"/>
+            <a:ext cx="3088538" cy="1188719"/>
+          </a:xfrm>
+          <a:prstGeom prst="rect">
+            <a:avLst/>
+          </a:prstGeom>
+          <a:noFill/>
+        </p:spPr>
+        <p:txBody>
+          <a:bodyPr wrap="square" anchor="t" lIns="45720" rIns="45720" tIns="27432" bIns="27432">
+            <a:spAutoFit/>
+          </a:bodyPr>
+          <a:lstStyle/>
           <a:p>
             <a:pPr algn="l">
               <a:spcAft>
-                <a:spcPts val="0"/>
+                <a:spcPts val="600"/>
               </a:spcAft>
             </a:pPr>
             <a:r>
@@ -7329,27 +7376,43 @@
                 </a:solidFill>
                 <a:latin typeface="Calibri"/>
               </a:rPr>
-              <a:t>Fix dates, amounts, Y/N flags and reason spellings. Hide card numbers. Flag duplicate ids.</a:t>
-            </a:r>
-          </a:p>
-        </p:txBody>
-      </p:sp>
-      <p:sp>
-        <p:nvSpPr>
-          <p:cNvPr id="8" name="Right Arrow 7"/>
+              <a:t>Why the request is here, in plain words; what the model read, with the exact quote; the customer's history; the manager's note that applies.</a:t>
+            </a:r>
+          </a:p>
+          <a:p>
+            <a:pPr algn="l">
+              <a:spcAft>
+                <a:spcPts val="600"/>
+              </a:spcAft>
+            </a:pPr>
+            <a:r>
+              <a:rPr sz="1100" b="0">
+                <a:solidFill>
+                  <a:srgbClr val="1B1B1B"/>
+                </a:solidFill>
+                <a:latin typeface="Calibri"/>
+              </a:rPr>
+              <a:t>Approve, approve part, reject, or send to the fraud team. Each goes to the log with the reviewer's name and the rules version.</a:t>
+            </a:r>
+          </a:p>
+        </p:txBody>
+      </p:sp>
+      <p:sp>
+        <p:nvSpPr>
+          <p:cNvPr id="27" name="Rounded Rectangle 26"/>
           <p:cNvSpPr/>
           <p:nvPr/>
         </p:nvSpPr>
         <p:spPr>
           <a:xfrm>
-            <a:off x="4251959" y="1810512"/>
-            <a:ext cx="274320" cy="310896"/>
-          </a:xfrm>
-          <a:prstGeom prst="rightArrow">
+            <a:off x="4322978" y="4480560"/>
+            <a:ext cx="3545738" cy="1920239"/>
+          </a:xfrm>
+          <a:prstGeom prst="roundRect">
             <a:avLst/>
           </a:prstGeom>
           <a:solidFill>
-            <a:srgbClr val="0F6E6E"/>
+            <a:srgbClr val="F1EDE4"/>
           </a:solidFill>
           <a:ln>
             <a:noFill/>
@@ -7380,20 +7443,114 @@
       </p:sp>
       <p:sp>
         <p:nvSpPr>
-          <p:cNvPr id="9" name="Rounded Rectangle 8"/>
+          <p:cNvPr id="28" name="TextBox 27"/>
+          <p:cNvSpPr txBox="1"/>
+          <p:nvPr/>
+        </p:nvSpPr>
+        <p:spPr>
+          <a:xfrm>
+            <a:off x="4551578" y="4617720"/>
+            <a:ext cx="3088538" cy="411480"/>
+          </a:xfrm>
+          <a:prstGeom prst="rect">
+            <a:avLst/>
+          </a:prstGeom>
+          <a:noFill/>
+        </p:spPr>
+        <p:txBody>
+          <a:bodyPr wrap="square" anchor="t" lIns="45720" rIns="45720" tIns="27432" bIns="27432">
+            <a:spAutoFit/>
+          </a:bodyPr>
+          <a:lstStyle/>
+          <a:p>
+            <a:pPr algn="l">
+              <a:spcAft>
+                <a:spcPts val="600"/>
+              </a:spcAft>
+            </a:pPr>
+            <a:r>
+              <a:rPr sz="1600" b="1">
+                <a:solidFill>
+                  <a:srgbClr val="0A4A4A"/>
+                </a:solidFill>
+                <a:latin typeface="Cambria"/>
+              </a:rPr>
+              <a:t>The manager's screen</a:t>
+            </a:r>
+          </a:p>
+        </p:txBody>
+      </p:sp>
+      <p:sp>
+        <p:nvSpPr>
+          <p:cNvPr id="29" name="TextBox 28"/>
+          <p:cNvSpPr txBox="1"/>
+          <p:nvPr/>
+        </p:nvSpPr>
+        <p:spPr>
+          <a:xfrm>
+            <a:off x="4551578" y="5074920"/>
+            <a:ext cx="3088538" cy="1188719"/>
+          </a:xfrm>
+          <a:prstGeom prst="rect">
+            <a:avLst/>
+          </a:prstGeom>
+          <a:noFill/>
+        </p:spPr>
+        <p:txBody>
+          <a:bodyPr wrap="square" anchor="t" lIns="45720" rIns="45720" tIns="27432" bIns="27432">
+            <a:spAutoFit/>
+          </a:bodyPr>
+          <a:lstStyle/>
+          <a:p>
+            <a:pPr algn="l">
+              <a:spcAft>
+                <a:spcPts val="600"/>
+              </a:spcAft>
+            </a:pPr>
+            <a:r>
+              <a:rPr sz="1100" b="0">
+                <a:solidFill>
+                  <a:srgbClr val="1B1B1B"/>
+                </a:solidFill>
+                <a:latin typeface="Calibri"/>
+              </a:rPr>
+              <a:t>She types a sentence ('anything over $300 comes to us'); the model turns it into a rule, or says why it cannot.</a:t>
+            </a:r>
+          </a:p>
+          <a:p>
+            <a:pPr algn="l">
+              <a:spcAft>
+                <a:spcPts val="600"/>
+              </a:spcAft>
+            </a:pPr>
+            <a:r>
+              <a:rPr sz="1100" b="0">
+                <a:solidFill>
+                  <a:srgbClr val="1B1B1B"/>
+                </a:solidFill>
+                <a:latin typeface="Calibri"/>
+              </a:rPr>
+              <a:t>A dry run replays old and new rules on the 248 past requests; then she publishes a new version. Rollback is one click.</a:t>
+            </a:r>
+          </a:p>
+        </p:txBody>
+      </p:sp>
+      <p:sp>
+        <p:nvSpPr>
+          <p:cNvPr id="30" name="Rounded Rectangle 29"/>
           <p:cNvSpPr/>
           <p:nvPr/>
         </p:nvSpPr>
         <p:spPr>
           <a:xfrm>
-            <a:off x="4572000" y="1234440"/>
-            <a:ext cx="2377440" cy="1463040"/>
+            <a:off x="8097316" y="4480560"/>
+            <a:ext cx="3545738" cy="1920239"/>
           </a:xfrm>
           <a:prstGeom prst="roundRect">
             <a:avLst/>
           </a:prstGeom>
           <a:solidFill>
-            <a:srgbClr val="0A4A4A"/>
+            <a:srgbClr val="F1EDE4"/>
           </a:solidFill>
           <a:ln>
             <a:noFill/>
@@ -7424,1019 +7581,6 @@
       </p:sp>
       <p:sp>
         <p:nvSpPr>
-          <p:cNvPr id="10" name="TextBox 9"/>
-          <p:cNvSpPr txBox="1"/>
-          <p:nvPr/>
-        </p:nvSpPr>
-        <p:spPr>
-          <a:xfrm>
-            <a:off x="4709160" y="1307592"/>
-            <a:ext cx="2103120" cy="1316736"/>
-          </a:xfrm>
-          <a:prstGeom prst="rect">
-            <a:avLst/>
-          </a:prstGeom>
-          <a:noFill/>
-        </p:spPr>
-        <p:txBody>
-          <a:bodyPr wrap="square" anchor="t" lIns="45720" rIns="45720" tIns="27432" bIns="27432">
-            <a:spAutoFit/>
-          </a:bodyPr>
-          <a:lstStyle/>
-          <a:p>
-            <a:pPr algn="l">
-              <a:spcAft>
-                <a:spcPts val="300"/>
-              </a:spcAft>
-            </a:pPr>
-            <a:r>
-              <a:rPr sz="1300" b="1">
-                <a:solidFill>
-                  <a:srgbClr val="FFFFFF"/>
-                </a:solidFill>
-                <a:latin typeface="Cambria"/>
-              </a:rPr>
-              <a:t>Written rules decide</a:t>
-            </a:r>
-          </a:p>
-          <a:p>
-            <a:pPr algn="l">
-              <a:spcAft>
-                <a:spcPts val="0"/>
-              </a:spcAft>
-            </a:pPr>
-            <a:r>
-              <a:rPr sz="1100" b="0">
-                <a:solidFill>
-                  <a:srgbClr val="FFFFFF"/>
-                </a:solidFill>
-                <a:latin typeface="Calibri"/>
-              </a:rPr>
-              <a:t>An ordered list in a versioned file: 7 'send to a person' rules first, 4 'approve' rules after. First match wins. Unknown never approves.</a:t>
-            </a:r>
-          </a:p>
-        </p:txBody>
-      </p:sp>
-      <p:sp>
-        <p:nvSpPr>
-          <p:cNvPr id="11" name="Right Arrow 10"/>
-          <p:cNvSpPr/>
-          <p:nvPr/>
-        </p:nvSpPr>
-        <p:spPr>
-          <a:xfrm>
-            <a:off x="6995159" y="1810512"/>
-            <a:ext cx="274320" cy="310896"/>
-          </a:xfrm>
-          <a:prstGeom prst="rightArrow">
-            <a:avLst/>
-          </a:prstGeom>
-          <a:solidFill>
-            <a:srgbClr val="0F6E6E"/>
-          </a:solidFill>
-          <a:ln>
-            <a:noFill/>
-          </a:ln>
-          <a:effectLst/>
-        </p:spPr>
-        <p:style>
-          <a:lnRef idx="1">
-            <a:schemeClr val="accent1"/>
-          </a:lnRef>
-          <a:fillRef idx="3">
-            <a:schemeClr val="accent1"/>
-          </a:fillRef>
-          <a:effectRef idx="2">
-            <a:schemeClr val="accent1"/>
-          </a:effectRef>
-          <a:fontRef idx="minor">
-            <a:schemeClr val="lt1"/>
-          </a:fontRef>
-        </p:style>
-        <p:txBody>
-          <a:bodyPr rtlCol="0" anchor="ctr"/>
-          <a:lstStyle/>
-          <a:p>
-            <a:pPr algn="ctr"/>
-          </a:p>
-        </p:txBody>
-      </p:sp>
-      <p:sp>
-        <p:nvSpPr>
-          <p:cNvPr id="12" name="Rounded Rectangle 11"/>
-          <p:cNvSpPr/>
-          <p:nvPr/>
-        </p:nvSpPr>
-        <p:spPr>
-          <a:xfrm>
-            <a:off x="7315200" y="1234440"/>
-            <a:ext cx="1828800" cy="685800"/>
-          </a:xfrm>
-          <a:prstGeom prst="roundRect">
-            <a:avLst/>
-          </a:prstGeom>
-          <a:solidFill>
-            <a:srgbClr val="F1EDE4"/>
-          </a:solidFill>
-          <a:ln>
-            <a:noFill/>
-          </a:ln>
-          <a:effectLst/>
-        </p:spPr>
-        <p:style>
-          <a:lnRef idx="1">
-            <a:schemeClr val="accent1"/>
-          </a:lnRef>
-          <a:fillRef idx="3">
-            <a:schemeClr val="accent1"/>
-          </a:fillRef>
-          <a:effectRef idx="2">
-            <a:schemeClr val="accent1"/>
-          </a:effectRef>
-          <a:fontRef idx="minor">
-            <a:schemeClr val="lt1"/>
-          </a:fontRef>
-        </p:style>
-        <p:txBody>
-          <a:bodyPr rtlCol="0" anchor="ctr"/>
-          <a:lstStyle/>
-          <a:p>
-            <a:pPr algn="ctr"/>
-          </a:p>
-        </p:txBody>
-      </p:sp>
-      <p:sp>
-        <p:nvSpPr>
-          <p:cNvPr id="13" name="TextBox 12"/>
-          <p:cNvSpPr txBox="1"/>
-          <p:nvPr/>
-        </p:nvSpPr>
-        <p:spPr>
-          <a:xfrm>
-            <a:off x="7452360" y="1307592"/>
-            <a:ext cx="1554480" cy="539496"/>
-          </a:xfrm>
-          <a:prstGeom prst="rect">
-            <a:avLst/>
-          </a:prstGeom>
-          <a:noFill/>
-        </p:spPr>
-        <p:txBody>
-          <a:bodyPr wrap="square" anchor="t" lIns="45720" rIns="45720" tIns="27432" bIns="27432">
-            <a:spAutoFit/>
-          </a:bodyPr>
-          <a:lstStyle/>
-          <a:p>
-            <a:pPr algn="l">
-              <a:spcAft>
-                <a:spcPts val="300"/>
-              </a:spcAft>
-            </a:pPr>
-            <a:r>
-              <a:rPr sz="1300" b="1">
-                <a:solidFill>
-                  <a:srgbClr val="0A4A4A"/>
-                </a:solidFill>
-                <a:latin typeface="Cambria"/>
-              </a:rPr>
-              <a:t>Approve</a:t>
-            </a:r>
-          </a:p>
-          <a:p>
-            <a:pPr algn="l">
-              <a:spcAft>
-                <a:spcPts val="0"/>
-              </a:spcAft>
-            </a:pPr>
-            <a:r>
-              <a:rPr sz="1100" b="0">
-                <a:solidFill>
-                  <a:srgbClr val="1B1B1B"/>
-                </a:solidFill>
-                <a:latin typeface="Calibri"/>
-              </a:rPr>
-              <a:t>120 of 248 (48%); rule and quote recorded.</a:t>
-            </a:r>
-          </a:p>
-        </p:txBody>
-      </p:sp>
-      <p:sp>
-        <p:nvSpPr>
-          <p:cNvPr id="14" name="Rounded Rectangle 13"/>
-          <p:cNvSpPr/>
-          <p:nvPr/>
-        </p:nvSpPr>
-        <p:spPr>
-          <a:xfrm>
-            <a:off x="7315200" y="2011680"/>
-            <a:ext cx="1828800" cy="685800"/>
-          </a:xfrm>
-          <a:prstGeom prst="roundRect">
-            <a:avLst/>
-          </a:prstGeom>
-          <a:solidFill>
-            <a:srgbClr val="F1EDE4"/>
-          </a:solidFill>
-          <a:ln>
-            <a:noFill/>
-          </a:ln>
-          <a:effectLst/>
-        </p:spPr>
-        <p:style>
-          <a:lnRef idx="1">
-            <a:schemeClr val="accent1"/>
-          </a:lnRef>
-          <a:fillRef idx="3">
-            <a:schemeClr val="accent1"/>
-          </a:fillRef>
-          <a:effectRef idx="2">
-            <a:schemeClr val="accent1"/>
-          </a:effectRef>
-          <a:fontRef idx="minor">
-            <a:schemeClr val="lt1"/>
-          </a:fontRef>
-        </p:style>
-        <p:txBody>
-          <a:bodyPr rtlCol="0" anchor="ctr"/>
-          <a:lstStyle/>
-          <a:p>
-            <a:pPr algn="ctr"/>
-          </a:p>
-        </p:txBody>
-      </p:sp>
-      <p:sp>
-        <p:nvSpPr>
-          <p:cNvPr id="15" name="TextBox 14"/>
-          <p:cNvSpPr txBox="1"/>
-          <p:nvPr/>
-        </p:nvSpPr>
-        <p:spPr>
-          <a:xfrm>
-            <a:off x="7452360" y="2084832"/>
-            <a:ext cx="1554480" cy="539496"/>
-          </a:xfrm>
-          <a:prstGeom prst="rect">
-            <a:avLst/>
-          </a:prstGeom>
-          <a:noFill/>
-        </p:spPr>
-        <p:txBody>
-          <a:bodyPr wrap="square" anchor="t" lIns="45720" rIns="45720" tIns="27432" bIns="27432">
-            <a:spAutoFit/>
-          </a:bodyPr>
-          <a:lstStyle/>
-          <a:p>
-            <a:pPr algn="l">
-              <a:spcAft>
-                <a:spcPts val="300"/>
-              </a:spcAft>
-            </a:pPr>
-            <a:r>
-              <a:rPr sz="1300" b="1">
-                <a:solidFill>
-                  <a:srgbClr val="0A4A4A"/>
-                </a:solidFill>
-                <a:latin typeface="Cambria"/>
-              </a:rPr>
-              <a:t>To a person</a:t>
-            </a:r>
-          </a:p>
-          <a:p>
-            <a:pPr algn="l">
-              <a:spcAft>
-                <a:spcPts val="0"/>
-              </a:spcAft>
-            </a:pPr>
-            <a:r>
-              <a:rPr sz="1100" b="0">
-                <a:solidFill>
-                  <a:srgbClr val="1B1B1B"/>
-                </a:solidFill>
-                <a:latin typeface="Calibri"/>
-              </a:rPr>
-              <a:t>128 of 248, with the reason in plain words.</a:t>
-            </a:r>
-          </a:p>
-        </p:txBody>
-      </p:sp>
-      <p:sp>
-        <p:nvSpPr>
-          <p:cNvPr id="16" name="Right Arrow 15"/>
-          <p:cNvSpPr/>
-          <p:nvPr/>
-        </p:nvSpPr>
-        <p:spPr>
-          <a:xfrm>
-            <a:off x="9189720" y="2199132"/>
-            <a:ext cx="274320" cy="310896"/>
-          </a:xfrm>
-          <a:prstGeom prst="rightArrow">
-            <a:avLst/>
-          </a:prstGeom>
-          <a:solidFill>
-            <a:srgbClr val="0F6E6E"/>
-          </a:solidFill>
-          <a:ln>
-            <a:noFill/>
-          </a:ln>
-          <a:effectLst/>
-        </p:spPr>
-        <p:style>
-          <a:lnRef idx="1">
-            <a:schemeClr val="accent1"/>
-          </a:lnRef>
-          <a:fillRef idx="3">
-            <a:schemeClr val="accent1"/>
-          </a:fillRef>
-          <a:effectRef idx="2">
-            <a:schemeClr val="accent1"/>
-          </a:effectRef>
-          <a:fontRef idx="minor">
-            <a:schemeClr val="lt1"/>
-          </a:fontRef>
-        </p:style>
-        <p:txBody>
-          <a:bodyPr rtlCol="0" anchor="ctr"/>
-          <a:lstStyle/>
-          <a:p>
-            <a:pPr algn="ctr"/>
-          </a:p>
-        </p:txBody>
-      </p:sp>
-      <p:sp>
-        <p:nvSpPr>
-          <p:cNvPr id="17" name="Rounded Rectangle 16"/>
-          <p:cNvSpPr/>
-          <p:nvPr/>
-        </p:nvSpPr>
-        <p:spPr>
-          <a:xfrm>
-            <a:off x="9509760" y="1234440"/>
-            <a:ext cx="2133295" cy="1463040"/>
-          </a:xfrm>
-          <a:prstGeom prst="roundRect">
-            <a:avLst/>
-          </a:prstGeom>
-          <a:solidFill>
-            <a:srgbClr val="F1EDE4"/>
-          </a:solidFill>
-          <a:ln>
-            <a:noFill/>
-          </a:ln>
-          <a:effectLst/>
-        </p:spPr>
-        <p:style>
-          <a:lnRef idx="1">
-            <a:schemeClr val="accent1"/>
-          </a:lnRef>
-          <a:fillRef idx="3">
-            <a:schemeClr val="accent1"/>
-          </a:fillRef>
-          <a:effectRef idx="2">
-            <a:schemeClr val="accent1"/>
-          </a:effectRef>
-          <a:fontRef idx="minor">
-            <a:schemeClr val="lt1"/>
-          </a:fontRef>
-        </p:style>
-        <p:txBody>
-          <a:bodyPr rtlCol="0" anchor="ctr"/>
-          <a:lstStyle/>
-          <a:p>
-            <a:pPr algn="ctr"/>
-          </a:p>
-        </p:txBody>
-      </p:sp>
-      <p:sp>
-        <p:nvSpPr>
-          <p:cNvPr id="18" name="TextBox 17"/>
-          <p:cNvSpPr txBox="1"/>
-          <p:nvPr/>
-        </p:nvSpPr>
-        <p:spPr>
-          <a:xfrm>
-            <a:off x="9646920" y="1307592"/>
-            <a:ext cx="1858975" cy="1316736"/>
-          </a:xfrm>
-          <a:prstGeom prst="rect">
-            <a:avLst/>
-          </a:prstGeom>
-          <a:noFill/>
-        </p:spPr>
-        <p:txBody>
-          <a:bodyPr wrap="square" anchor="t" lIns="45720" rIns="45720" tIns="27432" bIns="27432">
-            <a:spAutoFit/>
-          </a:bodyPr>
-          <a:lstStyle/>
-          <a:p>
-            <a:pPr algn="l">
-              <a:spcAft>
-                <a:spcPts val="300"/>
-              </a:spcAft>
-            </a:pPr>
-            <a:r>
-              <a:rPr sz="1300" b="1">
-                <a:solidFill>
-                  <a:srgbClr val="0A4A4A"/>
-                </a:solidFill>
-                <a:latin typeface="Cambria"/>
-              </a:rPr>
-              <a:t>Two queues</a:t>
-            </a:r>
-          </a:p>
-          <a:p>
-            <a:pPr algn="l">
-              <a:spcAft>
-                <a:spcPts val="0"/>
-              </a:spcAft>
-            </a:pPr>
-            <a:r>
-              <a:rPr sz="1100" b="0">
-                <a:solidFill>
-                  <a:srgbClr val="1B1B1B"/>
-                </a:solidFill>
-                <a:latin typeface="Calibri"/>
-              </a:rPr>
-              <a:t>The reviewer queue, oldest first. The fraud queue for flagged cases.</a:t>
-            </a:r>
-          </a:p>
-        </p:txBody>
-      </p:sp>
-      <p:sp>
-        <p:nvSpPr>
-          <p:cNvPr id="19" name="Up Arrow 18"/>
-          <p:cNvSpPr/>
-          <p:nvPr/>
-        </p:nvSpPr>
-        <p:spPr>
-          <a:xfrm>
-            <a:off x="5605272" y="2752344"/>
-            <a:ext cx="310896" cy="256032"/>
-          </a:xfrm>
-          <a:prstGeom prst="upArrow">
-            <a:avLst/>
-          </a:prstGeom>
-          <a:solidFill>
-            <a:srgbClr val="0F6E6E"/>
-          </a:solidFill>
-          <a:ln>
-            <a:noFill/>
-          </a:ln>
-          <a:effectLst/>
-        </p:spPr>
-        <p:style>
-          <a:lnRef idx="1">
-            <a:schemeClr val="accent1"/>
-          </a:lnRef>
-          <a:fillRef idx="3">
-            <a:schemeClr val="accent1"/>
-          </a:fillRef>
-          <a:effectRef idx="2">
-            <a:schemeClr val="accent1"/>
-          </a:effectRef>
-          <a:fontRef idx="minor">
-            <a:schemeClr val="lt1"/>
-          </a:fontRef>
-        </p:style>
-        <p:txBody>
-          <a:bodyPr rtlCol="0" anchor="ctr"/>
-          <a:lstStyle/>
-          <a:p>
-            <a:pPr algn="ctr"/>
-          </a:p>
-        </p:txBody>
-      </p:sp>
-      <p:sp>
-        <p:nvSpPr>
-          <p:cNvPr id="20" name="Rounded Rectangle 19"/>
-          <p:cNvSpPr/>
-          <p:nvPr/>
-        </p:nvSpPr>
-        <p:spPr>
-          <a:xfrm>
-            <a:off x="4572000" y="3063240"/>
-            <a:ext cx="2377440" cy="1188720"/>
-          </a:xfrm>
-          <a:prstGeom prst="roundRect">
-            <a:avLst/>
-          </a:prstGeom>
-          <a:solidFill>
-            <a:srgbClr val="F1EDE4"/>
-          </a:solidFill>
-          <a:ln>
-            <a:noFill/>
-          </a:ln>
-          <a:effectLst/>
-        </p:spPr>
-        <p:style>
-          <a:lnRef idx="1">
-            <a:schemeClr val="accent1"/>
-          </a:lnRef>
-          <a:fillRef idx="3">
-            <a:schemeClr val="accent1"/>
-          </a:fillRef>
-          <a:effectRef idx="2">
-            <a:schemeClr val="accent1"/>
-          </a:effectRef>
-          <a:fontRef idx="minor">
-            <a:schemeClr val="lt1"/>
-          </a:fontRef>
-        </p:style>
-        <p:txBody>
-          <a:bodyPr rtlCol="0" anchor="ctr"/>
-          <a:lstStyle/>
-          <a:p>
-            <a:pPr algn="ctr"/>
-          </a:p>
-        </p:txBody>
-      </p:sp>
-      <p:sp>
-        <p:nvSpPr>
-          <p:cNvPr id="21" name="TextBox 20"/>
-          <p:cNvSpPr txBox="1"/>
-          <p:nvPr/>
-        </p:nvSpPr>
-        <p:spPr>
-          <a:xfrm>
-            <a:off x="4709160" y="3136392"/>
-            <a:ext cx="2103120" cy="1042416"/>
-          </a:xfrm>
-          <a:prstGeom prst="rect">
-            <a:avLst/>
-          </a:prstGeom>
-          <a:noFill/>
-        </p:spPr>
-        <p:txBody>
-          <a:bodyPr wrap="square" anchor="t" lIns="45720" rIns="45720" tIns="27432" bIns="27432">
-            <a:spAutoFit/>
-          </a:bodyPr>
-          <a:lstStyle/>
-          <a:p>
-            <a:pPr algn="l">
-              <a:spcAft>
-                <a:spcPts val="300"/>
-              </a:spcAft>
-            </a:pPr>
-            <a:r>
-              <a:rPr sz="1300" b="1">
-                <a:solidFill>
-                  <a:srgbClr val="0A4A4A"/>
-                </a:solidFill>
-                <a:latin typeface="Cambria"/>
-              </a:rPr>
-              <a:t>A model reads the note, only when a rule asks</a:t>
-            </a:r>
-          </a:p>
-          <a:p>
-            <a:pPr algn="l">
-              <a:spcAft>
-                <a:spcPts val="0"/>
-              </a:spcAft>
-            </a:pPr>
-            <a:r>
-              <a:rPr sz="1100" b="0">
-                <a:solidFill>
-                  <a:srgbClr val="1B1B1B"/>
-                </a:solidFill>
-                <a:latin typeface="Calibri"/>
-              </a:rPr>
-              <a:t>Five yes/no questions, each with the quote it relied on. Answers are saved. No key means 'unknown', which goes to a person.</a:t>
-            </a:r>
-          </a:p>
-        </p:txBody>
-      </p:sp>
-      <p:sp>
-        <p:nvSpPr>
-          <p:cNvPr id="22" name="TextBox 21"/>
-          <p:cNvSpPr txBox="1"/>
-          <p:nvPr/>
-        </p:nvSpPr>
-        <p:spPr>
-          <a:xfrm>
-            <a:off x="548640" y="3063240"/>
-            <a:ext cx="3474720" cy="1188720"/>
-          </a:xfrm>
-          <a:prstGeom prst="rect">
-            <a:avLst/>
-          </a:prstGeom>
-          <a:noFill/>
-        </p:spPr>
-        <p:txBody>
-          <a:bodyPr wrap="square" anchor="t" lIns="45720" rIns="45720" tIns="27432" bIns="27432">
-            <a:spAutoFit/>
-          </a:bodyPr>
-          <a:lstStyle/>
-          <a:p>
-            <a:pPr algn="l">
-              <a:spcAft>
-                <a:spcPts val="400"/>
-              </a:spcAft>
-            </a:pPr>
-            <a:r>
-              <a:rPr sz="1200" b="1">
-                <a:solidFill>
-                  <a:srgbClr val="0A4A4A"/>
-                </a:solidFill>
-                <a:latin typeface="Calibri"/>
-              </a:rPr>
-              <a:t>The same path on the command line and in the app.</a:t>
-            </a:r>
-          </a:p>
-          <a:p>
-            <a:pPr algn="l">
-              <a:spcAft>
-                <a:spcPts val="600"/>
-              </a:spcAft>
-            </a:pPr>
-            <a:r>
-              <a:rPr sz="1200" b="0">
-                <a:solidFill>
-                  <a:srgbClr val="6B6B6B"/>
-                </a:solidFill>
-                <a:latin typeface="Calibri"/>
-              </a:rPr>
-              <a:t>refund-agent decide any.csv writes one line per request: the outcome, the rule that fired, the facts it used, the rules version. Nothing in the app is a mock.</a:t>
-            </a:r>
-          </a:p>
-        </p:txBody>
-      </p:sp>
-      <p:sp>
-        <p:nvSpPr>
-          <p:cNvPr id="23" name="TextBox 22"/>
-          <p:cNvSpPr txBox="1"/>
-          <p:nvPr/>
-        </p:nvSpPr>
-        <p:spPr>
-          <a:xfrm>
-            <a:off x="7315200" y="3063240"/>
-            <a:ext cx="4327855" cy="1188720"/>
-          </a:xfrm>
-          <a:prstGeom prst="rect">
-            <a:avLst/>
-          </a:prstGeom>
-          <a:noFill/>
-        </p:spPr>
-        <p:txBody>
-          <a:bodyPr wrap="square" anchor="t" lIns="45720" rIns="45720" tIns="27432" bIns="27432">
-            <a:spAutoFit/>
-          </a:bodyPr>
-          <a:lstStyle/>
-          <a:p>
-            <a:pPr algn="l">
-              <a:spcAft>
-                <a:spcPts val="400"/>
-              </a:spcAft>
-            </a:pPr>
-            <a:r>
-              <a:rPr sz="1200" b="1">
-                <a:solidFill>
-                  <a:srgbClr val="0A4A4A"/>
-                </a:solidFill>
-                <a:latin typeface="Calibri"/>
-              </a:rPr>
-              <a:t>Two outcomes only.</a:t>
-            </a:r>
-          </a:p>
-          <a:p>
-            <a:pPr algn="l">
-              <a:spcAft>
-                <a:spcPts val="600"/>
-              </a:spcAft>
-            </a:pPr>
-            <a:r>
-              <a:rPr sz="1200" b="0">
-                <a:solidFill>
-                  <a:srgbClr val="6B6B6B"/>
-                </a:solidFill>
-                <a:latin typeface="Calibri"/>
-              </a:rPr>
-              <a:t>Approve, or send to a person. The system never rejects: a wrong rejection costs an appeal and maybe the customer. Rejecting stays with people.</a:t>
-            </a:r>
-          </a:p>
-        </p:txBody>
-      </p:sp>
-      <p:sp>
-        <p:nvSpPr>
-          <p:cNvPr id="24" name="Rounded Rectangle 23"/>
-          <p:cNvSpPr/>
-          <p:nvPr/>
-        </p:nvSpPr>
-        <p:spPr>
-          <a:xfrm>
-            <a:off x="548640" y="4480560"/>
-            <a:ext cx="3545738" cy="1920239"/>
-          </a:xfrm>
-          <a:prstGeom prst="roundRect">
-            <a:avLst/>
-          </a:prstGeom>
-          <a:solidFill>
-            <a:srgbClr val="F1EDE4"/>
-          </a:solidFill>
-          <a:ln>
-            <a:noFill/>
-          </a:ln>
-          <a:effectLst/>
-        </p:spPr>
-        <p:style>
-          <a:lnRef idx="1">
-            <a:schemeClr val="accent1"/>
-          </a:lnRef>
-          <a:fillRef idx="3">
-            <a:schemeClr val="accent1"/>
-          </a:fillRef>
-          <a:effectRef idx="2">
-            <a:schemeClr val="accent1"/>
-          </a:effectRef>
-          <a:fontRef idx="minor">
-            <a:schemeClr val="lt1"/>
-          </a:fontRef>
-        </p:style>
-        <p:txBody>
-          <a:bodyPr rtlCol="0" anchor="ctr"/>
-          <a:lstStyle/>
-          <a:p>
-            <a:pPr algn="ctr"/>
-          </a:p>
-        </p:txBody>
-      </p:sp>
-      <p:sp>
-        <p:nvSpPr>
-          <p:cNvPr id="25" name="TextBox 24"/>
-          <p:cNvSpPr txBox="1"/>
-          <p:nvPr/>
-        </p:nvSpPr>
-        <p:spPr>
-          <a:xfrm>
-            <a:off x="777240" y="4617720"/>
-            <a:ext cx="3088538" cy="411480"/>
-          </a:xfrm>
-          <a:prstGeom prst="rect">
-            <a:avLst/>
-          </a:prstGeom>
-          <a:noFill/>
-        </p:spPr>
-        <p:txBody>
-          <a:bodyPr wrap="square" anchor="t" lIns="45720" rIns="45720" tIns="27432" bIns="27432">
-            <a:spAutoFit/>
-          </a:bodyPr>
-          <a:lstStyle/>
-          <a:p>
-            <a:pPr algn="l">
-              <a:spcAft>
-                <a:spcPts val="600"/>
-              </a:spcAft>
-            </a:pPr>
-            <a:r>
-              <a:rPr sz="1600" b="1">
-                <a:solidFill>
-                  <a:srgbClr val="0A4A4A"/>
-                </a:solidFill>
-                <a:latin typeface="Cambria"/>
-              </a:rPr>
-              <a:t>The reviewer's screen</a:t>
-            </a:r>
-          </a:p>
-        </p:txBody>
-      </p:sp>
-      <p:sp>
-        <p:nvSpPr>
-          <p:cNvPr id="26" name="TextBox 25"/>
-          <p:cNvSpPr txBox="1"/>
-          <p:nvPr/>
-        </p:nvSpPr>
-        <p:spPr>
-          <a:xfrm>
-            <a:off x="777240" y="5074920"/>
-            <a:ext cx="3088538" cy="1188719"/>
-          </a:xfrm>
-          <a:prstGeom prst="rect">
-            <a:avLst/>
-          </a:prstGeom>
-          <a:noFill/>
-        </p:spPr>
-        <p:txBody>
-          <a:bodyPr wrap="square" anchor="t" lIns="45720" rIns="45720" tIns="27432" bIns="27432">
-            <a:spAutoFit/>
-          </a:bodyPr>
-          <a:lstStyle/>
-          <a:p>
-            <a:pPr algn="l">
-              <a:spcAft>
-                <a:spcPts val="600"/>
-              </a:spcAft>
-            </a:pPr>
-            <a:r>
-              <a:rPr sz="1100" b="0">
-                <a:solidFill>
-                  <a:srgbClr val="1B1B1B"/>
-                </a:solidFill>
-                <a:latin typeface="Calibri"/>
-              </a:rPr>
-              <a:t>Why the request is here, in plain words; what the model read, with the exact quote; the customer's history; the manager's note that applies.</a:t>
-            </a:r>
-          </a:p>
-          <a:p>
-            <a:pPr algn="l">
-              <a:spcAft>
-                <a:spcPts val="600"/>
-              </a:spcAft>
-            </a:pPr>
-            <a:r>
-              <a:rPr sz="1100" b="0">
-                <a:solidFill>
-                  <a:srgbClr val="1B1B1B"/>
-                </a:solidFill>
-                <a:latin typeface="Calibri"/>
-              </a:rPr>
-              <a:t>Approve, approve part, reject, or send to the fraud team. Each goes to the log with the reviewer's name and the rules version.</a:t>
-            </a:r>
-          </a:p>
-        </p:txBody>
-      </p:sp>
-      <p:sp>
-        <p:nvSpPr>
-          <p:cNvPr id="27" name="Rounded Rectangle 26"/>
-          <p:cNvSpPr/>
-          <p:nvPr/>
-        </p:nvSpPr>
-        <p:spPr>
-          <a:xfrm>
-            <a:off x="4322978" y="4480560"/>
-            <a:ext cx="3545738" cy="1920239"/>
-          </a:xfrm>
-          <a:prstGeom prst="roundRect">
-            <a:avLst/>
-          </a:prstGeom>
-          <a:solidFill>
-            <a:srgbClr val="F1EDE4"/>
-          </a:solidFill>
-          <a:ln>
-            <a:noFill/>
-          </a:ln>
-          <a:effectLst/>
-        </p:spPr>
-        <p:style>
-          <a:lnRef idx="1">
-            <a:schemeClr val="accent1"/>
-          </a:lnRef>
-          <a:fillRef idx="3">
-            <a:schemeClr val="accent1"/>
-          </a:fillRef>
-          <a:effectRef idx="2">
-            <a:schemeClr val="accent1"/>
-          </a:effectRef>
-          <a:fontRef idx="minor">
-            <a:schemeClr val="lt1"/>
-          </a:fontRef>
-        </p:style>
-        <p:txBody>
-          <a:bodyPr rtlCol="0" anchor="ctr"/>
-          <a:lstStyle/>
-          <a:p>
-            <a:pPr algn="ctr"/>
-          </a:p>
-        </p:txBody>
-      </p:sp>
-      <p:sp>
-        <p:nvSpPr>
-          <p:cNvPr id="28" name="TextBox 27"/>
-          <p:cNvSpPr txBox="1"/>
-          <p:nvPr/>
-        </p:nvSpPr>
-        <p:spPr>
-          <a:xfrm>
-            <a:off x="4551578" y="4617720"/>
-            <a:ext cx="3088538" cy="411480"/>
-          </a:xfrm>
-          <a:prstGeom prst="rect">
-            <a:avLst/>
-          </a:prstGeom>
-          <a:noFill/>
-        </p:spPr>
-        <p:txBody>
-          <a:bodyPr wrap="square" anchor="t" lIns="45720" rIns="45720" tIns="27432" bIns="27432">
-            <a:spAutoFit/>
-          </a:bodyPr>
-          <a:lstStyle/>
-          <a:p>
-            <a:pPr algn="l">
-              <a:spcAft>
-                <a:spcPts val="600"/>
-              </a:spcAft>
-            </a:pPr>
-            <a:r>
-              <a:rPr sz="1600" b="1">
-                <a:solidFill>
-                  <a:srgbClr val="0A4A4A"/>
-                </a:solidFill>
-                <a:latin typeface="Cambria"/>
-              </a:rPr>
-              <a:t>The manager's screen</a:t>
-            </a:r>
-          </a:p>
-        </p:txBody>
-      </p:sp>
-      <p:sp>
-        <p:nvSpPr>
-          <p:cNvPr id="29" name="TextBox 28"/>
-          <p:cNvSpPr txBox="1"/>
-          <p:nvPr/>
-        </p:nvSpPr>
-        <p:spPr>
-          <a:xfrm>
-            <a:off x="4551578" y="5074920"/>
-            <a:ext cx="3088538" cy="1188719"/>
-          </a:xfrm>
-          <a:prstGeom prst="rect">
-            <a:avLst/>
-          </a:prstGeom>
-          <a:noFill/>
-        </p:spPr>
-        <p:txBody>
-          <a:bodyPr wrap="square" anchor="t" lIns="45720" rIns="45720" tIns="27432" bIns="27432">
-            <a:spAutoFit/>
-          </a:bodyPr>
-          <a:lstStyle/>
-          <a:p>
-            <a:pPr algn="l">
-              <a:spcAft>
-                <a:spcPts val="600"/>
-              </a:spcAft>
-            </a:pPr>
-            <a:r>
-              <a:rPr sz="1100" b="0">
-                <a:solidFill>
-                  <a:srgbClr val="1B1B1B"/>
-                </a:solidFill>
-                <a:latin typeface="Calibri"/>
-              </a:rPr>
-              <a:t>She types a sentence ('anything over $300 comes to us'); the model turns it into a rule, or says why it cannot.</a:t>
-            </a:r>
-          </a:p>
-          <a:p>
-            <a:pPr algn="l">
-              <a:spcAft>
-                <a:spcPts val="600"/>
-              </a:spcAft>
-            </a:pPr>
-            <a:r>
-              <a:rPr sz="1100" b="0">
-                <a:solidFill>
-                  <a:srgbClr val="1B1B1B"/>
-                </a:solidFill>
-                <a:latin typeface="Calibri"/>
-              </a:rPr>
-              <a:t>A dry run replays old and new rules on the 248 past requests; then she publishes a new version. Rollback is one click.</a:t>
-            </a:r>
-          </a:p>
-        </p:txBody>
-      </p:sp>
-      <p:sp>
-        <p:nvSpPr>
-          <p:cNvPr id="30" name="Rounded Rectangle 29"/>
-          <p:cNvSpPr/>
-          <p:nvPr/>
-        </p:nvSpPr>
-        <p:spPr>
-          <a:xfrm>
-            <a:off x="8097316" y="4480560"/>
-            <a:ext cx="3545738" cy="1920239"/>
-          </a:xfrm>
-          <a:prstGeom prst="roundRect">
-            <a:avLst/>
-          </a:prstGeom>
-          <a:solidFill>
-            <a:srgbClr val="F1EDE4"/>
-          </a:solidFill>
-          <a:ln>
-            <a:noFill/>
-          </a:ln>
-          <a:effectLst/>
-        </p:spPr>
-        <p:style>
-          <a:lnRef idx="1">
-            <a:schemeClr val="accent1"/>
-          </a:lnRef>
-          <a:fillRef idx="3">
-            <a:schemeClr val="accent1"/>
-          </a:fillRef>
-          <a:effectRef idx="2">
-            <a:schemeClr val="accent1"/>
-          </a:effectRef>
-          <a:fontRef idx="minor">
-            <a:schemeClr val="lt1"/>
-          </a:fontRef>
-        </p:style>
-        <p:txBody>
-          <a:bodyPr rtlCol="0" anchor="ctr"/>
-          <a:lstStyle/>
-          <a:p>
-            <a:pPr algn="ctr"/>
-          </a:p>
-        </p:txBody>
-      </p:sp>
-      <p:sp>
-        <p:nvSpPr>
           <p:cNvPr id="31" name="TextBox 30"/>
           <p:cNvSpPr txBox="1"/>
           <p:nvPr/>
@@ -8537,7 +7681,7 @@
 </p:sld>
 </file>
 
-<file path=ppt/slides/slide4.xml><?xml version="1.0" encoding="utf-8"?>
+<file path=ppt/slides/slide5.xml><?xml version="1.0" encoding="utf-8"?>
 <p:sld xmlns:a="http://schemas.openxmlformats.org/drawingml/2006/main" xmlns:p="http://schemas.openxmlformats.org/presentationml/2006/main" xmlns:r="http://schemas.openxmlformats.org/officeDocument/2006/relationships">
   <p:cSld>
     <p:spTree>
@@ -9724,7 +8868,7 @@
 </p:sld>
 </file>
 
-<file path=ppt/slides/slide5.xml><?xml version="1.0" encoding="utf-8"?>
+<file path=ppt/slides/slide6.xml><?xml version="1.0" encoding="utf-8"?>
 <p:sld xmlns:a="http://schemas.openxmlformats.org/drawingml/2006/main" xmlns:p="http://schemas.openxmlformats.org/presentationml/2006/main" xmlns:r="http://schemas.openxmlformats.org/officeDocument/2006/relationships">
   <p:cSld>
     <p:spTree>
@@ -9768,7 +8912,7 @@
                 </a:solidFill>
                 <a:latin typeface="Cambria"/>
               </a:rPr>
-              <a:t>The line: what the system decides alone, and what goes to a person</a:t>
+              <a:t>How we would know it is wrong: before switch-on, and after</a:t>
             </a:r>
           </a:p>
         </p:txBody>
@@ -9782,7 +8926,7 @@
         <p:spPr>
           <a:xfrm>
             <a:off x="548640" y="1234440"/>
-            <a:ext cx="5440680" cy="5120640"/>
+            <a:ext cx="5440680" cy="2377440"/>
           </a:xfrm>
           <a:prstGeom prst="roundRect">
             <a:avLst/>
@@ -9851,7 +8995,7 @@
                 </a:solidFill>
                 <a:latin typeface="Cambria"/>
               </a:rPr>
-              <a:t>Goes to a person (checked first)</a:t>
+              <a:t>Before: the replay is a test</a:t>
             </a:r>
           </a:p>
         </p:txBody>
@@ -9865,7 +9009,7 @@
         <p:spPr>
           <a:xfrm>
             <a:off x="777240" y="1874519"/>
-            <a:ext cx="4983480" cy="4343400"/>
+            <a:ext cx="4983480" cy="1600200"/>
           </a:xfrm>
           <a:prstGeom prst="rect">
             <a:avLst/>
@@ -9877,1029 +9021,6 @@
             <a:spAutoFit/>
           </a:bodyPr>
           <a:lstStyle/>
-          <a:p>
-            <a:pPr algn="l">
-              <a:spcAft>
-                <a:spcPts val="800"/>
-              </a:spcAft>
-            </a:pPr>
-            <a:r>
-              <a:rPr sz="1300" b="0">
-                <a:solidFill>
-                  <a:srgbClr val="1B1B1B"/>
-                </a:solidFill>
-                <a:latin typeface="Calibri"/>
-              </a:rPr>
-              <a:t>•  Fraud flag from the payment provider: goes to the fraud team.</a:t>
-            </a:r>
-          </a:p>
-          <a:p>
-            <a:pPr algn="l">
-              <a:spcAft>
-                <a:spcPts val="800"/>
-              </a:spcAft>
-            </a:pPr>
-            <a:r>
-              <a:rPr sz="1300" b="0">
-                <a:solidFill>
-                  <a:srgbClr val="1B1B1B"/>
-                </a:solidFill>
-                <a:latin typeface="Calibri"/>
-              </a:rPr>
-              <a:t>•  Anything we cannot read: blank amount, blank fraud flag, unknown account age.</a:t>
-            </a:r>
-          </a:p>
-          <a:p>
-            <a:pPr algn="l">
-              <a:spcAft>
-                <a:spcPts val="800"/>
-              </a:spcAft>
-            </a:pPr>
-            <a:r>
-              <a:rPr sz="1300" b="0">
-                <a:solidFill>
-                  <a:srgbClr val="1B1B1B"/>
-                </a:solidFill>
-                <a:latin typeface="Calibri"/>
-              </a:rPr>
-              <a:t>•  Over $200.</a:t>
-            </a:r>
-          </a:p>
-          <a:p>
-            <a:pPr algn="l">
-              <a:spcAft>
-                <a:spcPts val="800"/>
-              </a:spcAft>
-            </a:pPr>
-            <a:r>
-              <a:rPr sz="1300" b="0">
-                <a:solidFill>
-                  <a:srgbClr val="1B1B1B"/>
-                </a:solidFill>
-                <a:latin typeface="Calibri"/>
-              </a:rPr>
-              <a:t>•  Two or more refunds in the last 12 months, or an account under 3 months old.</a:t>
-            </a:r>
-          </a:p>
-          <a:p>
-            <a:pPr algn="l">
-              <a:spcAft>
-                <a:spcPts val="800"/>
-              </a:spcAft>
-            </a:pPr>
-            <a:r>
-              <a:rPr sz="1300" b="0">
-                <a:solidFill>
-                  <a:srgbClr val="1B1B1B"/>
-                </a:solidFill>
-                <a:latin typeface="Calibri"/>
-              </a:rPr>
-              <a:t>•  Change of mind after 14 days (the manager said: no exceptions).</a:t>
-            </a:r>
-          </a:p>
-          <a:p>
-            <a:pPr algn="l">
-              <a:spcAft>
-                <a:spcPts val="800"/>
-              </a:spcAft>
-            </a:pPr>
-            <a:r>
-              <a:rPr sz="1300" b="0">
-                <a:solidFill>
-                  <a:srgbClr val="1B1B1B"/>
-                </a:solidFill>
-                <a:latin typeface="Calibri"/>
-              </a:rPr>
-              <a:t>•  Never arrived, and late delivery: these need a human judgment call.</a:t>
-            </a:r>
-          </a:p>
-          <a:p>
-            <a:pPr algn="l">
-              <a:spcAft>
-                <a:spcPts val="800"/>
-              </a:spcAft>
-            </a:pPr>
-            <a:r>
-              <a:rPr sz="1300" b="0">
-                <a:solidFill>
-                  <a:srgbClr val="1B1B1B"/>
-                </a:solidFill>
-                <a:latin typeface="Calibri"/>
-              </a:rPr>
-              <a:t>•  The same request id twice with different details.</a:t>
-            </a:r>
-          </a:p>
-        </p:txBody>
-      </p:sp>
-      <p:sp>
-        <p:nvSpPr>
-          <p:cNvPr id="6" name="Rounded Rectangle 5"/>
-          <p:cNvSpPr/>
-          <p:nvPr/>
-        </p:nvSpPr>
-        <p:spPr>
-          <a:xfrm>
-            <a:off x="6217920" y="1234440"/>
-            <a:ext cx="5440680" cy="3063240"/>
-          </a:xfrm>
-          <a:prstGeom prst="roundRect">
-            <a:avLst/>
-          </a:prstGeom>
-          <a:solidFill>
-            <a:srgbClr val="F1EDE4"/>
-          </a:solidFill>
-          <a:ln>
-            <a:noFill/>
-          </a:ln>
-          <a:effectLst/>
-        </p:spPr>
-        <p:style>
-          <a:lnRef idx="1">
-            <a:schemeClr val="accent1"/>
-          </a:lnRef>
-          <a:fillRef idx="3">
-            <a:schemeClr val="accent1"/>
-          </a:fillRef>
-          <a:effectRef idx="2">
-            <a:schemeClr val="accent1"/>
-          </a:effectRef>
-          <a:fontRef idx="minor">
-            <a:schemeClr val="lt1"/>
-          </a:fontRef>
-        </p:style>
-        <p:txBody>
-          <a:bodyPr rtlCol="0" anchor="ctr"/>
-          <a:lstStyle/>
-          <a:p>
-            <a:pPr algn="ctr"/>
-          </a:p>
-        </p:txBody>
-      </p:sp>
-      <p:sp>
-        <p:nvSpPr>
-          <p:cNvPr id="7" name="TextBox 6"/>
-          <p:cNvSpPr txBox="1"/>
-          <p:nvPr/>
-        </p:nvSpPr>
-        <p:spPr>
-          <a:xfrm>
-            <a:off x="6446520" y="1371600"/>
-            <a:ext cx="4983480" cy="411480"/>
-          </a:xfrm>
-          <a:prstGeom prst="rect">
-            <a:avLst/>
-          </a:prstGeom>
-          <a:noFill/>
-        </p:spPr>
-        <p:txBody>
-          <a:bodyPr wrap="square" anchor="t" lIns="45720" rIns="45720" tIns="27432" bIns="27432">
-            <a:spAutoFit/>
-          </a:bodyPr>
-          <a:lstStyle/>
-          <a:p>
-            <a:pPr algn="l">
-              <a:spcAft>
-                <a:spcPts val="600"/>
-              </a:spcAft>
-            </a:pPr>
-            <a:r>
-              <a:rPr sz="1600" b="1">
-                <a:solidFill>
-                  <a:srgbClr val="0A4A4A"/>
-                </a:solidFill>
-                <a:latin typeface="Cambria"/>
-              </a:rPr>
-              <a:t>Approved automatically</a:t>
-            </a:r>
-          </a:p>
-        </p:txBody>
-      </p:sp>
-      <p:sp>
-        <p:nvSpPr>
-          <p:cNvPr id="8" name="TextBox 7"/>
-          <p:cNvSpPr txBox="1"/>
-          <p:nvPr/>
-        </p:nvSpPr>
-        <p:spPr>
-          <a:xfrm>
-            <a:off x="6446520" y="1874519"/>
-            <a:ext cx="4983480" cy="2286000"/>
-          </a:xfrm>
-          <a:prstGeom prst="rect">
-            <a:avLst/>
-          </a:prstGeom>
-          <a:noFill/>
-        </p:spPr>
-        <p:txBody>
-          <a:bodyPr wrap="square" anchor="t" lIns="45720" rIns="45720" tIns="27432" bIns="27432">
-            <a:spAutoFit/>
-          </a:bodyPr>
-          <a:lstStyle/>
-          <a:p>
-            <a:pPr algn="l">
-              <a:spcAft>
-                <a:spcPts val="800"/>
-              </a:spcAft>
-            </a:pPr>
-            <a:r>
-              <a:rPr sz="1300" b="0">
-                <a:solidFill>
-                  <a:srgbClr val="1B1B1B"/>
-                </a:solidFill>
-                <a:latin typeface="Calibri"/>
-              </a:rPr>
-              <a:t>•  The warehouse confirmed we sent the wrong item.</a:t>
-            </a:r>
-          </a:p>
-          <a:p>
-            <a:pPr algn="l">
-              <a:spcAft>
-                <a:spcPts val="800"/>
-              </a:spcAft>
-            </a:pPr>
-            <a:r>
-              <a:rPr sz="1300" b="0">
-                <a:solidFill>
-                  <a:srgbClr val="1B1B1B"/>
-                </a:solidFill>
-                <a:latin typeface="Calibri"/>
-              </a:rPr>
-              <a:t>•  Damage claim of $50 or less.</a:t>
-            </a:r>
-          </a:p>
-          <a:p>
-            <a:pPr algn="l">
-              <a:spcAft>
-                <a:spcPts val="800"/>
-              </a:spcAft>
-            </a:pPr>
-            <a:r>
-              <a:rPr sz="1300" b="0">
-                <a:solidFill>
-                  <a:srgbClr val="1B1B1B"/>
-                </a:solidFill>
-                <a:latin typeface="Calibri"/>
-              </a:rPr>
-              <a:t>•  Damage claim over $50 where the note says a photo shows the damage.</a:t>
-            </a:r>
-          </a:p>
-          <a:p>
-            <a:pPr algn="l">
-              <a:spcAft>
-                <a:spcPts val="800"/>
-              </a:spcAft>
-            </a:pPr>
-            <a:r>
-              <a:rPr sz="1300" b="0">
-                <a:solidFill>
-                  <a:srgbClr val="1B1B1B"/>
-                </a:solidFill>
-                <a:latin typeface="Calibri"/>
-              </a:rPr>
-              <a:t>•  Wrong size, or change of mind within 14 days.</a:t>
-            </a:r>
-          </a:p>
-        </p:txBody>
-      </p:sp>
-      <p:sp>
-        <p:nvSpPr>
-          <p:cNvPr id="9" name="Rounded Rectangle 8"/>
-          <p:cNvSpPr/>
-          <p:nvPr/>
-        </p:nvSpPr>
-        <p:spPr>
-          <a:xfrm>
-            <a:off x="6217920" y="4480560"/>
-            <a:ext cx="5440680" cy="1874519"/>
-          </a:xfrm>
-          <a:prstGeom prst="roundRect">
-            <a:avLst/>
-          </a:prstGeom>
-          <a:solidFill>
-            <a:srgbClr val="F1EDE4"/>
-          </a:solidFill>
-          <a:ln>
-            <a:noFill/>
-          </a:ln>
-          <a:effectLst/>
-        </p:spPr>
-        <p:style>
-          <a:lnRef idx="1">
-            <a:schemeClr val="accent1"/>
-          </a:lnRef>
-          <a:fillRef idx="3">
-            <a:schemeClr val="accent1"/>
-          </a:fillRef>
-          <a:effectRef idx="2">
-            <a:schemeClr val="accent1"/>
-          </a:effectRef>
-          <a:fontRef idx="minor">
-            <a:schemeClr val="lt1"/>
-          </a:fontRef>
-        </p:style>
-        <p:txBody>
-          <a:bodyPr rtlCol="0" anchor="ctr"/>
-          <a:lstStyle/>
-          <a:p>
-            <a:pPr algn="ctr"/>
-          </a:p>
-        </p:txBody>
-      </p:sp>
-      <p:sp>
-        <p:nvSpPr>
-          <p:cNvPr id="10" name="TextBox 9"/>
-          <p:cNvSpPr txBox="1"/>
-          <p:nvPr/>
-        </p:nvSpPr>
-        <p:spPr>
-          <a:xfrm>
-            <a:off x="6446520" y="4617720"/>
-            <a:ext cx="4983480" cy="411480"/>
-          </a:xfrm>
-          <a:prstGeom prst="rect">
-            <a:avLst/>
-          </a:prstGeom>
-          <a:noFill/>
-        </p:spPr>
-        <p:txBody>
-          <a:bodyPr wrap="square" anchor="t" lIns="45720" rIns="45720" tIns="27432" bIns="27432">
-            <a:spAutoFit/>
-          </a:bodyPr>
-          <a:lstStyle/>
-          <a:p>
-            <a:pPr algn="l">
-              <a:spcAft>
-                <a:spcPts val="600"/>
-              </a:spcAft>
-            </a:pPr>
-            <a:r>
-              <a:rPr sz="1600" b="1">
-                <a:solidFill>
-                  <a:srgbClr val="0A4A4A"/>
-                </a:solidFill>
-                <a:latin typeface="Cambria"/>
-              </a:rPr>
-              <a:t>Two outcomes only</a:t>
-            </a:r>
-          </a:p>
-        </p:txBody>
-      </p:sp>
-      <p:sp>
-        <p:nvSpPr>
-          <p:cNvPr id="11" name="TextBox 10"/>
-          <p:cNvSpPr txBox="1"/>
-          <p:nvPr/>
-        </p:nvSpPr>
-        <p:spPr>
-          <a:xfrm>
-            <a:off x="6446520" y="5120640"/>
-            <a:ext cx="4983480" cy="1097279"/>
-          </a:xfrm>
-          <a:prstGeom prst="rect">
-            <a:avLst/>
-          </a:prstGeom>
-          <a:noFill/>
-        </p:spPr>
-        <p:txBody>
-          <a:bodyPr wrap="square" anchor="t" lIns="45720" rIns="45720" tIns="27432" bIns="27432">
-            <a:spAutoFit/>
-          </a:bodyPr>
-          <a:lstStyle/>
-          <a:p>
-            <a:pPr algn="l">
-              <a:spcAft>
-                <a:spcPts val="800"/>
-              </a:spcAft>
-            </a:pPr>
-            <a:r>
-              <a:rPr sz="1300" b="0">
-                <a:solidFill>
-                  <a:srgbClr val="1B1B1B"/>
-                </a:solidFill>
-                <a:latin typeface="Calibri"/>
-              </a:rPr>
-              <a:t>•  Approve, or send to a person. The system never rejects: a wrong rejection costs an appeal and maybe the customer.</a:t>
-            </a:r>
-          </a:p>
-          <a:p>
-            <a:pPr algn="l">
-              <a:spcAft>
-                <a:spcPts val="800"/>
-              </a:spcAft>
-            </a:pPr>
-            <a:r>
-              <a:rPr sz="1300" b="0">
-                <a:solidFill>
-                  <a:srgbClr val="1B1B1B"/>
-                </a:solidFill>
-                <a:latin typeface="Calibri"/>
-              </a:rPr>
-              <a:t>•  Every automatic approval records which rule fired and which words in the note it relied on.</a:t>
-            </a:r>
-          </a:p>
-        </p:txBody>
-      </p:sp>
-    </p:spTree>
-  </p:cSld>
-  <p:clrMapOvr>
-    <a:masterClrMapping/>
-  </p:clrMapOvr>
-</p:sld>
-</file>
-
-<file path=ppt/slides/slide6.xml><?xml version="1.0" encoding="utf-8"?>
-<p:sld xmlns:a="http://schemas.openxmlformats.org/drawingml/2006/main" xmlns:p="http://schemas.openxmlformats.org/presentationml/2006/main" xmlns:r="http://schemas.openxmlformats.org/officeDocument/2006/relationships">
-  <p:cSld>
-    <p:spTree>
-      <p:nvGrpSpPr>
-        <p:cNvPr id="1" name=""/>
-        <p:cNvGrpSpPr/>
-        <p:nvPr/>
-      </p:nvGrpSpPr>
-      <p:grpSpPr/>
-      <p:sp>
-        <p:nvSpPr>
-          <p:cNvPr id="2" name="TextBox 1"/>
-          <p:cNvSpPr txBox="1"/>
-          <p:nvPr/>
-        </p:nvSpPr>
-        <p:spPr>
-          <a:xfrm>
-            <a:off x="548640" y="365760"/>
-            <a:ext cx="11094415" cy="685800"/>
-          </a:xfrm>
-          <a:prstGeom prst="rect">
-            <a:avLst/>
-          </a:prstGeom>
-          <a:noFill/>
-        </p:spPr>
-        <p:txBody>
-          <a:bodyPr wrap="square" anchor="t" lIns="45720" rIns="45720" tIns="27432" bIns="27432">
-            <a:spAutoFit/>
-          </a:bodyPr>
-          <a:lstStyle/>
-          <a:p>
-            <a:pPr algn="l">
-              <a:spcAft>
-                <a:spcPts val="600"/>
-              </a:spcAft>
-            </a:pPr>
-            <a:r>
-              <a:rPr sz="2800" b="1">
-                <a:solidFill>
-                  <a:srgbClr val="0A4A4A"/>
-                </a:solidFill>
-                <a:latin typeface="Cambria"/>
-              </a:rPr>
-              <a:t>The evidence: we replayed the rules on the 248 past requests</a:t>
-            </a:r>
-          </a:p>
-        </p:txBody>
-      </p:sp>
-      <p:sp>
-        <p:nvSpPr>
-          <p:cNvPr id="3" name="TextBox 2"/>
-          <p:cNvSpPr txBox="1"/>
-          <p:nvPr/>
-        </p:nvSpPr>
-        <p:spPr>
-          <a:xfrm>
-            <a:off x="548640" y="1188720"/>
-            <a:ext cx="5440680" cy="822960"/>
-          </a:xfrm>
-          <a:prstGeom prst="rect">
-            <a:avLst/>
-          </a:prstGeom>
-          <a:noFill/>
-        </p:spPr>
-        <p:txBody>
-          <a:bodyPr wrap="square" anchor="t" lIns="45720" rIns="45720" tIns="27432" bIns="27432">
-            <a:spAutoFit/>
-          </a:bodyPr>
-          <a:lstStyle/>
-          <a:p>
-            <a:pPr algn="l">
-              <a:spcAft>
-                <a:spcPts val="600"/>
-              </a:spcAft>
-            </a:pPr>
-            <a:r>
-              <a:rPr sz="1300" b="0">
-                <a:solidFill>
-                  <a:srgbClr val="1B1B1B"/>
-                </a:solidFill>
-                <a:latin typeface="Calibri"/>
-              </a:rPr>
-              <a:t>Because we know what happened afterwards (chargebacks, appeals, the reviewer's decision), we can check every automatic approval the rules would have made.</a:t>
-            </a:r>
-          </a:p>
-        </p:txBody>
-      </p:sp>
-      <p:graphicFrame>
-        <p:nvGraphicFramePr>
-          <p:cNvPr id="4" name="Table 3"/>
-          <p:cNvGraphicFramePr>
-            <a:graphicFrameLocks noGrp="1"/>
-          </p:cNvGraphicFramePr>
-          <p:nvPr/>
-        </p:nvGraphicFramePr>
-        <p:xfrm>
-          <a:off x="548640" y="2103120"/>
-          <a:ext cx="5440680" cy="1755648"/>
-        </p:xfrm>
-        <a:graphic>
-          <a:graphicData uri="http://schemas.openxmlformats.org/drawingml/2006/table">
-            <a:tbl>
-              <a:tblPr firstRow="1" bandRow="1">
-                <a:tableStyleId>{5C22544A-7EE6-4342-B048-85BDC9FD1C3A}</a:tableStyleId>
-              </a:tblPr>
-              <a:tblGrid>
-                <a:gridCol w="2331720"/>
-                <a:gridCol w="1554480"/>
-                <a:gridCol w="1554480"/>
-              </a:tblGrid>
-              <a:tr h="292608">
-                <a:tc>
-                  <a:txBody>
-                    <a:bodyPr/>
-                    <a:lstStyle/>
-                    <a:p>
-                      <a:pPr>
-                        <a:defRPr sz="1100" b="1">
-                          <a:solidFill>
-                            <a:srgbClr val="FFFFFF"/>
-                          </a:solidFill>
-                          <a:latin typeface="Calibri"/>
-                        </a:defRPr>
-                      </a:pPr>
-                    </a:p>
-                  </a:txBody>
-                  <a:tcPr marL="54864" marR="54864" marT="27432" marB="27432">
-                    <a:solidFill>
-                      <a:srgbClr val="0F6E6E"/>
-                    </a:solidFill>
-                  </a:tcPr>
-                </a:tc>
-                <a:tc>
-                  <a:txBody>
-                    <a:bodyPr/>
-                    <a:lstStyle/>
-                    <a:p>
-                      <a:pPr>
-                        <a:defRPr sz="1100" b="1">
-                          <a:solidFill>
-                            <a:srgbClr val="FFFFFF"/>
-                          </a:solidFill>
-                          <a:latin typeface="Calibri"/>
-                        </a:defRPr>
-                      </a:pPr>
-                      <a:r>
-                        <a:t>old automatic rule</a:t>
-                      </a:r>
-                    </a:p>
-                  </a:txBody>
-                  <a:tcPr marL="54864" marR="54864" marT="27432" marB="27432">
-                    <a:solidFill>
-                      <a:srgbClr val="0F6E6E"/>
-                    </a:solidFill>
-                  </a:tcPr>
-                </a:tc>
-                <a:tc>
-                  <a:txBody>
-                    <a:bodyPr/>
-                    <a:lstStyle/>
-                    <a:p>
-                      <a:pPr>
-                        <a:defRPr sz="1100" b="1">
-                          <a:solidFill>
-                            <a:srgbClr val="FFFFFF"/>
-                          </a:solidFill>
-                          <a:latin typeface="Calibri"/>
-                        </a:defRPr>
-                      </a:pPr>
-                      <a:r>
-                        <a:t>our rules</a:t>
-                      </a:r>
-                    </a:p>
-                  </a:txBody>
-                  <a:tcPr marL="54864" marR="54864" marT="27432" marB="27432">
-                    <a:solidFill>
-                      <a:srgbClr val="0F6E6E"/>
-                    </a:solidFill>
-                  </a:tcPr>
-                </a:tc>
-              </a:tr>
-              <a:tr h="292608">
-                <a:tc>
-                  <a:txBody>
-                    <a:bodyPr/>
-                    <a:lstStyle/>
-                    <a:p>
-                      <a:pPr>
-                        <a:defRPr sz="1100" b="0">
-                          <a:solidFill>
-                            <a:srgbClr val="1B1B1B"/>
-                          </a:solidFill>
-                          <a:latin typeface="Calibri"/>
-                        </a:defRPr>
-                      </a:pPr>
-                      <a:r>
-                        <a:t>approved automatically</a:t>
-                      </a:r>
-                    </a:p>
-                  </a:txBody>
-                  <a:tcPr marL="54864" marR="54864" marT="27432" marB="27432">
-                    <a:solidFill>
-                      <a:srgbClr val="F1EDE4"/>
-                    </a:solidFill>
-                  </a:tcPr>
-                </a:tc>
-                <a:tc>
-                  <a:txBody>
-                    <a:bodyPr/>
-                    <a:lstStyle/>
-                    <a:p>
-                      <a:pPr>
-                        <a:defRPr sz="1100" b="0">
-                          <a:solidFill>
-                            <a:srgbClr val="1B1B1B"/>
-                          </a:solidFill>
-                          <a:latin typeface="Calibri"/>
-                        </a:defRPr>
-                      </a:pPr>
-                      <a:r>
-                        <a:t>111 (45%)  $3,377</a:t>
-                      </a:r>
-                    </a:p>
-                  </a:txBody>
-                  <a:tcPr marL="54864" marR="54864" marT="27432" marB="27432">
-                    <a:solidFill>
-                      <a:srgbClr val="F1EDE4"/>
-                    </a:solidFill>
-                  </a:tcPr>
-                </a:tc>
-                <a:tc>
-                  <a:txBody>
-                    <a:bodyPr/>
-                    <a:lstStyle/>
-                    <a:p>
-                      <a:pPr>
-                        <a:defRPr sz="1100" b="0">
-                          <a:solidFill>
-                            <a:srgbClr val="1B1B1B"/>
-                          </a:solidFill>
-                          <a:latin typeface="Calibri"/>
-                        </a:defRPr>
-                      </a:pPr>
-                      <a:r>
-                        <a:t>120 (48%)  $5,015</a:t>
-                      </a:r>
-                    </a:p>
-                  </a:txBody>
-                  <a:tcPr marL="54864" marR="54864" marT="27432" marB="27432">
-                    <a:solidFill>
-                      <a:srgbClr val="F1EDE4"/>
-                    </a:solidFill>
-                  </a:tcPr>
-                </a:tc>
-              </a:tr>
-              <a:tr h="292608">
-                <a:tc>
-                  <a:txBody>
-                    <a:bodyPr/>
-                    <a:lstStyle/>
-                    <a:p>
-                      <a:pPr>
-                        <a:defRPr sz="1100" b="0">
-                          <a:solidFill>
-                            <a:srgbClr val="1B1B1B"/>
-                          </a:solidFill>
-                          <a:latin typeface="Calibri"/>
-                        </a:defRPr>
-                      </a:pPr>
-                      <a:r>
-                        <a:t>reviewer minutes saved</a:t>
-                      </a:r>
-                    </a:p>
-                  </a:txBody>
-                  <a:tcPr marL="54864" marR="54864" marT="27432" marB="27432">
-                    <a:solidFill>
-                      <a:srgbClr val="FFFFFF"/>
-                    </a:solidFill>
-                  </a:tcPr>
-                </a:tc>
-                <a:tc>
-                  <a:txBody>
-                    <a:bodyPr/>
-                    <a:lstStyle/>
-                    <a:p>
-                      <a:pPr>
-                        <a:defRPr sz="1100" b="0">
-                          <a:solidFill>
-                            <a:srgbClr val="1B1B1B"/>
-                          </a:solidFill>
-                          <a:latin typeface="Calibri"/>
-                        </a:defRPr>
-                      </a:pPr>
-                      <a:r>
-                        <a:t>—</a:t>
-                      </a:r>
-                    </a:p>
-                  </a:txBody>
-                  <a:tcPr marL="54864" marR="54864" marT="27432" marB="27432">
-                    <a:solidFill>
-                      <a:srgbClr val="FFFFFF"/>
-                    </a:solidFill>
-                  </a:tcPr>
-                </a:tc>
-                <a:tc>
-                  <a:txBody>
-                    <a:bodyPr/>
-                    <a:lstStyle/>
-                    <a:p>
-                      <a:pPr>
-                        <a:defRPr sz="1100" b="0">
-                          <a:solidFill>
-                            <a:srgbClr val="1B1B1B"/>
-                          </a:solidFill>
-                          <a:latin typeface="Calibri"/>
-                        </a:defRPr>
-                      </a:pPr>
-                      <a:r>
-                        <a:t>156 of 1,119</a:t>
-                      </a:r>
-                    </a:p>
-                  </a:txBody>
-                  <a:tcPr marL="54864" marR="54864" marT="27432" marB="27432">
-                    <a:solidFill>
-                      <a:srgbClr val="FFFFFF"/>
-                    </a:solidFill>
-                  </a:tcPr>
-                </a:tc>
-              </a:tr>
-              <a:tr h="292608">
-                <a:tc>
-                  <a:txBody>
-                    <a:bodyPr/>
-                    <a:lstStyle/>
-                    <a:p>
-                      <a:pPr>
-                        <a:defRPr sz="1100" b="0">
-                          <a:solidFill>
-                            <a:srgbClr val="1B1B1B"/>
-                          </a:solidFill>
-                          <a:latin typeface="Calibri"/>
-                        </a:defRPr>
-                      </a:pPr>
-                      <a:r>
-                        <a:t>agreed with the final human decision</a:t>
-                      </a:r>
-                    </a:p>
-                  </a:txBody>
-                  <a:tcPr marL="54864" marR="54864" marT="27432" marB="27432">
-                    <a:solidFill>
-                      <a:srgbClr val="F1EDE4"/>
-                    </a:solidFill>
-                  </a:tcPr>
-                </a:tc>
-                <a:tc>
-                  <a:txBody>
-                    <a:bodyPr/>
-                    <a:lstStyle/>
-                    <a:p>
-                      <a:pPr>
-                        <a:defRPr sz="1100" b="0">
-                          <a:solidFill>
-                            <a:srgbClr val="1B1B1B"/>
-                          </a:solidFill>
-                          <a:latin typeface="Calibri"/>
-                        </a:defRPr>
-                      </a:pPr>
-                      <a:r>
-                        <a:t>—</a:t>
-                      </a:r>
-                    </a:p>
-                  </a:txBody>
-                  <a:tcPr marL="54864" marR="54864" marT="27432" marB="27432">
-                    <a:solidFill>
-                      <a:srgbClr val="F1EDE4"/>
-                    </a:solidFill>
-                  </a:tcPr>
-                </a:tc>
-                <a:tc>
-                  <a:txBody>
-                    <a:bodyPr/>
-                    <a:lstStyle/>
-                    <a:p>
-                      <a:pPr>
-                        <a:defRPr sz="1100" b="0">
-                          <a:solidFill>
-                            <a:srgbClr val="1B1B1B"/>
-                          </a:solidFill>
-                          <a:latin typeface="Calibri"/>
-                        </a:defRPr>
-                      </a:pPr>
-                      <a:r>
-                        <a:t>100%</a:t>
-                      </a:r>
-                    </a:p>
-                  </a:txBody>
-                  <a:tcPr marL="54864" marR="54864" marT="27432" marB="27432">
-                    <a:solidFill>
-                      <a:srgbClr val="F1EDE4"/>
-                    </a:solidFill>
-                  </a:tcPr>
-                </a:tc>
-              </a:tr>
-              <a:tr h="292608">
-                <a:tc>
-                  <a:txBody>
-                    <a:bodyPr/>
-                    <a:lstStyle/>
-                    <a:p>
-                      <a:pPr>
-                        <a:defRPr sz="1100" b="0">
-                          <a:solidFill>
-                            <a:srgbClr val="1B1B1B"/>
-                          </a:solidFill>
-                          <a:latin typeface="Calibri"/>
-                        </a:defRPr>
-                      </a:pPr>
-                      <a:r>
-                        <a:t>bad approvals we could have caught</a:t>
-                      </a:r>
-                    </a:p>
-                  </a:txBody>
-                  <a:tcPr marL="54864" marR="54864" marT="27432" marB="27432">
-                    <a:solidFill>
-                      <a:srgbClr val="FFFFFF"/>
-                    </a:solidFill>
-                  </a:tcPr>
-                </a:tc>
-                <a:tc>
-                  <a:txBody>
-                    <a:bodyPr/>
-                    <a:lstStyle/>
-                    <a:p>
-                      <a:pPr>
-                        <a:defRPr sz="1100" b="0">
-                          <a:solidFill>
-                            <a:srgbClr val="1B1B1B"/>
-                          </a:solidFill>
-                          <a:latin typeface="Calibri"/>
-                        </a:defRPr>
-                      </a:pPr>
-                      <a:r>
-                        <a:t>0</a:t>
-                      </a:r>
-                    </a:p>
-                  </a:txBody>
-                  <a:tcPr marL="54864" marR="54864" marT="27432" marB="27432">
-                    <a:solidFill>
-                      <a:srgbClr val="FFFFFF"/>
-                    </a:solidFill>
-                  </a:tcPr>
-                </a:tc>
-                <a:tc>
-                  <a:txBody>
-                    <a:bodyPr/>
-                    <a:lstStyle/>
-                    <a:p>
-                      <a:pPr>
-                        <a:defRPr sz="1100" b="0">
-                          <a:solidFill>
-                            <a:srgbClr val="1B1B1B"/>
-                          </a:solidFill>
-                          <a:latin typeface="Calibri"/>
-                        </a:defRPr>
-                      </a:pPr>
-                      <a:r>
-                        <a:t>0</a:t>
-                      </a:r>
-                    </a:p>
-                  </a:txBody>
-                  <a:tcPr marL="54864" marR="54864" marT="27432" marB="27432">
-                    <a:solidFill>
-                      <a:srgbClr val="FFFFFF"/>
-                    </a:solidFill>
-                  </a:tcPr>
-                </a:tc>
-              </a:tr>
-              <a:tr h="292608">
-                <a:tc>
-                  <a:txBody>
-                    <a:bodyPr/>
-                    <a:lstStyle/>
-                    <a:p>
-                      <a:pPr>
-                        <a:defRPr sz="1100" b="0">
-                          <a:solidFill>
-                            <a:srgbClr val="1B1B1B"/>
-                          </a:solidFill>
-                          <a:latin typeface="Calibri"/>
-                        </a:defRPr>
-                      </a:pPr>
-                      <a:r>
-                        <a:t>bad approvals nobody could catch</a:t>
-                      </a:r>
-                    </a:p>
-                  </a:txBody>
-                  <a:tcPr marL="54864" marR="54864" marT="27432" marB="27432">
-                    <a:solidFill>
-                      <a:srgbClr val="F1EDE4"/>
-                    </a:solidFill>
-                  </a:tcPr>
-                </a:tc>
-                <a:tc>
-                  <a:txBody>
-                    <a:bodyPr/>
-                    <a:lstStyle/>
-                    <a:p>
-                      <a:pPr>
-                        <a:defRPr sz="1100" b="0">
-                          <a:solidFill>
-                            <a:srgbClr val="1B1B1B"/>
-                          </a:solidFill>
-                          <a:latin typeface="Calibri"/>
-                        </a:defRPr>
-                      </a:pPr>
-                      <a:r>
-                        <a:t>1 ($49)</a:t>
-                      </a:r>
-                    </a:p>
-                  </a:txBody>
-                  <a:tcPr marL="54864" marR="54864" marT="27432" marB="27432">
-                    <a:solidFill>
-                      <a:srgbClr val="F1EDE4"/>
-                    </a:solidFill>
-                  </a:tcPr>
-                </a:tc>
-                <a:tc>
-                  <a:txBody>
-                    <a:bodyPr/>
-                    <a:lstStyle/>
-                    <a:p>
-                      <a:pPr>
-                        <a:defRPr sz="1100" b="0">
-                          <a:solidFill>
-                            <a:srgbClr val="1B1B1B"/>
-                          </a:solidFill>
-                          <a:latin typeface="Calibri"/>
-                        </a:defRPr>
-                      </a:pPr>
-                      <a:r>
-                        <a:t>1 ($49)</a:t>
-                      </a:r>
-                    </a:p>
-                  </a:txBody>
-                  <a:tcPr marL="54864" marR="54864" marT="27432" marB="27432">
-                    <a:solidFill>
-                      <a:srgbClr val="F1EDE4"/>
-                    </a:solidFill>
-                  </a:tcPr>
-                </a:tc>
-              </a:tr>
-            </a:tbl>
-          </a:graphicData>
-        </a:graphic>
-      </p:graphicFrame>
-      <p:sp>
-        <p:nvSpPr>
-          <p:cNvPr id="5" name="TextBox 4"/>
-          <p:cNvSpPr txBox="1"/>
-          <p:nvPr/>
-        </p:nvSpPr>
-        <p:spPr>
-          <a:xfrm>
-            <a:off x="548640" y="4069080"/>
-            <a:ext cx="5440680" cy="2286000"/>
-          </a:xfrm>
-          <a:prstGeom prst="rect">
-            <a:avLst/>
-          </a:prstGeom>
-          <a:noFill/>
-        </p:spPr>
-        <p:txBody>
-          <a:bodyPr wrap="square" anchor="t" lIns="45720" rIns="45720" tIns="27432" bIns="27432">
-            <a:spAutoFit/>
-          </a:bodyPr>
-          <a:lstStyle/>
-          <a:p>
-            <a:pPr algn="l">
-              <a:spcAft>
-                <a:spcPts val="600"/>
-              </a:spcAft>
-            </a:pPr>
-            <a:r>
-              <a:rPr sz="1400" b="1">
-                <a:solidFill>
-                  <a:srgbClr val="0A4A4A"/>
-                </a:solidFill>
-                <a:latin typeface="Calibri"/>
-              </a:rPr>
-              <a:t>What 'bad' means</a:t>
-            </a:r>
-          </a:p>
           <a:p>
             <a:pPr algn="l">
               <a:spcAft>
@@ -10913,7 +9034,7 @@
                 </a:solidFill>
                 <a:latin typeface="Calibri"/>
               </a:rPr>
-              <a:t>The refund was approved, and later the bank took the money back, or the fraud team was never asked about a fraud flag, or a reviewer had said no.</a:t>
+              <a:t>•  Every version is replayed on the 248 past requests. 'Bad' means approved, then a chargeback, a fraud flag the fraud team never confirmed, or a reviewer's no. If a note or flag could have caught it, the test fails and the change cannot be published.</a:t>
             </a:r>
           </a:p>
           <a:p>
@@ -10929,710 +9050,7 @@
                 </a:solidFill>
                 <a:latin typeface="Calibri"/>
               </a:rPr>
-              <a:t>'Could have caught' means a note or a flag was there to read. The one case nobody could catch had no note at all.</a:t>
-            </a:r>
-          </a:p>
-          <a:p>
-            <a:pPr algn="l">
-              <a:spcAft>
-                <a:spcPts val="600"/>
-              </a:spcAft>
-            </a:pPr>
-            <a:r>
-              <a:rPr sz="1200" b="0">
-                <a:solidFill>
-                  <a:srgbClr val="1B1B1B"/>
-                </a:solidFill>
-                <a:latin typeface="Calibri"/>
-              </a:rPr>
-              <a:t>The replay found a wrong rule: 'photo attached' approved two claims where the photo showed the item was fine. The rule now needs a photo that shows damage.</a:t>
-            </a:r>
-          </a:p>
-        </p:txBody>
-      </p:sp>
-      <p:pic>
-        <p:nvPicPr>
-          <p:cNvPr id="6" name="Picture 5" descr="fig3_old_rule_boundary.png"/>
-          <p:cNvPicPr>
-            <a:picLocks noChangeAspect="1"/>
-          </p:cNvPicPr>
-          <p:nvPr/>
-        </p:nvPicPr>
-        <p:blipFill>
-          <a:blip r:embed="rId2"/>
-          <a:stretch>
-            <a:fillRect/>
-          </a:stretch>
-        </p:blipFill>
-        <p:spPr>
-          <a:xfrm>
-            <a:off x="6217920" y="1188720"/>
-            <a:ext cx="5440680" cy="2720340"/>
-          </a:xfrm>
-          <a:prstGeom prst="rect">
-            <a:avLst/>
-          </a:prstGeom>
-        </p:spPr>
-      </p:pic>
-      <p:sp>
-        <p:nvSpPr>
-          <p:cNvPr id="7" name="TextBox 6"/>
-          <p:cNvSpPr txBox="1"/>
-          <p:nvPr/>
-        </p:nvSpPr>
-        <p:spPr>
-          <a:xfrm>
-            <a:off x="6217920" y="4091940"/>
-            <a:ext cx="5440680" cy="2103120"/>
-          </a:xfrm>
-          <a:prstGeom prst="rect">
-            <a:avLst/>
-          </a:prstGeom>
-          <a:noFill/>
-        </p:spPr>
-        <p:txBody>
-          <a:bodyPr wrap="square" anchor="t" lIns="45720" rIns="45720" tIns="27432" bIns="27432">
-            <a:spAutoFit/>
-          </a:bodyPr>
-          <a:lstStyle/>
-          <a:p>
-            <a:pPr algn="l">
-              <a:spcAft>
-                <a:spcPts val="600"/>
-              </a:spcAft>
-            </a:pPr>
-            <a:r>
-              <a:rPr sz="1400" b="1">
-                <a:solidFill>
-                  <a:srgbClr val="0A4A4A"/>
-                </a:solidFill>
-                <a:latin typeface="Calibri"/>
-              </a:rPr>
-              <a:t>The old rule, worked out from the data</a:t>
-            </a:r>
-          </a:p>
-          <a:p>
-            <a:pPr algn="l">
-              <a:spcAft>
-                <a:spcPts val="800"/>
-              </a:spcAft>
-            </a:pPr>
-            <a:r>
-              <a:rPr sz="1200" b="0">
-                <a:solidFill>
-                  <a:srgbClr val="1B1B1B"/>
-                </a:solidFill>
-                <a:latin typeface="Calibri"/>
-              </a:rPr>
-              <a:t>Amount up to $54, no earlier refunds, account at least 9 months old. It skipped 22 small clean requests from newer accounts (21 approved anyway) and approved one later chargeback.</a:t>
-            </a:r>
-          </a:p>
-          <a:p>
-            <a:pPr algn="l">
-              <a:spcAft>
-                <a:spcPts val="600"/>
-              </a:spcAft>
-            </a:pPr>
-            <a:r>
-              <a:rPr sz="1200" b="0">
-                <a:solidFill>
-                  <a:srgbClr val="1B1B1B"/>
-                </a:solidFill>
-                <a:latin typeface="Calibri"/>
-              </a:rPr>
-              <a:t>The $200 limit is the highest one with zero catchable bad approvals. Above $150 there are only 5 past cases, so the evidence is thin; the manager can lower it with one change.</a:t>
-            </a:r>
-          </a:p>
-        </p:txBody>
-      </p:sp>
-    </p:spTree>
-  </p:cSld>
-  <p:clrMapOvr>
-    <a:masterClrMapping/>
-  </p:clrMapOvr>
-</p:sld>
-</file>
-
-<file path=ppt/slides/slide7.xml><?xml version="1.0" encoding="utf-8"?>
-<p:sld xmlns:a="http://schemas.openxmlformats.org/drawingml/2006/main" xmlns:p="http://schemas.openxmlformats.org/presentationml/2006/main" xmlns:r="http://schemas.openxmlformats.org/officeDocument/2006/relationships">
-  <p:cSld>
-    <p:spTree>
-      <p:nvGrpSpPr>
-        <p:cNvPr id="1" name=""/>
-        <p:cNvGrpSpPr/>
-        <p:nvPr/>
-      </p:nvGrpSpPr>
-      <p:grpSpPr/>
-      <p:sp>
-        <p:nvSpPr>
-          <p:cNvPr id="2" name="TextBox 1"/>
-          <p:cNvSpPr txBox="1"/>
-          <p:nvPr/>
-        </p:nvSpPr>
-        <p:spPr>
-          <a:xfrm>
-            <a:off x="548640" y="365760"/>
-            <a:ext cx="11094415" cy="685800"/>
-          </a:xfrm>
-          <a:prstGeom prst="rect">
-            <a:avLst/>
-          </a:prstGeom>
-          <a:noFill/>
-        </p:spPr>
-        <p:txBody>
-          <a:bodyPr wrap="square" anchor="t" lIns="45720" rIns="45720" tIns="27432" bIns="27432">
-            <a:spAutoFit/>
-          </a:bodyPr>
-          <a:lstStyle/>
-          <a:p>
-            <a:pPr algn="l">
-              <a:spcAft>
-                <a:spcPts val="600"/>
-              </a:spcAft>
-            </a:pPr>
-            <a:r>
-              <a:rPr sz="2800" b="1">
-                <a:solidFill>
-                  <a:srgbClr val="0A4A4A"/>
-                </a:solidFill>
-                <a:latin typeface="Cambria"/>
-              </a:rPr>
-              <a:t>The two screens: the reviewer's queue, and the manager's rules</a:t>
-            </a:r>
-          </a:p>
-        </p:txBody>
-      </p:sp>
-      <p:sp>
-        <p:nvSpPr>
-          <p:cNvPr id="3" name="Rounded Rectangle 2"/>
-          <p:cNvSpPr/>
-          <p:nvPr/>
-        </p:nvSpPr>
-        <p:spPr>
-          <a:xfrm>
-            <a:off x="548640" y="1234440"/>
-            <a:ext cx="5440680" cy="5120640"/>
-          </a:xfrm>
-          <a:prstGeom prst="roundRect">
-            <a:avLst/>
-          </a:prstGeom>
-          <a:solidFill>
-            <a:srgbClr val="F1EDE4"/>
-          </a:solidFill>
-          <a:ln>
-            <a:noFill/>
-          </a:ln>
-          <a:effectLst/>
-        </p:spPr>
-        <p:style>
-          <a:lnRef idx="1">
-            <a:schemeClr val="accent1"/>
-          </a:lnRef>
-          <a:fillRef idx="3">
-            <a:schemeClr val="accent1"/>
-          </a:fillRef>
-          <a:effectRef idx="2">
-            <a:schemeClr val="accent1"/>
-          </a:effectRef>
-          <a:fontRef idx="minor">
-            <a:schemeClr val="lt1"/>
-          </a:fontRef>
-        </p:style>
-        <p:txBody>
-          <a:bodyPr rtlCol="0" anchor="ctr"/>
-          <a:lstStyle/>
-          <a:p>
-            <a:pPr algn="ctr"/>
-          </a:p>
-        </p:txBody>
-      </p:sp>
-      <p:sp>
-        <p:nvSpPr>
-          <p:cNvPr id="4" name="TextBox 3"/>
-          <p:cNvSpPr txBox="1"/>
-          <p:nvPr/>
-        </p:nvSpPr>
-        <p:spPr>
-          <a:xfrm>
-            <a:off x="777240" y="1371600"/>
-            <a:ext cx="4983480" cy="411480"/>
-          </a:xfrm>
-          <a:prstGeom prst="rect">
-            <a:avLst/>
-          </a:prstGeom>
-          <a:noFill/>
-        </p:spPr>
-        <p:txBody>
-          <a:bodyPr wrap="square" anchor="t" lIns="45720" rIns="45720" tIns="27432" bIns="27432">
-            <a:spAutoFit/>
-          </a:bodyPr>
-          <a:lstStyle/>
-          <a:p>
-            <a:pPr algn="l">
-              <a:spcAft>
-                <a:spcPts val="600"/>
-              </a:spcAft>
-            </a:pPr>
-            <a:r>
-              <a:rPr sz="1600" b="1">
-                <a:solidFill>
-                  <a:srgbClr val="0A4A4A"/>
-                </a:solidFill>
-                <a:latin typeface="Cambria"/>
-              </a:rPr>
-              <a:t>The reviewer</a:t>
-            </a:r>
-          </a:p>
-        </p:txBody>
-      </p:sp>
-      <p:sp>
-        <p:nvSpPr>
-          <p:cNvPr id="5" name="TextBox 4"/>
-          <p:cNvSpPr txBox="1"/>
-          <p:nvPr/>
-        </p:nvSpPr>
-        <p:spPr>
-          <a:xfrm>
-            <a:off x="777240" y="1874519"/>
-            <a:ext cx="4983480" cy="4343400"/>
-          </a:xfrm>
-          <a:prstGeom prst="rect">
-            <a:avLst/>
-          </a:prstGeom>
-          <a:noFill/>
-        </p:spPr>
-        <p:txBody>
-          <a:bodyPr wrap="square" anchor="t" lIns="45720" rIns="45720" tIns="27432" bIns="27432">
-            <a:spAutoFit/>
-          </a:bodyPr>
-          <a:lstStyle/>
-          <a:p>
-            <a:pPr algn="l">
-              <a:spcAft>
-                <a:spcPts val="800"/>
-              </a:spcAft>
-            </a:pPr>
-            <a:r>
-              <a:rPr sz="1200" b="0">
-                <a:solidFill>
-                  <a:srgbClr val="1B1B1B"/>
-                </a:solidFill>
-                <a:latin typeface="Calibri"/>
-              </a:rPr>
-              <a:t>•  What lands here: every request the rules did not take, oldest first. Fraud cases have their own filter.</a:t>
-            </a:r>
-          </a:p>
-          <a:p>
-            <a:pPr algn="l">
-              <a:spcAft>
-                <a:spcPts val="800"/>
-              </a:spcAft>
-            </a:pPr>
-            <a:r>
-              <a:rPr sz="1200" b="0">
-                <a:solidFill>
-                  <a:srgbClr val="1B1B1B"/>
-                </a:solidFill>
-                <a:latin typeface="Calibri"/>
-              </a:rPr>
-              <a:t>•  What they see: why it is here, in plain words. What the model read in the notes, with the exact quote. The customer's history. The manager's policy note that applies.</a:t>
-            </a:r>
-          </a:p>
-          <a:p>
-            <a:pPr algn="l">
-              <a:spcAft>
-                <a:spcPts val="800"/>
-              </a:spcAft>
-            </a:pPr>
-            <a:r>
-              <a:rPr sz="1200" b="0">
-                <a:solidFill>
-                  <a:srgbClr val="1B1B1B"/>
-                </a:solidFill>
-                <a:latin typeface="Calibri"/>
-              </a:rPr>
-              <a:t>•  What they can do: approve, approve part of it, reject, or send to the fraud team. Part and reject need a reason.</a:t>
-            </a:r>
-          </a:p>
-          <a:p>
-            <a:pPr algn="l">
-              <a:spcAft>
-                <a:spcPts val="800"/>
-              </a:spcAft>
-            </a:pPr>
-            <a:r>
-              <a:rPr sz="1200" b="0">
-                <a:solidFill>
-                  <a:srgbClr val="1B1B1B"/>
-                </a:solidFill>
-                <a:latin typeface="Calibri"/>
-              </a:rPr>
-              <a:t>•  What happens after: one line in the decision log with the reviewer's name, the time and the rules version. The request leaves the queue.</a:t>
-            </a:r>
-          </a:p>
-        </p:txBody>
-      </p:sp>
-      <p:sp>
-        <p:nvSpPr>
-          <p:cNvPr id="6" name="Rounded Rectangle 5"/>
-          <p:cNvSpPr/>
-          <p:nvPr/>
-        </p:nvSpPr>
-        <p:spPr>
-          <a:xfrm>
-            <a:off x="6217920" y="1234440"/>
-            <a:ext cx="5440680" cy="5120640"/>
-          </a:xfrm>
-          <a:prstGeom prst="roundRect">
-            <a:avLst/>
-          </a:prstGeom>
-          <a:solidFill>
-            <a:srgbClr val="F1EDE4"/>
-          </a:solidFill>
-          <a:ln>
-            <a:noFill/>
-          </a:ln>
-          <a:effectLst/>
-        </p:spPr>
-        <p:style>
-          <a:lnRef idx="1">
-            <a:schemeClr val="accent1"/>
-          </a:lnRef>
-          <a:fillRef idx="3">
-            <a:schemeClr val="accent1"/>
-          </a:fillRef>
-          <a:effectRef idx="2">
-            <a:schemeClr val="accent1"/>
-          </a:effectRef>
-          <a:fontRef idx="minor">
-            <a:schemeClr val="lt1"/>
-          </a:fontRef>
-        </p:style>
-        <p:txBody>
-          <a:bodyPr rtlCol="0" anchor="ctr"/>
-          <a:lstStyle/>
-          <a:p>
-            <a:pPr algn="ctr"/>
-          </a:p>
-        </p:txBody>
-      </p:sp>
-      <p:sp>
-        <p:nvSpPr>
-          <p:cNvPr id="7" name="TextBox 6"/>
-          <p:cNvSpPr txBox="1"/>
-          <p:nvPr/>
-        </p:nvSpPr>
-        <p:spPr>
-          <a:xfrm>
-            <a:off x="6446520" y="1371600"/>
-            <a:ext cx="4983480" cy="411480"/>
-          </a:xfrm>
-          <a:prstGeom prst="rect">
-            <a:avLst/>
-          </a:prstGeom>
-          <a:noFill/>
-        </p:spPr>
-        <p:txBody>
-          <a:bodyPr wrap="square" anchor="t" lIns="45720" rIns="45720" tIns="27432" bIns="27432">
-            <a:spAutoFit/>
-          </a:bodyPr>
-          <a:lstStyle/>
-          <a:p>
-            <a:pPr algn="l">
-              <a:spcAft>
-                <a:spcPts val="600"/>
-              </a:spcAft>
-            </a:pPr>
-            <a:r>
-              <a:rPr sz="1600" b="1">
-                <a:solidFill>
-                  <a:srgbClr val="0A4A4A"/>
-                </a:solidFill>
-                <a:latin typeface="Cambria"/>
-              </a:rPr>
-              <a:t>The manager</a:t>
-            </a:r>
-          </a:p>
-        </p:txBody>
-      </p:sp>
-      <p:sp>
-        <p:nvSpPr>
-          <p:cNvPr id="8" name="TextBox 7"/>
-          <p:cNvSpPr txBox="1"/>
-          <p:nvPr/>
-        </p:nvSpPr>
-        <p:spPr>
-          <a:xfrm>
-            <a:off x="6446520" y="1874519"/>
-            <a:ext cx="4983480" cy="4343400"/>
-          </a:xfrm>
-          <a:prstGeom prst="rect">
-            <a:avLst/>
-          </a:prstGeom>
-          <a:noFill/>
-        </p:spPr>
-        <p:txBody>
-          <a:bodyPr wrap="square" anchor="t" lIns="45720" rIns="45720" tIns="27432" bIns="27432">
-            <a:spAutoFit/>
-          </a:bodyPr>
-          <a:lstStyle/>
-          <a:p>
-            <a:pPr algn="l">
-              <a:spcAft>
-                <a:spcPts val="800"/>
-              </a:spcAft>
-            </a:pPr>
-            <a:r>
-              <a:rPr sz="1200" b="0">
-                <a:solidFill>
-                  <a:srgbClr val="1B1B1B"/>
-                </a:solidFill>
-                <a:latin typeface="Calibri"/>
-              </a:rPr>
-              <a:t>•  Types a sentence: 'From now on, anything over $300 comes to us.' The model turns it into a rule, or explains why it cannot ('nothing in the data says if a customer is angry').</a:t>
-            </a:r>
-          </a:p>
-          <a:p>
-            <a:pPr algn="l">
-              <a:spcAft>
-                <a:spcPts val="800"/>
-              </a:spcAft>
-            </a:pPr>
-            <a:r>
-              <a:rPr sz="1200" b="0">
-                <a:solidFill>
-                  <a:srgbClr val="1B1B1B"/>
-                </a:solidFill>
-                <a:latin typeface="Calibri"/>
-              </a:rPr>
-              <a:t>•  Checks the rule in a form. Several changes can be collected into one new version.</a:t>
-            </a:r>
-          </a:p>
-          <a:p>
-            <a:pPr algn="l">
-              <a:spcAft>
-                <a:spcPts val="800"/>
-              </a:spcAft>
-            </a:pPr>
-            <a:r>
-              <a:rPr sz="1200" b="0">
-                <a:solidFill>
-                  <a:srgbClr val="1B1B1B"/>
-                </a:solidFill>
-                <a:latin typeface="Calibri"/>
-              </a:rPr>
-              <a:t>•  Dry run: the old rules and the new rules are replayed on the 248 past requests and the 20 waiting. She sees what changes, the dollars, and a red list of past bad cases the change would approve. Red blocks publishing.</a:t>
-            </a:r>
-          </a:p>
-          <a:p>
-            <a:pPr algn="l">
-              <a:spcAft>
-                <a:spcPts val="800"/>
-              </a:spcAft>
-            </a:pPr>
-            <a:r>
-              <a:rPr sz="1200" b="0">
-                <a:solidFill>
-                  <a:srgbClr val="1B1B1B"/>
-                </a:solidFill>
-                <a:latin typeface="Calibri"/>
-              </a:rPr>
-              <a:t>•  Publishes a new version with a note. Any old version can be brought back with one click.</a:t>
-            </a:r>
-          </a:p>
-        </p:txBody>
-      </p:sp>
-    </p:spTree>
-  </p:cSld>
-  <p:clrMapOvr>
-    <a:masterClrMapping/>
-  </p:clrMapOvr>
-</p:sld>
-</file>
-
-<file path=ppt/slides/slide8.xml><?xml version="1.0" encoding="utf-8"?>
-<p:sld xmlns:a="http://schemas.openxmlformats.org/drawingml/2006/main" xmlns:p="http://schemas.openxmlformats.org/presentationml/2006/main" xmlns:r="http://schemas.openxmlformats.org/officeDocument/2006/relationships">
-  <p:cSld>
-    <p:spTree>
-      <p:nvGrpSpPr>
-        <p:cNvPr id="1" name=""/>
-        <p:cNvGrpSpPr/>
-        <p:nvPr/>
-      </p:nvGrpSpPr>
-      <p:grpSpPr/>
-      <p:sp>
-        <p:nvSpPr>
-          <p:cNvPr id="2" name="TextBox 1"/>
-          <p:cNvSpPr txBox="1"/>
-          <p:nvPr/>
-        </p:nvSpPr>
-        <p:spPr>
-          <a:xfrm>
-            <a:off x="548640" y="365760"/>
-            <a:ext cx="11094415" cy="685800"/>
-          </a:xfrm>
-          <a:prstGeom prst="rect">
-            <a:avLst/>
-          </a:prstGeom>
-          <a:noFill/>
-        </p:spPr>
-        <p:txBody>
-          <a:bodyPr wrap="square" anchor="t" lIns="45720" rIns="45720" tIns="27432" bIns="27432">
-            <a:spAutoFit/>
-          </a:bodyPr>
-          <a:lstStyle/>
-          <a:p>
-            <a:pPr algn="l">
-              <a:spcAft>
-                <a:spcPts val="600"/>
-              </a:spcAft>
-            </a:pPr>
-            <a:r>
-              <a:rPr sz="2800" b="1">
-                <a:solidFill>
-                  <a:srgbClr val="0A4A4A"/>
-                </a:solidFill>
-                <a:latin typeface="Cambria"/>
-              </a:rPr>
-              <a:t>How we would know it is wrong: before switch-on, and after</a:t>
-            </a:r>
-          </a:p>
-        </p:txBody>
-      </p:sp>
-      <p:sp>
-        <p:nvSpPr>
-          <p:cNvPr id="3" name="Rounded Rectangle 2"/>
-          <p:cNvSpPr/>
-          <p:nvPr/>
-        </p:nvSpPr>
-        <p:spPr>
-          <a:xfrm>
-            <a:off x="548640" y="1234440"/>
-            <a:ext cx="5440680" cy="2377440"/>
-          </a:xfrm>
-          <a:prstGeom prst="roundRect">
-            <a:avLst/>
-          </a:prstGeom>
-          <a:solidFill>
-            <a:srgbClr val="F1EDE4"/>
-          </a:solidFill>
-          <a:ln>
-            <a:noFill/>
-          </a:ln>
-          <a:effectLst/>
-        </p:spPr>
-        <p:style>
-          <a:lnRef idx="1">
-            <a:schemeClr val="accent1"/>
-          </a:lnRef>
-          <a:fillRef idx="3">
-            <a:schemeClr val="accent1"/>
-          </a:fillRef>
-          <a:effectRef idx="2">
-            <a:schemeClr val="accent1"/>
-          </a:effectRef>
-          <a:fontRef idx="minor">
-            <a:schemeClr val="lt1"/>
-          </a:fontRef>
-        </p:style>
-        <p:txBody>
-          <a:bodyPr rtlCol="0" anchor="ctr"/>
-          <a:lstStyle/>
-          <a:p>
-            <a:pPr algn="ctr"/>
-          </a:p>
-        </p:txBody>
-      </p:sp>
-      <p:sp>
-        <p:nvSpPr>
-          <p:cNvPr id="4" name="TextBox 3"/>
-          <p:cNvSpPr txBox="1"/>
-          <p:nvPr/>
-        </p:nvSpPr>
-        <p:spPr>
-          <a:xfrm>
-            <a:off x="777240" y="1371600"/>
-            <a:ext cx="4983480" cy="411480"/>
-          </a:xfrm>
-          <a:prstGeom prst="rect">
-            <a:avLst/>
-          </a:prstGeom>
-          <a:noFill/>
-        </p:spPr>
-        <p:txBody>
-          <a:bodyPr wrap="square" anchor="t" lIns="45720" rIns="45720" tIns="27432" bIns="27432">
-            <a:spAutoFit/>
-          </a:bodyPr>
-          <a:lstStyle/>
-          <a:p>
-            <a:pPr algn="l">
-              <a:spcAft>
-                <a:spcPts val="600"/>
-              </a:spcAft>
-            </a:pPr>
-            <a:r>
-              <a:rPr sz="1600" b="1">
-                <a:solidFill>
-                  <a:srgbClr val="0A4A4A"/>
-                </a:solidFill>
-                <a:latin typeface="Cambria"/>
-              </a:rPr>
-              <a:t>Before: the replay is a test</a:t>
-            </a:r>
-          </a:p>
-        </p:txBody>
-      </p:sp>
-      <p:sp>
-        <p:nvSpPr>
-          <p:cNvPr id="5" name="TextBox 4"/>
-          <p:cNvSpPr txBox="1"/>
-          <p:nvPr/>
-        </p:nvSpPr>
-        <p:spPr>
-          <a:xfrm>
-            <a:off x="777240" y="1874519"/>
-            <a:ext cx="4983480" cy="1600200"/>
-          </a:xfrm>
-          <a:prstGeom prst="rect">
-            <a:avLst/>
-          </a:prstGeom>
-          <a:noFill/>
-        </p:spPr>
-        <p:txBody>
-          <a:bodyPr wrap="square" anchor="t" lIns="45720" rIns="45720" tIns="27432" bIns="27432">
-            <a:spAutoFit/>
-          </a:bodyPr>
-          <a:lstStyle/>
-          <a:p>
-            <a:pPr algn="l">
-              <a:spcAft>
-                <a:spcPts val="800"/>
-              </a:spcAft>
-            </a:pPr>
-            <a:r>
-              <a:rPr sz="1200" b="0">
-                <a:solidFill>
-                  <a:srgbClr val="1B1B1B"/>
-                </a:solidFill>
-                <a:latin typeface="Calibri"/>
-              </a:rPr>
-              <a:t>•  If the rules would approve a past case that went bad and could have been caught, the test fails and the change cannot be published.</a:t>
-            </a:r>
-          </a:p>
-          <a:p>
-            <a:pPr algn="l">
-              <a:spcAft>
-                <a:spcPts val="800"/>
-              </a:spcAft>
-            </a:pPr>
-            <a:r>
-              <a:rPr sz="1200" b="0">
-                <a:solidFill>
-                  <a:srgbClr val="1B1B1B"/>
-                </a:solidFill>
-                <a:latin typeface="Calibri"/>
-              </a:rPr>
-              <a:t>•  The model's reading of notes is checked separately on 205 notes labelled by hand (slide 9).</a:t>
+              <a:t>•  The model's reading of notes is checked separately on 205 notes labelled by hand (slide 7).</a:t>
             </a:r>
           </a:p>
         </p:txBody>
@@ -12187,7 +9605,7 @@
 </p:sld>
 </file>
 
-<file path=ppt/slides/slide9.xml><?xml version="1.0" encoding="utf-8"?>
+<file path=ppt/slides/slide7.xml><?xml version="1.0" encoding="utf-8"?>
 <p:sld xmlns:a="http://schemas.openxmlformats.org/drawingml/2006/main" xmlns:p="http://schemas.openxmlformats.org/presentationml/2006/main" xmlns:r="http://schemas.openxmlformats.org/officeDocument/2006/relationships">
   <p:cSld>
     <p:spTree>
@@ -13128,6 +10546,403 @@
                 <a:latin typeface="Calibri"/>
               </a:rPr>
               <a:t>A wrong 'yes' could approve money, so that is the number that must be perfect. A missed 'yes' only sends the case to a person.</a:t>
+            </a:r>
+          </a:p>
+        </p:txBody>
+      </p:sp>
+    </p:spTree>
+  </p:cSld>
+  <p:clrMapOvr>
+    <a:masterClrMapping/>
+  </p:clrMapOvr>
+</p:sld>
+</file>
+
+<file path=ppt/slides/slide8.xml><?xml version="1.0" encoding="utf-8"?>
+<p:sld xmlns:a="http://schemas.openxmlformats.org/drawingml/2006/main" xmlns:p="http://schemas.openxmlformats.org/presentationml/2006/main" xmlns:r="http://schemas.openxmlformats.org/officeDocument/2006/relationships">
+  <p:cSld>
+    <p:spTree>
+      <p:nvGrpSpPr>
+        <p:cNvPr id="1" name=""/>
+        <p:cNvGrpSpPr/>
+        <p:nvPr/>
+      </p:nvGrpSpPr>
+      <p:grpSpPr/>
+      <p:sp>
+        <p:nvSpPr>
+          <p:cNvPr id="2" name="TextBox 1"/>
+          <p:cNvSpPr txBox="1"/>
+          <p:nvPr/>
+        </p:nvSpPr>
+        <p:spPr>
+          <a:xfrm>
+            <a:off x="548640" y="365760"/>
+            <a:ext cx="11094415" cy="685800"/>
+          </a:xfrm>
+          <a:prstGeom prst="rect">
+            <a:avLst/>
+          </a:prstGeom>
+          <a:noFill/>
+        </p:spPr>
+        <p:txBody>
+          <a:bodyPr wrap="square" anchor="t" lIns="45720" rIns="45720" tIns="27432" bIns="27432">
+            <a:spAutoFit/>
+          </a:bodyPr>
+          <a:lstStyle/>
+          <a:p>
+            <a:pPr algn="l">
+              <a:spcAft>
+                <a:spcPts val="600"/>
+              </a:spcAft>
+            </a:pPr>
+            <a:r>
+              <a:rPr sz="2800" b="1">
+                <a:solidFill>
+                  <a:srgbClr val="0A4A4A"/>
+                </a:solidFill>
+                <a:latin typeface="Cambria"/>
+              </a:rPr>
+              <a:t>What was left out, and what comes next</a:t>
+            </a:r>
+          </a:p>
+        </p:txBody>
+      </p:sp>
+      <p:sp>
+        <p:nvSpPr>
+          <p:cNvPr id="3" name="Rounded Rectangle 2"/>
+          <p:cNvSpPr/>
+          <p:nvPr/>
+        </p:nvSpPr>
+        <p:spPr>
+          <a:xfrm>
+            <a:off x="548640" y="1234440"/>
+            <a:ext cx="5440680" cy="5120640"/>
+          </a:xfrm>
+          <a:prstGeom prst="roundRect">
+            <a:avLst/>
+          </a:prstGeom>
+          <a:solidFill>
+            <a:srgbClr val="F1EDE4"/>
+          </a:solidFill>
+          <a:ln>
+            <a:noFill/>
+          </a:ln>
+          <a:effectLst/>
+        </p:spPr>
+        <p:style>
+          <a:lnRef idx="1">
+            <a:schemeClr val="accent1"/>
+          </a:lnRef>
+          <a:fillRef idx="3">
+            <a:schemeClr val="accent1"/>
+          </a:fillRef>
+          <a:effectRef idx="2">
+            <a:schemeClr val="accent1"/>
+          </a:effectRef>
+          <a:fontRef idx="minor">
+            <a:schemeClr val="lt1"/>
+          </a:fontRef>
+        </p:style>
+        <p:txBody>
+          <a:bodyPr rtlCol="0" anchor="ctr"/>
+          <a:lstStyle/>
+          <a:p>
+            <a:pPr algn="ctr"/>
+          </a:p>
+        </p:txBody>
+      </p:sp>
+      <p:sp>
+        <p:nvSpPr>
+          <p:cNvPr id="4" name="TextBox 3"/>
+          <p:cNvSpPr txBox="1"/>
+          <p:nvPr/>
+        </p:nvSpPr>
+        <p:spPr>
+          <a:xfrm>
+            <a:off x="777240" y="1371600"/>
+            <a:ext cx="4983480" cy="411480"/>
+          </a:xfrm>
+          <a:prstGeom prst="rect">
+            <a:avLst/>
+          </a:prstGeom>
+          <a:noFill/>
+        </p:spPr>
+        <p:txBody>
+          <a:bodyPr wrap="square" anchor="t" lIns="45720" rIns="45720" tIns="27432" bIns="27432">
+            <a:spAutoFit/>
+          </a:bodyPr>
+          <a:lstStyle/>
+          <a:p>
+            <a:pPr algn="l">
+              <a:spcAft>
+                <a:spcPts val="600"/>
+              </a:spcAft>
+            </a:pPr>
+            <a:r>
+              <a:rPr sz="1600" b="1">
+                <a:solidFill>
+                  <a:srgbClr val="0A4A4A"/>
+                </a:solidFill>
+                <a:latin typeface="Cambria"/>
+              </a:rPr>
+              <a:t>Left out on purpose</a:t>
+            </a:r>
+          </a:p>
+        </p:txBody>
+      </p:sp>
+      <p:sp>
+        <p:nvSpPr>
+          <p:cNvPr id="5" name="TextBox 4"/>
+          <p:cNvSpPr txBox="1"/>
+          <p:nvPr/>
+        </p:nvSpPr>
+        <p:spPr>
+          <a:xfrm>
+            <a:off x="777240" y="1874519"/>
+            <a:ext cx="4983480" cy="4343400"/>
+          </a:xfrm>
+          <a:prstGeom prst="rect">
+            <a:avLst/>
+          </a:prstGeom>
+          <a:noFill/>
+        </p:spPr>
+        <p:txBody>
+          <a:bodyPr wrap="square" anchor="t" lIns="45720" rIns="45720" tIns="27432" bIns="27432">
+            <a:spAutoFit/>
+          </a:bodyPr>
+          <a:lstStyle/>
+          <a:p>
+            <a:pPr algn="l">
+              <a:spcAft>
+                <a:spcPts val="800"/>
+              </a:spcAft>
+            </a:pPr>
+            <a:r>
+              <a:rPr sz="1200" b="0">
+                <a:solidFill>
+                  <a:srgbClr val="1B1B1B"/>
+                </a:solidFill>
+                <a:latin typeface="Calibri"/>
+              </a:rPr>
+              <a:t>•  Login, hosting, real payments, a real fraud-team workflow, a database, notifications.</a:t>
+            </a:r>
+          </a:p>
+          <a:p>
+            <a:pPr algn="l">
+              <a:spcAft>
+                <a:spcPts val="800"/>
+              </a:spcAft>
+            </a:pPr>
+            <a:r>
+              <a:rPr sz="1200" b="0">
+                <a:solidFill>
+                  <a:srgbClr val="1B1B1B"/>
+                </a:solidFill>
+                <a:latin typeface="Calibri"/>
+              </a:rPr>
+              <a:t>•  Editing an existing rule in place: today it is done by sentence, or by switching one rule off and adding another.</a:t>
+            </a:r>
+          </a:p>
+          <a:p>
+            <a:pPr algn="l">
+              <a:spcAft>
+                <a:spcPts val="800"/>
+              </a:spcAft>
+            </a:pPr>
+            <a:r>
+              <a:rPr sz="1200" b="0">
+                <a:solidFill>
+                  <a:srgbClr val="1B1B1B"/>
+                </a:solidFill>
+                <a:latin typeface="Calibri"/>
+              </a:rPr>
+              <a:t>•  Approval rules sit below the guard rules by default; moving one up is possible, and the red list in the dry run is the safety net.</a:t>
+            </a:r>
+          </a:p>
+        </p:txBody>
+      </p:sp>
+      <p:sp>
+        <p:nvSpPr>
+          <p:cNvPr id="6" name="Rounded Rectangle 5"/>
+          <p:cNvSpPr/>
+          <p:nvPr/>
+        </p:nvSpPr>
+        <p:spPr>
+          <a:xfrm>
+            <a:off x="6217920" y="1234440"/>
+            <a:ext cx="5440680" cy="5120640"/>
+          </a:xfrm>
+          <a:prstGeom prst="roundRect">
+            <a:avLst/>
+          </a:prstGeom>
+          <a:solidFill>
+            <a:srgbClr val="F1EDE4"/>
+          </a:solidFill>
+          <a:ln>
+            <a:noFill/>
+          </a:ln>
+          <a:effectLst/>
+        </p:spPr>
+        <p:style>
+          <a:lnRef idx="1">
+            <a:schemeClr val="accent1"/>
+          </a:lnRef>
+          <a:fillRef idx="3">
+            <a:schemeClr val="accent1"/>
+          </a:fillRef>
+          <a:effectRef idx="2">
+            <a:schemeClr val="accent1"/>
+          </a:effectRef>
+          <a:fontRef idx="minor">
+            <a:schemeClr val="lt1"/>
+          </a:fontRef>
+        </p:style>
+        <p:txBody>
+          <a:bodyPr rtlCol="0" anchor="ctr"/>
+          <a:lstStyle/>
+          <a:p>
+            <a:pPr algn="ctr"/>
+          </a:p>
+        </p:txBody>
+      </p:sp>
+      <p:sp>
+        <p:nvSpPr>
+          <p:cNvPr id="7" name="TextBox 6"/>
+          <p:cNvSpPr txBox="1"/>
+          <p:nvPr/>
+        </p:nvSpPr>
+        <p:spPr>
+          <a:xfrm>
+            <a:off x="6446520" y="1371600"/>
+            <a:ext cx="4983480" cy="411480"/>
+          </a:xfrm>
+          <a:prstGeom prst="rect">
+            <a:avLst/>
+          </a:prstGeom>
+          <a:noFill/>
+        </p:spPr>
+        <p:txBody>
+          <a:bodyPr wrap="square" anchor="t" lIns="45720" rIns="45720" tIns="27432" bIns="27432">
+            <a:spAutoFit/>
+          </a:bodyPr>
+          <a:lstStyle/>
+          <a:p>
+            <a:pPr algn="l">
+              <a:spcAft>
+                <a:spcPts val="600"/>
+              </a:spcAft>
+            </a:pPr>
+            <a:r>
+              <a:rPr sz="1600" b="1">
+                <a:solidFill>
+                  <a:srgbClr val="E4573D"/>
+                </a:solidFill>
+                <a:latin typeface="Cambria"/>
+              </a:rPr>
+              <a:t>Next</a:t>
+            </a:r>
+          </a:p>
+        </p:txBody>
+      </p:sp>
+      <p:sp>
+        <p:nvSpPr>
+          <p:cNvPr id="8" name="TextBox 7"/>
+          <p:cNvSpPr txBox="1"/>
+          <p:nvPr/>
+        </p:nvSpPr>
+        <p:spPr>
+          <a:xfrm>
+            <a:off x="6446520" y="1874519"/>
+            <a:ext cx="4983480" cy="4343400"/>
+          </a:xfrm>
+          <a:prstGeom prst="rect">
+            <a:avLst/>
+          </a:prstGeom>
+          <a:noFill/>
+        </p:spPr>
+        <p:txBody>
+          <a:bodyPr wrap="square" anchor="t" lIns="45720" rIns="45720" tIns="27432" bIns="27432">
+            <a:spAutoFit/>
+          </a:bodyPr>
+          <a:lstStyle/>
+          <a:p>
+            <a:pPr algn="l">
+              <a:spcAft>
+                <a:spcPts val="800"/>
+              </a:spcAft>
+            </a:pPr>
+            <a:r>
+              <a:rPr sz="1200" b="0">
+                <a:solidFill>
+                  <a:srgbClr val="1B1B1B"/>
+                </a:solidFill>
+                <a:latin typeface="Calibri"/>
+              </a:rPr>
+              <a:t>•  A monitoring page fed by the decision logs: the five weekly numbers, with the rollback lines drawn on.</a:t>
+            </a:r>
+          </a:p>
+          <a:p>
+            <a:pPr algn="l">
+              <a:spcAft>
+                <a:spcPts val="800"/>
+              </a:spcAft>
+            </a:pPr>
+            <a:r>
+              <a:rPr sz="1200" b="0">
+                <a:solidFill>
+                  <a:srgbClr val="1B1B1B"/>
+                </a:solidFill>
+                <a:latin typeface="Calibri"/>
+              </a:rPr>
+              <a:t>•  Re-check a sample of the model's answers every week; alert if a question's accuracy drops.</a:t>
+            </a:r>
+          </a:p>
+          <a:p>
+            <a:pPr algn="l">
+              <a:spcAft>
+                <a:spcPts val="800"/>
+              </a:spcAft>
+            </a:pPr>
+            <a:r>
+              <a:rPr sz="1200" b="0">
+                <a:solidFill>
+                  <a:srgbClr val="1B1B1B"/>
+                </a:solidFill>
+                <a:latin typeface="Calibri"/>
+              </a:rPr>
+              <a:t>•  Make the engine always run guard rules before approval rules, and let one sentence become several changes ('stolen-card cases go straight through' really means: narrow the fraud guard, then add an approval).</a:t>
+            </a:r>
+          </a:p>
+          <a:p>
+            <a:pPr algn="l">
+              <a:spcAft>
+                <a:spcPts val="800"/>
+              </a:spcAft>
+            </a:pPr>
+            <a:r>
+              <a:rPr sz="1200" b="0">
+                <a:solidFill>
+                  <a:srgbClr val="1B1B1B"/>
+                </a:solidFill>
+                <a:latin typeface="Calibri"/>
+              </a:rPr>
+              <a:t>•  Real carrier data for signatures and traces, instead of reading support shorthand.</a:t>
+            </a:r>
+          </a:p>
+          <a:p>
+            <a:pPr algn="l">
+              <a:spcAft>
+                <a:spcPts val="800"/>
+              </a:spcAft>
+            </a:pPr>
+            <a:r>
+              <a:rPr sz="1200" b="0">
+                <a:solidFill>
+                  <a:srgbClr val="1B1B1B"/>
+                </a:solidFill>
+                <a:latin typeface="Calibri"/>
+              </a:rPr>
+              <a:t>•  When a reviewer overrides a routed case, suggest the rule change that would have automated it.</a:t>
             </a:r>
           </a:p>
         </p:txBody>

--- a/docs/presentation.pptx
+++ b/docs/presentation.pptx
@@ -4,17 +4,20 @@
   <p:sldMasterIdLst>
     <p:sldMasterId id="2147483648" r:id="rId1"/>
   </p:sldMasterIdLst>
+  <p:notesMasterIdLst>
+    <p:notesMasterId r:id="rId10"/>
+  </p:notesMasterIdLst>
   <p:sldIdLst>
-    <p:sldId id="256" r:id="rId7"/>
-    <p:sldId id="257" r:id="rId9"/>
-    <p:sldId id="258" r:id="rId10"/>
-    <p:sldId id="259" r:id="rId11"/>
-    <p:sldId id="260" r:id="rId12"/>
-    <p:sldId id="261" r:id="rId13"/>
-    <p:sldId id="262" r:id="rId14"/>
-    <p:sldId id="263" r:id="rId15"/>
+    <p:sldId id="256" r:id="rId2"/>
+    <p:sldId id="257" r:id="rId3"/>
+    <p:sldId id="258" r:id="rId4"/>
+    <p:sldId id="259" r:id="rId5"/>
+    <p:sldId id="260" r:id="rId6"/>
+    <p:sldId id="261" r:id="rId7"/>
+    <p:sldId id="262" r:id="rId8"/>
+    <p:sldId id="263" r:id="rId9"/>
   </p:sldIdLst>
-  <p:sldSz cx="12191695" cy="6858000" type="screen4x3"/>
+  <p:sldSz cx="12192000" cy="6858000"/>
   <p:notesSz cx="6858000" cy="9144000"/>
   <p:defaultTextStyle>
     <a:defPPr>
@@ -111,11 +114,27 @@
       </a:defRPr>
     </a:lvl9pPr>
   </p:defaultTextStyle>
+  <p:extLst>
+    <p:ext uri="{EFAFB233-063F-42B5-8137-9DF3F51BA10A}">
+      <p15:sldGuideLst xmlns:p15="http://schemas.microsoft.com/office/powerpoint/2012/main">
+        <p15:guide id="1" orient="horz" pos="2160">
+          <p15:clr>
+            <a:srgbClr val="A4A3A4"/>
+          </p15:clr>
+        </p15:guide>
+        <p15:guide id="2" pos="2880">
+          <p15:clr>
+            <a:srgbClr val="A4A3A4"/>
+          </p15:clr>
+        </p15:guide>
+      </p15:sldGuideLst>
+    </p:ext>
+  </p:extLst>
 </p:presentation>
 </file>
 
 <file path=ppt/notesMasters/notesMaster1.xml><?xml version="1.0" encoding="utf-8"?>
-<p:notesMaster xmlns:a="http://schemas.openxmlformats.org/drawingml/2006/main" xmlns:p="http://schemas.openxmlformats.org/presentationml/2006/main" xmlns:r="http://schemas.openxmlformats.org/officeDocument/2006/relationships">
+<p:notesMaster xmlns:a="http://schemas.openxmlformats.org/drawingml/2006/main" xmlns:r="http://schemas.openxmlformats.org/officeDocument/2006/relationships" xmlns:p="http://schemas.openxmlformats.org/presentationml/2006/main">
   <p:cSld>
     <p:bg>
       <p:bgRef idx="1001">
@@ -136,241 +155,16 @@
           <a:chExt cx="0" cy="0"/>
         </a:xfrm>
       </p:grpSpPr>
-      <p:sp>
-        <p:nvSpPr>
-          <p:cNvPr id="2" name="Header Placeholder 1"/>
-          <p:cNvSpPr>
-            <a:spLocks noGrp="1"/>
-          </p:cNvSpPr>
-          <p:nvPr>
-            <p:ph type="hdr" sz="quarter"/>
-          </p:nvPr>
-        </p:nvSpPr>
-        <p:spPr>
-          <a:xfrm>
-            <a:off x="0" y="0"/>
-            <a:ext cx="2971800" cy="457200"/>
-          </a:xfrm>
-          <a:prstGeom prst="rect">
-            <a:avLst/>
-          </a:prstGeom>
-        </p:spPr>
-        <p:txBody>
-          <a:bodyPr vert="horz" lIns="91440" tIns="45720" rIns="91440" bIns="45720" rtlCol="0"/>
-          <a:lstStyle>
-            <a:lvl1pPr algn="l">
-              <a:defRPr sz="1200"/>
-            </a:lvl1pPr>
-          </a:lstStyle>
-          <a:p>
-            <a:endParaRPr lang="en-US"/>
-          </a:p>
-        </p:txBody>
-      </p:sp>
-      <p:sp>
-        <p:nvSpPr>
-          <p:cNvPr id="3" name="Date Placeholder 2"/>
-          <p:cNvSpPr>
-            <a:spLocks noGrp="1"/>
-          </p:cNvSpPr>
-          <p:nvPr>
-            <p:ph type="dt" idx="1"/>
-          </p:nvPr>
-        </p:nvSpPr>
-        <p:spPr>
-          <a:xfrm>
-            <a:off x="3884613" y="0"/>
-            <a:ext cx="2971800" cy="457200"/>
-          </a:xfrm>
-          <a:prstGeom prst="rect">
-            <a:avLst/>
-          </a:prstGeom>
-        </p:spPr>
-        <p:txBody>
-          <a:bodyPr vert="horz" lIns="91440" tIns="45720" rIns="91440" bIns="45720" rtlCol="0"/>
-          <a:lstStyle>
-            <a:lvl1pPr algn="r">
-              <a:defRPr sz="1200"/>
-            </a:lvl1pPr>
-          </a:lstStyle>
-          <a:p>
-            <a:fld id="{0F89C1C7-3DCD-1040-A9CF-14679D8B5DDD}" type="datetimeFigureOut">
-              <a:rPr lang="en-US" smtClean="0"/>
-              <a:t>10/17/16</a:t>
-            </a:fld>
-            <a:endParaRPr lang="en-US"/>
-          </a:p>
-        </p:txBody>
-      </p:sp>
-      <p:sp>
-        <p:nvSpPr>
-          <p:cNvPr id="4" name="Slide Image Placeholder 3"/>
-          <p:cNvSpPr>
-            <a:spLocks noGrp="1" noRot="1" noChangeAspect="1"/>
-          </p:cNvSpPr>
-          <p:nvPr>
-            <p:ph type="sldImg" idx="2"/>
-          </p:nvPr>
-        </p:nvSpPr>
-        <p:spPr>
-          <a:xfrm>
-            <a:off x="1143000" y="685800"/>
-            <a:ext cx="4572000" cy="3429000"/>
-          </a:xfrm>
-          <a:prstGeom prst="rect">
-            <a:avLst/>
-          </a:prstGeom>
-          <a:noFill/>
-          <a:ln w="12700">
-            <a:solidFill>
-              <a:prstClr val="black"/>
-            </a:solidFill>
-          </a:ln>
-        </p:spPr>
-        <p:txBody>
-          <a:bodyPr vert="horz" lIns="91440" tIns="45720" rIns="91440" bIns="45720" rtlCol="0" anchor="ctr"/>
-          <a:lstStyle/>
-          <a:p>
-            <a:endParaRPr lang="en-US"/>
-          </a:p>
-        </p:txBody>
-      </p:sp>
-      <p:sp>
-        <p:nvSpPr>
-          <p:cNvPr id="5" name="Notes Placeholder 4"/>
-          <p:cNvSpPr>
-            <a:spLocks noGrp="1"/>
-          </p:cNvSpPr>
-          <p:nvPr>
-            <p:ph type="body" sz="quarter" idx="3"/>
-          </p:nvPr>
-        </p:nvSpPr>
-        <p:spPr>
-          <a:xfrm>
-            <a:off x="685800" y="4343400"/>
-            <a:ext cx="5486400" cy="4114800"/>
-          </a:xfrm>
-          <a:prstGeom prst="rect">
-            <a:avLst/>
-          </a:prstGeom>
-        </p:spPr>
-        <p:txBody>
-          <a:bodyPr vert="horz" lIns="91440" tIns="45720" rIns="91440" bIns="45720" rtlCol="0"/>
-          <a:lstStyle/>
-          <a:p>
-            <a:pPr lvl="0"/>
-            <a:r>
-              <a:rPr lang="en-US" smtClean="0"/>
-              <a:t>Click to edit Master text styles</a:t>
-            </a:r>
-          </a:p>
-          <a:p>
-            <a:pPr lvl="1"/>
-            <a:r>
-              <a:rPr lang="en-US" smtClean="0"/>
-              <a:t>Second level</a:t>
-            </a:r>
-          </a:p>
-          <a:p>
-            <a:pPr lvl="2"/>
-            <a:r>
-              <a:rPr lang="en-US" smtClean="0"/>
-              <a:t>Third level</a:t>
-            </a:r>
-          </a:p>
-          <a:p>
-            <a:pPr lvl="3"/>
-            <a:r>
-              <a:rPr lang="en-US" smtClean="0"/>
-              <a:t>Fourth level</a:t>
-            </a:r>
-          </a:p>
-          <a:p>
-            <a:pPr lvl="4"/>
-            <a:r>
-              <a:rPr lang="en-US" smtClean="0"/>
-              <a:t>Fifth level</a:t>
-            </a:r>
-            <a:endParaRPr lang="en-US"/>
-          </a:p>
-        </p:txBody>
-      </p:sp>
-      <p:sp>
-        <p:nvSpPr>
-          <p:cNvPr id="6" name="Footer Placeholder 5"/>
-          <p:cNvSpPr>
-            <a:spLocks noGrp="1"/>
-          </p:cNvSpPr>
-          <p:nvPr>
-            <p:ph type="ftr" sz="quarter" idx="4"/>
-          </p:nvPr>
-        </p:nvSpPr>
-        <p:spPr>
-          <a:xfrm>
-            <a:off x="0" y="8685213"/>
-            <a:ext cx="2971800" cy="457200"/>
-          </a:xfrm>
-          <a:prstGeom prst="rect">
-            <a:avLst/>
-          </a:prstGeom>
-        </p:spPr>
-        <p:txBody>
-          <a:bodyPr vert="horz" lIns="91440" tIns="45720" rIns="91440" bIns="45720" rtlCol="0" anchor="b"/>
-          <a:lstStyle>
-            <a:lvl1pPr algn="l">
-              <a:defRPr sz="1200"/>
-            </a:lvl1pPr>
-          </a:lstStyle>
-          <a:p>
-            <a:endParaRPr lang="en-US"/>
-          </a:p>
-        </p:txBody>
-      </p:sp>
-      <p:sp>
-        <p:nvSpPr>
-          <p:cNvPr id="7" name="Slide Number Placeholder 6"/>
-          <p:cNvSpPr>
-            <a:spLocks noGrp="1"/>
-          </p:cNvSpPr>
-          <p:nvPr>
-            <p:ph type="sldNum" sz="quarter" idx="5"/>
-          </p:nvPr>
-        </p:nvSpPr>
-        <p:spPr>
-          <a:xfrm>
-            <a:off x="3884613" y="8685213"/>
-            <a:ext cx="2971800" cy="457200"/>
-          </a:xfrm>
-          <a:prstGeom prst="rect">
-            <a:avLst/>
-          </a:prstGeom>
-        </p:spPr>
-        <p:txBody>
-          <a:bodyPr vert="horz" lIns="91440" tIns="45720" rIns="91440" bIns="45720" rtlCol="0" anchor="b"/>
-          <a:lstStyle>
-            <a:lvl1pPr algn="r">
-              <a:defRPr sz="1200"/>
-            </a:lvl1pPr>
-          </a:lstStyle>
-          <a:p>
-            <a:fld id="{BB5E49A5-4136-284D-997B-48E1D791AD67}" type="slidenum">
-              <a:rPr lang="en-US" smtClean="0"/>
-              <a:t>‹#›</a:t>
-            </a:fld>
-            <a:endParaRPr lang="en-US"/>
-          </a:p>
-        </p:txBody>
-      </p:sp>
     </p:spTree>
     <p:extLst>
       <p:ext uri="{BB962C8B-B14F-4D97-AF65-F5344CB8AC3E}">
-        <p14:creationId xmlns:p14="http://schemas.microsoft.com/office/powerpoint/2010/main" val="2623252185"/>
+        <p14:creationId xmlns:p14="http://schemas.microsoft.com/office/powerpoint/2010/main" val="1934159321"/>
       </p:ext>
     </p:extLst>
   </p:cSld>
   <p:clrMap bg1="lt1" tx1="dk1" bg2="lt2" tx2="dk2" accent1="accent1" accent2="accent2" accent3="accent3" accent4="accent4" accent5="accent5" accent6="accent6" hlink="hlink" folHlink="folHlink"/>
   <p:notesStyle>
-    <a:lvl1pPr marL="0" algn="l" defTabSz="457200" rtl="0" eaLnBrk="1" latinLnBrk="0" hangingPunct="1">
+    <a:lvl1pPr marL="0" algn="l" defTabSz="914400" rtl="0" eaLnBrk="1" latinLnBrk="0" hangingPunct="1">
       <a:defRPr sz="1200" kern="1200">
         <a:solidFill>
           <a:schemeClr val="tx1"/>
@@ -380,7 +174,7 @@
         <a:cs typeface="+mn-cs"/>
       </a:defRPr>
     </a:lvl1pPr>
-    <a:lvl2pPr marL="457200" algn="l" defTabSz="457200" rtl="0" eaLnBrk="1" latinLnBrk="0" hangingPunct="1">
+    <a:lvl2pPr marL="457200" algn="l" defTabSz="914400" rtl="0" eaLnBrk="1" latinLnBrk="0" hangingPunct="1">
       <a:defRPr sz="1200" kern="1200">
         <a:solidFill>
           <a:schemeClr val="tx1"/>
@@ -390,7 +184,7 @@
         <a:cs typeface="+mn-cs"/>
       </a:defRPr>
     </a:lvl2pPr>
-    <a:lvl3pPr marL="914400" algn="l" defTabSz="457200" rtl="0" eaLnBrk="1" latinLnBrk="0" hangingPunct="1">
+    <a:lvl3pPr marL="914400" algn="l" defTabSz="914400" rtl="0" eaLnBrk="1" latinLnBrk="0" hangingPunct="1">
       <a:defRPr sz="1200" kern="1200">
         <a:solidFill>
           <a:schemeClr val="tx1"/>
@@ -400,7 +194,7 @@
         <a:cs typeface="+mn-cs"/>
       </a:defRPr>
     </a:lvl3pPr>
-    <a:lvl4pPr marL="1371600" algn="l" defTabSz="457200" rtl="0" eaLnBrk="1" latinLnBrk="0" hangingPunct="1">
+    <a:lvl4pPr marL="1371600" algn="l" defTabSz="914400" rtl="0" eaLnBrk="1" latinLnBrk="0" hangingPunct="1">
       <a:defRPr sz="1200" kern="1200">
         <a:solidFill>
           <a:schemeClr val="tx1"/>
@@ -410,7 +204,7 @@
         <a:cs typeface="+mn-cs"/>
       </a:defRPr>
     </a:lvl4pPr>
-    <a:lvl5pPr marL="1828800" algn="l" defTabSz="457200" rtl="0" eaLnBrk="1" latinLnBrk="0" hangingPunct="1">
+    <a:lvl5pPr marL="1828800" algn="l" defTabSz="914400" rtl="0" eaLnBrk="1" latinLnBrk="0" hangingPunct="1">
       <a:defRPr sz="1200" kern="1200">
         <a:solidFill>
           <a:schemeClr val="tx1"/>
@@ -420,7 +214,7 @@
         <a:cs typeface="+mn-cs"/>
       </a:defRPr>
     </a:lvl5pPr>
-    <a:lvl6pPr marL="2286000" algn="l" defTabSz="457200" rtl="0" eaLnBrk="1" latinLnBrk="0" hangingPunct="1">
+    <a:lvl6pPr marL="2286000" algn="l" defTabSz="914400" rtl="0" eaLnBrk="1" latinLnBrk="0" hangingPunct="1">
       <a:defRPr sz="1200" kern="1200">
         <a:solidFill>
           <a:schemeClr val="tx1"/>
@@ -430,7 +224,7 @@
         <a:cs typeface="+mn-cs"/>
       </a:defRPr>
     </a:lvl6pPr>
-    <a:lvl7pPr marL="2743200" algn="l" defTabSz="457200" rtl="0" eaLnBrk="1" latinLnBrk="0" hangingPunct="1">
+    <a:lvl7pPr marL="2743200" algn="l" defTabSz="914400" rtl="0" eaLnBrk="1" latinLnBrk="0" hangingPunct="1">
       <a:defRPr sz="1200" kern="1200">
         <a:solidFill>
           <a:schemeClr val="tx1"/>
@@ -440,7 +234,7 @@
         <a:cs typeface="+mn-cs"/>
       </a:defRPr>
     </a:lvl7pPr>
-    <a:lvl8pPr marL="3200400" algn="l" defTabSz="457200" rtl="0" eaLnBrk="1" latinLnBrk="0" hangingPunct="1">
+    <a:lvl8pPr marL="3200400" algn="l" defTabSz="914400" rtl="0" eaLnBrk="1" latinLnBrk="0" hangingPunct="1">
       <a:defRPr sz="1200" kern="1200">
         <a:solidFill>
           <a:schemeClr val="tx1"/>
@@ -450,7 +244,7 @@
         <a:cs typeface="+mn-cs"/>
       </a:defRPr>
     </a:lvl8pPr>
-    <a:lvl9pPr marL="3657600" algn="l" defTabSz="457200" rtl="0" eaLnBrk="1" latinLnBrk="0" hangingPunct="1">
+    <a:lvl9pPr marL="3657600" algn="l" defTabSz="914400" rtl="0" eaLnBrk="1" latinLnBrk="0" hangingPunct="1">
       <a:defRPr sz="1200" kern="1200">
         <a:solidFill>
           <a:schemeClr val="tx1"/>
@@ -465,7 +259,7 @@
 </file>
 
 <file path=ppt/notesSlides/notesSlide1.xml><?xml version="1.0" encoding="utf-8"?>
-<p:notes xmlns:a="http://schemas.openxmlformats.org/drawingml/2006/main" xmlns:p="http://schemas.openxmlformats.org/presentationml/2006/main" xmlns:r="http://schemas.openxmlformats.org/officeDocument/2006/relationships">
+<p:notes xmlns:a="http://schemas.openxmlformats.org/drawingml/2006/main" xmlns:r="http://schemas.openxmlformats.org/officeDocument/2006/relationships" xmlns:p="http://schemas.openxmlformats.org/presentationml/2006/main">
   <p:cSld>
     <p:spTree>
       <p:nvGrpSpPr>
@@ -485,7 +279,7 @@
         <p:nvSpPr>
           <p:cNvPr id="2" name="Slide Image Placeholder 1"/>
           <p:cNvSpPr>
-            <a:spLocks noGrp="1"/>
+            <a:spLocks noGrp="1" noRot="1" noChangeAspect="1"/>
           </p:cNvSpPr>
           <p:nvPr>
             <p:ph type="sldImg" idx="2"/>
@@ -500,7 +294,7 @@
             <a:spLocks noGrp="1"/>
           </p:cNvSpPr>
           <p:nvPr>
-            <p:ph type="body" idx="3" sz="quarter"/>
+            <p:ph type="body" sz="quarter" idx="3"/>
           </p:nvPr>
         </p:nvSpPr>
         <p:spPr/>
@@ -521,7 +315,7 @@
             <a:spLocks noGrp="1"/>
           </p:cNvSpPr>
           <p:nvPr>
-            <p:ph type="sldNum" idx="5" sz="quarter"/>
+            <p:ph type="sldNum" sz="quarter" idx="5"/>
           </p:nvPr>
         </p:nvSpPr>
         <p:spPr/>
@@ -535,7 +329,7 @@
 </file>
 
 <file path=ppt/notesSlides/notesSlide2.xml><?xml version="1.0" encoding="utf-8"?>
-<p:notes xmlns:a="http://schemas.openxmlformats.org/drawingml/2006/main" xmlns:p="http://schemas.openxmlformats.org/presentationml/2006/main" xmlns:r="http://schemas.openxmlformats.org/officeDocument/2006/relationships">
+<p:notes xmlns:a="http://schemas.openxmlformats.org/drawingml/2006/main" xmlns:r="http://schemas.openxmlformats.org/officeDocument/2006/relationships" xmlns:p="http://schemas.openxmlformats.org/presentationml/2006/main">
   <p:cSld>
     <p:spTree>
       <p:nvGrpSpPr>
@@ -555,7 +349,7 @@
         <p:nvSpPr>
           <p:cNvPr id="2" name="Slide Image Placeholder 1"/>
           <p:cNvSpPr>
-            <a:spLocks noGrp="1"/>
+            <a:spLocks noGrp="1" noRot="1" noChangeAspect="1"/>
           </p:cNvSpPr>
           <p:nvPr>
             <p:ph type="sldImg" idx="2"/>
@@ -570,7 +364,7 @@
             <a:spLocks noGrp="1"/>
           </p:cNvSpPr>
           <p:nvPr>
-            <p:ph type="body" idx="3" sz="quarter"/>
+            <p:ph type="body" sz="quarter" idx="3"/>
           </p:nvPr>
         </p:nvSpPr>
         <p:spPr/>
@@ -591,7 +385,7 @@
             <a:spLocks noGrp="1"/>
           </p:cNvSpPr>
           <p:nvPr>
-            <p:ph type="sldNum" idx="5" sz="quarter"/>
+            <p:ph type="sldNum" sz="quarter" idx="5"/>
           </p:nvPr>
         </p:nvSpPr>
         <p:spPr/>
@@ -605,7 +399,7 @@
 </file>
 
 <file path=ppt/notesSlides/notesSlide3.xml><?xml version="1.0" encoding="utf-8"?>
-<p:notes xmlns:a="http://schemas.openxmlformats.org/drawingml/2006/main" xmlns:p="http://schemas.openxmlformats.org/presentationml/2006/main" xmlns:r="http://schemas.openxmlformats.org/officeDocument/2006/relationships">
+<p:notes xmlns:a="http://schemas.openxmlformats.org/drawingml/2006/main" xmlns:r="http://schemas.openxmlformats.org/officeDocument/2006/relationships" xmlns:p="http://schemas.openxmlformats.org/presentationml/2006/main">
   <p:cSld>
     <p:spTree>
       <p:nvGrpSpPr>
@@ -625,7 +419,7 @@
         <p:nvSpPr>
           <p:cNvPr id="2" name="Slide Image Placeholder 1"/>
           <p:cNvSpPr>
-            <a:spLocks noGrp="1"/>
+            <a:spLocks noGrp="1" noRot="1" noChangeAspect="1"/>
           </p:cNvSpPr>
           <p:nvPr>
             <p:ph type="sldImg" idx="2"/>
@@ -640,7 +434,7 @@
             <a:spLocks noGrp="1"/>
           </p:cNvSpPr>
           <p:nvPr>
-            <p:ph type="body" idx="3" sz="quarter"/>
+            <p:ph type="body" sz="quarter" idx="3"/>
           </p:nvPr>
         </p:nvSpPr>
         <p:spPr/>
@@ -661,7 +455,7 @@
             <a:spLocks noGrp="1"/>
           </p:cNvSpPr>
           <p:nvPr>
-            <p:ph type="sldNum" idx="5" sz="quarter"/>
+            <p:ph type="sldNum" sz="quarter" idx="5"/>
           </p:nvPr>
         </p:nvSpPr>
         <p:spPr/>
@@ -675,7 +469,7 @@
 </file>
 
 <file path=ppt/notesSlides/notesSlide4.xml><?xml version="1.0" encoding="utf-8"?>
-<p:notes xmlns:a="http://schemas.openxmlformats.org/drawingml/2006/main" xmlns:p="http://schemas.openxmlformats.org/presentationml/2006/main" xmlns:r="http://schemas.openxmlformats.org/officeDocument/2006/relationships">
+<p:notes xmlns:a="http://schemas.openxmlformats.org/drawingml/2006/main" xmlns:r="http://schemas.openxmlformats.org/officeDocument/2006/relationships" xmlns:p="http://schemas.openxmlformats.org/presentationml/2006/main">
   <p:cSld>
     <p:spTree>
       <p:nvGrpSpPr>
@@ -695,7 +489,7 @@
         <p:nvSpPr>
           <p:cNvPr id="2" name="Slide Image Placeholder 1"/>
           <p:cNvSpPr>
-            <a:spLocks noGrp="1"/>
+            <a:spLocks noGrp="1" noRot="1" noChangeAspect="1"/>
           </p:cNvSpPr>
           <p:nvPr>
             <p:ph type="sldImg" idx="2"/>
@@ -710,7 +504,7 @@
             <a:spLocks noGrp="1"/>
           </p:cNvSpPr>
           <p:nvPr>
-            <p:ph type="body" idx="3" sz="quarter"/>
+            <p:ph type="body" sz="quarter" idx="3"/>
           </p:nvPr>
         </p:nvSpPr>
         <p:spPr/>
@@ -731,7 +525,7 @@
             <a:spLocks noGrp="1"/>
           </p:cNvSpPr>
           <p:nvPr>
-            <p:ph type="sldNum" idx="5" sz="quarter"/>
+            <p:ph type="sldNum" sz="quarter" idx="5"/>
           </p:nvPr>
         </p:nvSpPr>
         <p:spPr/>
@@ -745,7 +539,7 @@
 </file>
 
 <file path=ppt/notesSlides/notesSlide5.xml><?xml version="1.0" encoding="utf-8"?>
-<p:notes xmlns:a="http://schemas.openxmlformats.org/drawingml/2006/main" xmlns:p="http://schemas.openxmlformats.org/presentationml/2006/main" xmlns:r="http://schemas.openxmlformats.org/officeDocument/2006/relationships">
+<p:notes xmlns:a="http://schemas.openxmlformats.org/drawingml/2006/main" xmlns:r="http://schemas.openxmlformats.org/officeDocument/2006/relationships" xmlns:p="http://schemas.openxmlformats.org/presentationml/2006/main">
   <p:cSld>
     <p:spTree>
       <p:nvGrpSpPr>
@@ -765,7 +559,7 @@
         <p:nvSpPr>
           <p:cNvPr id="2" name="Slide Image Placeholder 1"/>
           <p:cNvSpPr>
-            <a:spLocks noGrp="1"/>
+            <a:spLocks noGrp="1" noRot="1" noChangeAspect="1"/>
           </p:cNvSpPr>
           <p:nvPr>
             <p:ph type="sldImg" idx="2"/>
@@ -780,7 +574,7 @@
             <a:spLocks noGrp="1"/>
           </p:cNvSpPr>
           <p:nvPr>
-            <p:ph type="body" idx="3" sz="quarter"/>
+            <p:ph type="body" sz="quarter" idx="3"/>
           </p:nvPr>
         </p:nvSpPr>
         <p:spPr/>
@@ -801,7 +595,7 @@
             <a:spLocks noGrp="1"/>
           </p:cNvSpPr>
           <p:nvPr>
-            <p:ph type="sldNum" idx="5" sz="quarter"/>
+            <p:ph type="sldNum" sz="quarter" idx="5"/>
           </p:nvPr>
         </p:nvSpPr>
         <p:spPr/>
@@ -815,7 +609,7 @@
 </file>
 
 <file path=ppt/notesSlides/notesSlide6.xml><?xml version="1.0" encoding="utf-8"?>
-<p:notes xmlns:a="http://schemas.openxmlformats.org/drawingml/2006/main" xmlns:p="http://schemas.openxmlformats.org/presentationml/2006/main" xmlns:r="http://schemas.openxmlformats.org/officeDocument/2006/relationships">
+<p:notes xmlns:a="http://schemas.openxmlformats.org/drawingml/2006/main" xmlns:r="http://schemas.openxmlformats.org/officeDocument/2006/relationships" xmlns:p="http://schemas.openxmlformats.org/presentationml/2006/main">
   <p:cSld>
     <p:spTree>
       <p:nvGrpSpPr>
@@ -835,7 +629,7 @@
         <p:nvSpPr>
           <p:cNvPr id="2" name="Slide Image Placeholder 1"/>
           <p:cNvSpPr>
-            <a:spLocks noGrp="1"/>
+            <a:spLocks noGrp="1" noRot="1" noChangeAspect="1"/>
           </p:cNvSpPr>
           <p:nvPr>
             <p:ph type="sldImg" idx="2"/>
@@ -850,7 +644,7 @@
             <a:spLocks noGrp="1"/>
           </p:cNvSpPr>
           <p:nvPr>
-            <p:ph type="body" idx="3" sz="quarter"/>
+            <p:ph type="body" sz="quarter" idx="3"/>
           </p:nvPr>
         </p:nvSpPr>
         <p:spPr/>
@@ -871,7 +665,7 @@
             <a:spLocks noGrp="1"/>
           </p:cNvSpPr>
           <p:nvPr>
-            <p:ph type="sldNum" idx="5" sz="quarter"/>
+            <p:ph type="sldNum" sz="quarter" idx="5"/>
           </p:nvPr>
         </p:nvSpPr>
         <p:spPr/>
@@ -885,7 +679,7 @@
 </file>
 
 <file path=ppt/notesSlides/notesSlide7.xml><?xml version="1.0" encoding="utf-8"?>
-<p:notes xmlns:a="http://schemas.openxmlformats.org/drawingml/2006/main" xmlns:p="http://schemas.openxmlformats.org/presentationml/2006/main" xmlns:r="http://schemas.openxmlformats.org/officeDocument/2006/relationships">
+<p:notes xmlns:a="http://schemas.openxmlformats.org/drawingml/2006/main" xmlns:r="http://schemas.openxmlformats.org/officeDocument/2006/relationships" xmlns:p="http://schemas.openxmlformats.org/presentationml/2006/main">
   <p:cSld>
     <p:spTree>
       <p:nvGrpSpPr>
@@ -905,7 +699,7 @@
         <p:nvSpPr>
           <p:cNvPr id="2" name="Slide Image Placeholder 1"/>
           <p:cNvSpPr>
-            <a:spLocks noGrp="1"/>
+            <a:spLocks noGrp="1" noRot="1" noChangeAspect="1"/>
           </p:cNvSpPr>
           <p:nvPr>
             <p:ph type="sldImg" idx="2"/>
@@ -920,7 +714,7 @@
             <a:spLocks noGrp="1"/>
           </p:cNvSpPr>
           <p:nvPr>
-            <p:ph type="body" idx="3" sz="quarter"/>
+            <p:ph type="body" sz="quarter" idx="3"/>
           </p:nvPr>
         </p:nvSpPr>
         <p:spPr/>
@@ -941,7 +735,7 @@
             <a:spLocks noGrp="1"/>
           </p:cNvSpPr>
           <p:nvPr>
-            <p:ph type="sldNum" idx="5" sz="quarter"/>
+            <p:ph type="sldNum" sz="quarter" idx="5"/>
           </p:nvPr>
         </p:nvSpPr>
         <p:spPr/>
@@ -955,7 +749,7 @@
 </file>
 
 <file path=ppt/notesSlides/notesSlide8.xml><?xml version="1.0" encoding="utf-8"?>
-<p:notes xmlns:a="http://schemas.openxmlformats.org/drawingml/2006/main" xmlns:p="http://schemas.openxmlformats.org/presentationml/2006/main" xmlns:r="http://schemas.openxmlformats.org/officeDocument/2006/relationships">
+<p:notes xmlns:a="http://schemas.openxmlformats.org/drawingml/2006/main" xmlns:r="http://schemas.openxmlformats.org/officeDocument/2006/relationships" xmlns:p="http://schemas.openxmlformats.org/presentationml/2006/main">
   <p:cSld>
     <p:spTree>
       <p:nvGrpSpPr>
@@ -975,7 +769,7 @@
         <p:nvSpPr>
           <p:cNvPr id="2" name="Slide Image Placeholder 1"/>
           <p:cNvSpPr>
-            <a:spLocks noGrp="1"/>
+            <a:spLocks noGrp="1" noRot="1" noChangeAspect="1"/>
           </p:cNvSpPr>
           <p:nvPr>
             <p:ph type="sldImg" idx="2"/>
@@ -990,7 +784,7 @@
             <a:spLocks noGrp="1"/>
           </p:cNvSpPr>
           <p:nvPr>
-            <p:ph type="body" idx="3" sz="quarter"/>
+            <p:ph type="body" sz="quarter" idx="3"/>
           </p:nvPr>
         </p:nvSpPr>
         <p:spPr/>
@@ -1011,7 +805,7 @@
             <a:spLocks noGrp="1"/>
           </p:cNvSpPr>
           <p:nvPr>
-            <p:ph type="sldNum" idx="5" sz="quarter"/>
+            <p:ph type="sldNum" sz="quarter" idx="5"/>
           </p:nvPr>
         </p:nvSpPr>
         <p:spPr/>
@@ -1062,10 +856,9 @@
           <a:lstStyle/>
           <a:p>
             <a:r>
-              <a:rPr lang="en-US" smtClean="0"/>
+              <a:rPr lang="en-US"/>
               <a:t>Click to edit Master title style</a:t>
             </a:r>
-            <a:endParaRPr lang="en-US"/>
           </a:p>
         </p:txBody>
       </p:sp>
@@ -1181,10 +974,9 @@
           </a:lstStyle>
           <a:p>
             <a:r>
-              <a:rPr lang="en-US" smtClean="0"/>
+              <a:rPr lang="en-US"/>
               <a:t>Click to edit Master subtitle style</a:t>
             </a:r>
-            <a:endParaRPr lang="en-US"/>
           </a:p>
         </p:txBody>
       </p:sp>
@@ -1205,7 +997,7 @@
           <a:p>
             <a:fld id="{5BCAD085-E8A6-8845-BD4E-CB4CCA059FC4}" type="datetimeFigureOut">
               <a:rPr lang="en-US" smtClean="0"/>
-              <a:t>1/27/13</a:t>
+              <a:t>10/31/26</a:t>
             </a:fld>
             <a:endParaRPr lang="en-US"/>
           </a:p>
@@ -1299,10 +1091,9 @@
           <a:lstStyle/>
           <a:p>
             <a:r>
-              <a:rPr lang="en-US" smtClean="0"/>
+              <a:rPr lang="en-US"/>
               <a:t>Click to edit Master title style</a:t>
             </a:r>
-            <a:endParaRPr lang="en-US"/>
           </a:p>
         </p:txBody>
       </p:sp>
@@ -1323,38 +1114,37 @@
           <a:p>
             <a:pPr lvl="0"/>
             <a:r>
-              <a:rPr lang="en-US" smtClean="0"/>
+              <a:rPr lang="en-US"/>
               <a:t>Click to edit Master text styles</a:t>
             </a:r>
           </a:p>
           <a:p>
             <a:pPr lvl="1"/>
             <a:r>
-              <a:rPr lang="en-US" smtClean="0"/>
+              <a:rPr lang="en-US"/>
               <a:t>Second level</a:t>
             </a:r>
           </a:p>
           <a:p>
             <a:pPr lvl="2"/>
             <a:r>
-              <a:rPr lang="en-US" smtClean="0"/>
+              <a:rPr lang="en-US"/>
               <a:t>Third level</a:t>
             </a:r>
           </a:p>
           <a:p>
             <a:pPr lvl="3"/>
             <a:r>
-              <a:rPr lang="en-US" smtClean="0"/>
+              <a:rPr lang="en-US"/>
               <a:t>Fourth level</a:t>
             </a:r>
           </a:p>
           <a:p>
             <a:pPr lvl="4"/>
             <a:r>
-              <a:rPr lang="en-US" smtClean="0"/>
+              <a:rPr lang="en-US"/>
               <a:t>Fifth level</a:t>
             </a:r>
-            <a:endParaRPr lang="en-US"/>
           </a:p>
         </p:txBody>
       </p:sp>
@@ -1375,7 +1165,7 @@
           <a:p>
             <a:fld id="{5BCAD085-E8A6-8845-BD4E-CB4CCA059FC4}" type="datetimeFigureOut">
               <a:rPr lang="en-US" smtClean="0"/>
-              <a:t>1/27/13</a:t>
+              <a:t>10/31/26</a:t>
             </a:fld>
             <a:endParaRPr lang="en-US"/>
           </a:p>
@@ -1474,10 +1264,9 @@
           <a:lstStyle/>
           <a:p>
             <a:r>
-              <a:rPr lang="en-US" smtClean="0"/>
+              <a:rPr lang="en-US"/>
               <a:t>Click to edit Master title style</a:t>
             </a:r>
-            <a:endParaRPr lang="en-US"/>
           </a:p>
         </p:txBody>
       </p:sp>
@@ -1503,38 +1292,37 @@
           <a:p>
             <a:pPr lvl="0"/>
             <a:r>
-              <a:rPr lang="en-US" smtClean="0"/>
+              <a:rPr lang="en-US"/>
               <a:t>Click to edit Master text styles</a:t>
             </a:r>
           </a:p>
           <a:p>
             <a:pPr lvl="1"/>
             <a:r>
-              <a:rPr lang="en-US" smtClean="0"/>
+              <a:rPr lang="en-US"/>
               <a:t>Second level</a:t>
             </a:r>
           </a:p>
           <a:p>
             <a:pPr lvl="2"/>
             <a:r>
-              <a:rPr lang="en-US" smtClean="0"/>
+              <a:rPr lang="en-US"/>
               <a:t>Third level</a:t>
             </a:r>
           </a:p>
           <a:p>
             <a:pPr lvl="3"/>
             <a:r>
-              <a:rPr lang="en-US" smtClean="0"/>
+              <a:rPr lang="en-US"/>
               <a:t>Fourth level</a:t>
             </a:r>
           </a:p>
           <a:p>
             <a:pPr lvl="4"/>
             <a:r>
-              <a:rPr lang="en-US" smtClean="0"/>
+              <a:rPr lang="en-US"/>
               <a:t>Fifth level</a:t>
             </a:r>
-            <a:endParaRPr lang="en-US"/>
           </a:p>
         </p:txBody>
       </p:sp>
@@ -1555,7 +1343,7 @@
           <a:p>
             <a:fld id="{5BCAD085-E8A6-8845-BD4E-CB4CCA059FC4}" type="datetimeFigureOut">
               <a:rPr lang="en-US" smtClean="0"/>
-              <a:t>1/27/13</a:t>
+              <a:t>10/31/26</a:t>
             </a:fld>
             <a:endParaRPr lang="en-US"/>
           </a:p>
@@ -1649,10 +1437,9 @@
           <a:lstStyle/>
           <a:p>
             <a:r>
-              <a:rPr lang="en-US" smtClean="0"/>
+              <a:rPr lang="en-US"/>
               <a:t>Click to edit Master title style</a:t>
             </a:r>
-            <a:endParaRPr lang="en-US"/>
           </a:p>
         </p:txBody>
       </p:sp>
@@ -1673,38 +1460,37 @@
           <a:p>
             <a:pPr lvl="0"/>
             <a:r>
-              <a:rPr lang="en-US" smtClean="0"/>
+              <a:rPr lang="en-US"/>
               <a:t>Click to edit Master text styles</a:t>
             </a:r>
           </a:p>
           <a:p>
             <a:pPr lvl="1"/>
             <a:r>
-              <a:rPr lang="en-US" smtClean="0"/>
+              <a:rPr lang="en-US"/>
               <a:t>Second level</a:t>
             </a:r>
           </a:p>
           <a:p>
             <a:pPr lvl="2"/>
             <a:r>
-              <a:rPr lang="en-US" smtClean="0"/>
+              <a:rPr lang="en-US"/>
               <a:t>Third level</a:t>
             </a:r>
           </a:p>
           <a:p>
             <a:pPr lvl="3"/>
             <a:r>
-              <a:rPr lang="en-US" smtClean="0"/>
+              <a:rPr lang="en-US"/>
               <a:t>Fourth level</a:t>
             </a:r>
           </a:p>
           <a:p>
             <a:pPr lvl="4"/>
             <a:r>
-              <a:rPr lang="en-US" smtClean="0"/>
+              <a:rPr lang="en-US"/>
               <a:t>Fifth level</a:t>
             </a:r>
-            <a:endParaRPr lang="en-US"/>
           </a:p>
         </p:txBody>
       </p:sp>
@@ -1725,7 +1511,7 @@
           <a:p>
             <a:fld id="{5BCAD085-E8A6-8845-BD4E-CB4CCA059FC4}" type="datetimeFigureOut">
               <a:rPr lang="en-US" smtClean="0"/>
-              <a:t>1/27/13</a:t>
+              <a:t>10/31/26</a:t>
             </a:fld>
             <a:endParaRPr lang="en-US"/>
           </a:p>
@@ -1828,10 +1614,9 @@
           </a:lstStyle>
           <a:p>
             <a:r>
-              <a:rPr lang="en-US" smtClean="0"/>
+              <a:rPr lang="en-US"/>
               <a:t>Click to edit Master title style</a:t>
             </a:r>
-            <a:endParaRPr lang="en-US"/>
           </a:p>
         </p:txBody>
       </p:sp>
@@ -1948,7 +1733,7 @@
           <a:p>
             <a:pPr lvl="0"/>
             <a:r>
-              <a:rPr lang="en-US" smtClean="0"/>
+              <a:rPr lang="en-US"/>
               <a:t>Click to edit Master text styles</a:t>
             </a:r>
           </a:p>
@@ -1971,7 +1756,7 @@
           <a:p>
             <a:fld id="{5BCAD085-E8A6-8845-BD4E-CB4CCA059FC4}" type="datetimeFigureOut">
               <a:rPr lang="en-US" smtClean="0"/>
-              <a:t>1/27/13</a:t>
+              <a:t>10/31/26</a:t>
             </a:fld>
             <a:endParaRPr lang="en-US"/>
           </a:p>
@@ -2065,10 +1850,9 @@
           <a:lstStyle/>
           <a:p>
             <a:r>
-              <a:rPr lang="en-US" smtClean="0"/>
+              <a:rPr lang="en-US"/>
               <a:t>Click to edit Master title style</a:t>
             </a:r>
-            <a:endParaRPr lang="en-US"/>
           </a:p>
         </p:txBody>
       </p:sp>
@@ -2122,38 +1906,37 @@
           <a:p>
             <a:pPr lvl="0"/>
             <a:r>
-              <a:rPr lang="en-US" smtClean="0"/>
+              <a:rPr lang="en-US"/>
               <a:t>Click to edit Master text styles</a:t>
             </a:r>
           </a:p>
           <a:p>
             <a:pPr lvl="1"/>
             <a:r>
-              <a:rPr lang="en-US" smtClean="0"/>
+              <a:rPr lang="en-US"/>
               <a:t>Second level</a:t>
             </a:r>
           </a:p>
           <a:p>
             <a:pPr lvl="2"/>
             <a:r>
-              <a:rPr lang="en-US" smtClean="0"/>
+              <a:rPr lang="en-US"/>
               <a:t>Third level</a:t>
             </a:r>
           </a:p>
           <a:p>
             <a:pPr lvl="3"/>
             <a:r>
-              <a:rPr lang="en-US" smtClean="0"/>
+              <a:rPr lang="en-US"/>
               <a:t>Fourth level</a:t>
             </a:r>
           </a:p>
           <a:p>
             <a:pPr lvl="4"/>
             <a:r>
-              <a:rPr lang="en-US" smtClean="0"/>
+              <a:rPr lang="en-US"/>
               <a:t>Fifth level</a:t>
             </a:r>
-            <a:endParaRPr lang="en-US"/>
           </a:p>
         </p:txBody>
       </p:sp>
@@ -2207,38 +1990,37 @@
           <a:p>
             <a:pPr lvl="0"/>
             <a:r>
-              <a:rPr lang="en-US" smtClean="0"/>
+              <a:rPr lang="en-US"/>
               <a:t>Click to edit Master text styles</a:t>
             </a:r>
           </a:p>
           <a:p>
             <a:pPr lvl="1"/>
             <a:r>
-              <a:rPr lang="en-US" smtClean="0"/>
+              <a:rPr lang="en-US"/>
               <a:t>Second level</a:t>
             </a:r>
           </a:p>
           <a:p>
             <a:pPr lvl="2"/>
             <a:r>
-              <a:rPr lang="en-US" smtClean="0"/>
+              <a:rPr lang="en-US"/>
               <a:t>Third level</a:t>
             </a:r>
           </a:p>
           <a:p>
             <a:pPr lvl="3"/>
             <a:r>
-              <a:rPr lang="en-US" smtClean="0"/>
+              <a:rPr lang="en-US"/>
               <a:t>Fourth level</a:t>
             </a:r>
           </a:p>
           <a:p>
             <a:pPr lvl="4"/>
             <a:r>
-              <a:rPr lang="en-US" smtClean="0"/>
+              <a:rPr lang="en-US"/>
               <a:t>Fifth level</a:t>
             </a:r>
-            <a:endParaRPr lang="en-US"/>
           </a:p>
         </p:txBody>
       </p:sp>
@@ -2259,7 +2041,7 @@
           <a:p>
             <a:fld id="{5BCAD085-E8A6-8845-BD4E-CB4CCA059FC4}" type="datetimeFigureOut">
               <a:rPr lang="en-US" smtClean="0"/>
-              <a:t>1/27/13</a:t>
+              <a:t>10/31/26</a:t>
             </a:fld>
             <a:endParaRPr lang="en-US"/>
           </a:p>
@@ -2357,10 +2139,9 @@
           </a:lstStyle>
           <a:p>
             <a:r>
-              <a:rPr lang="en-US" smtClean="0"/>
+              <a:rPr lang="en-US"/>
               <a:t>Click to edit Master title style</a:t>
             </a:r>
-            <a:endParaRPr lang="en-US"/>
           </a:p>
         </p:txBody>
       </p:sp>
@@ -2423,7 +2204,7 @@
           <a:p>
             <a:pPr lvl="0"/>
             <a:r>
-              <a:rPr lang="en-US" smtClean="0"/>
+              <a:rPr lang="en-US"/>
               <a:t>Click to edit Master text styles</a:t>
             </a:r>
           </a:p>
@@ -2479,38 +2260,37 @@
           <a:p>
             <a:pPr lvl="0"/>
             <a:r>
-              <a:rPr lang="en-US" smtClean="0"/>
+              <a:rPr lang="en-US"/>
               <a:t>Click to edit Master text styles</a:t>
             </a:r>
           </a:p>
           <a:p>
             <a:pPr lvl="1"/>
             <a:r>
-              <a:rPr lang="en-US" smtClean="0"/>
+              <a:rPr lang="en-US"/>
               <a:t>Second level</a:t>
             </a:r>
           </a:p>
           <a:p>
             <a:pPr lvl="2"/>
             <a:r>
-              <a:rPr lang="en-US" smtClean="0"/>
+              <a:rPr lang="en-US"/>
               <a:t>Third level</a:t>
             </a:r>
           </a:p>
           <a:p>
             <a:pPr lvl="3"/>
             <a:r>
-              <a:rPr lang="en-US" smtClean="0"/>
+              <a:rPr lang="en-US"/>
               <a:t>Fourth level</a:t>
             </a:r>
           </a:p>
           <a:p>
             <a:pPr lvl="4"/>
             <a:r>
-              <a:rPr lang="en-US" smtClean="0"/>
+              <a:rPr lang="en-US"/>
               <a:t>Fifth level</a:t>
             </a:r>
-            <a:endParaRPr lang="en-US"/>
           </a:p>
         </p:txBody>
       </p:sp>
@@ -2573,7 +2353,7 @@
           <a:p>
             <a:pPr lvl="0"/>
             <a:r>
-              <a:rPr lang="en-US" smtClean="0"/>
+              <a:rPr lang="en-US"/>
               <a:t>Click to edit Master text styles</a:t>
             </a:r>
           </a:p>
@@ -2629,38 +2409,37 @@
           <a:p>
             <a:pPr lvl="0"/>
             <a:r>
-              <a:rPr lang="en-US" smtClean="0"/>
+              <a:rPr lang="en-US"/>
               <a:t>Click to edit Master text styles</a:t>
             </a:r>
           </a:p>
           <a:p>
             <a:pPr lvl="1"/>
             <a:r>
-              <a:rPr lang="en-US" smtClean="0"/>
+              <a:rPr lang="en-US"/>
               <a:t>Second level</a:t>
             </a:r>
           </a:p>
           <a:p>
             <a:pPr lvl="2"/>
             <a:r>
-              <a:rPr lang="en-US" smtClean="0"/>
+              <a:rPr lang="en-US"/>
               <a:t>Third level</a:t>
             </a:r>
           </a:p>
           <a:p>
             <a:pPr lvl="3"/>
             <a:r>
-              <a:rPr lang="en-US" smtClean="0"/>
+              <a:rPr lang="en-US"/>
               <a:t>Fourth level</a:t>
             </a:r>
           </a:p>
           <a:p>
             <a:pPr lvl="4"/>
             <a:r>
-              <a:rPr lang="en-US" smtClean="0"/>
+              <a:rPr lang="en-US"/>
               <a:t>Fifth level</a:t>
             </a:r>
-            <a:endParaRPr lang="en-US"/>
           </a:p>
         </p:txBody>
       </p:sp>
@@ -2681,7 +2460,7 @@
           <a:p>
             <a:fld id="{5BCAD085-E8A6-8845-BD4E-CB4CCA059FC4}" type="datetimeFigureOut">
               <a:rPr lang="en-US" smtClean="0"/>
-              <a:t>1/27/13</a:t>
+              <a:t>10/31/26</a:t>
             </a:fld>
             <a:endParaRPr lang="en-US"/>
           </a:p>
@@ -2775,10 +2554,9 @@
           <a:lstStyle/>
           <a:p>
             <a:r>
-              <a:rPr lang="en-US" smtClean="0"/>
+              <a:rPr lang="en-US"/>
               <a:t>Click to edit Master title style</a:t>
             </a:r>
-            <a:endParaRPr lang="en-US"/>
           </a:p>
         </p:txBody>
       </p:sp>
@@ -2799,7 +2577,7 @@
           <a:p>
             <a:fld id="{5BCAD085-E8A6-8845-BD4E-CB4CCA059FC4}" type="datetimeFigureOut">
               <a:rPr lang="en-US" smtClean="0"/>
-              <a:t>1/27/13</a:t>
+              <a:t>10/31/26</a:t>
             </a:fld>
             <a:endParaRPr lang="en-US"/>
           </a:p>
@@ -2894,7 +2672,7 @@
           <a:p>
             <a:fld id="{5BCAD085-E8A6-8845-BD4E-CB4CCA059FC4}" type="datetimeFigureOut">
               <a:rPr lang="en-US" smtClean="0"/>
-              <a:t>1/27/13</a:t>
+              <a:t>10/31/26</a:t>
             </a:fld>
             <a:endParaRPr lang="en-US"/>
           </a:p>
@@ -2997,10 +2775,9 @@
           </a:lstStyle>
           <a:p>
             <a:r>
-              <a:rPr lang="en-US" smtClean="0"/>
+              <a:rPr lang="en-US"/>
               <a:t>Click to edit Master title style</a:t>
             </a:r>
-            <a:endParaRPr lang="en-US"/>
           </a:p>
         </p:txBody>
       </p:sp>
@@ -3054,38 +2831,37 @@
           <a:p>
             <a:pPr lvl="0"/>
             <a:r>
-              <a:rPr lang="en-US" smtClean="0"/>
+              <a:rPr lang="en-US"/>
               <a:t>Click to edit Master text styles</a:t>
             </a:r>
           </a:p>
           <a:p>
             <a:pPr lvl="1"/>
             <a:r>
-              <a:rPr lang="en-US" smtClean="0"/>
+              <a:rPr lang="en-US"/>
               <a:t>Second level</a:t>
             </a:r>
           </a:p>
           <a:p>
             <a:pPr lvl="2"/>
             <a:r>
-              <a:rPr lang="en-US" smtClean="0"/>
+              <a:rPr lang="en-US"/>
               <a:t>Third level</a:t>
             </a:r>
           </a:p>
           <a:p>
             <a:pPr lvl="3"/>
             <a:r>
-              <a:rPr lang="en-US" smtClean="0"/>
+              <a:rPr lang="en-US"/>
               <a:t>Fourth level</a:t>
             </a:r>
           </a:p>
           <a:p>
             <a:pPr lvl="4"/>
             <a:r>
-              <a:rPr lang="en-US" smtClean="0"/>
+              <a:rPr lang="en-US"/>
               <a:t>Fifth level</a:t>
             </a:r>
-            <a:endParaRPr lang="en-US"/>
           </a:p>
         </p:txBody>
       </p:sp>
@@ -3148,7 +2924,7 @@
           <a:p>
             <a:pPr lvl="0"/>
             <a:r>
-              <a:rPr lang="en-US" smtClean="0"/>
+              <a:rPr lang="en-US"/>
               <a:t>Click to edit Master text styles</a:t>
             </a:r>
           </a:p>
@@ -3171,7 +2947,7 @@
           <a:p>
             <a:fld id="{5BCAD085-E8A6-8845-BD4E-CB4CCA059FC4}" type="datetimeFigureOut">
               <a:rPr lang="en-US" smtClean="0"/>
-              <a:t>1/27/13</a:t>
+              <a:t>10/31/26</a:t>
             </a:fld>
             <a:endParaRPr lang="en-US"/>
           </a:p>
@@ -3274,10 +3050,9 @@
           </a:lstStyle>
           <a:p>
             <a:r>
-              <a:rPr lang="en-US" smtClean="0"/>
+              <a:rPr lang="en-US"/>
               <a:t>Click to edit Master title style</a:t>
             </a:r>
-            <a:endParaRPr lang="en-US"/>
           </a:p>
         </p:txBody>
       </p:sp>
@@ -3401,7 +3176,7 @@
           <a:p>
             <a:pPr lvl="0"/>
             <a:r>
-              <a:rPr lang="en-US" smtClean="0"/>
+              <a:rPr lang="en-US"/>
               <a:t>Click to edit Master text styles</a:t>
             </a:r>
           </a:p>
@@ -3424,7 +3199,7 @@
           <a:p>
             <a:fld id="{5BCAD085-E8A6-8845-BD4E-CB4CCA059FC4}" type="datetimeFigureOut">
               <a:rPr lang="en-US" smtClean="0"/>
-              <a:t>1/27/13</a:t>
+              <a:t>10/31/26</a:t>
             </a:fld>
             <a:endParaRPr lang="en-US"/>
           </a:p>
@@ -3533,10 +3308,9 @@
           <a:lstStyle/>
           <a:p>
             <a:r>
-              <a:rPr lang="en-US" smtClean="0"/>
+              <a:rPr lang="en-US"/>
               <a:t>Click to edit Master title style</a:t>
             </a:r>
-            <a:endParaRPr lang="en-US"/>
           </a:p>
         </p:txBody>
       </p:sp>
@@ -3567,38 +3341,37 @@
           <a:p>
             <a:pPr lvl="0"/>
             <a:r>
-              <a:rPr lang="en-US" smtClean="0"/>
+              <a:rPr lang="en-US"/>
               <a:t>Click to edit Master text styles</a:t>
             </a:r>
           </a:p>
           <a:p>
             <a:pPr lvl="1"/>
             <a:r>
-              <a:rPr lang="en-US" smtClean="0"/>
+              <a:rPr lang="en-US"/>
               <a:t>Second level</a:t>
             </a:r>
           </a:p>
           <a:p>
             <a:pPr lvl="2"/>
             <a:r>
-              <a:rPr lang="en-US" smtClean="0"/>
+              <a:rPr lang="en-US"/>
               <a:t>Third level</a:t>
             </a:r>
           </a:p>
           <a:p>
             <a:pPr lvl="3"/>
             <a:r>
-              <a:rPr lang="en-US" smtClean="0"/>
+              <a:rPr lang="en-US"/>
               <a:t>Fourth level</a:t>
             </a:r>
           </a:p>
           <a:p>
             <a:pPr lvl="4"/>
             <a:r>
-              <a:rPr lang="en-US" smtClean="0"/>
+              <a:rPr lang="en-US"/>
               <a:t>Fifth level</a:t>
             </a:r>
-            <a:endParaRPr lang="en-US"/>
           </a:p>
         </p:txBody>
       </p:sp>
@@ -3637,7 +3410,7 @@
           <a:p>
             <a:fld id="{5BCAD085-E8A6-8845-BD4E-CB4CCA059FC4}" type="datetimeFigureOut">
               <a:rPr lang="en-US" smtClean="0"/>
-              <a:t>1/27/13</a:t>
+              <a:t>10/31/26</a:t>
             </a:fld>
             <a:endParaRPr lang="en-US"/>
           </a:p>
@@ -3996,7 +3769,7 @@
 </file>
 
 <file path=ppt/slides/slide1.xml><?xml version="1.0" encoding="utf-8"?>
-<p:sld xmlns:a="http://schemas.openxmlformats.org/drawingml/2006/main" xmlns:p="http://schemas.openxmlformats.org/presentationml/2006/main" xmlns:r="http://schemas.openxmlformats.org/officeDocument/2006/relationships">
+<p:sld xmlns:a="http://schemas.openxmlformats.org/drawingml/2006/main" xmlns:r="http://schemas.openxmlformats.org/officeDocument/2006/relationships" xmlns:p="http://schemas.openxmlformats.org/presentationml/2006/main">
   <p:cSld>
     <p:spTree>
       <p:nvGrpSpPr>
@@ -4004,7 +3777,14 @@
         <p:cNvGrpSpPr/>
         <p:nvPr/>
       </p:nvGrpSpPr>
-      <p:grpSpPr/>
+      <p:grpSpPr>
+        <a:xfrm>
+          <a:off x="0" y="0"/>
+          <a:ext cx="0" cy="0"/>
+          <a:chOff x="0" y="0"/>
+          <a:chExt cx="0" cy="0"/>
+        </a:xfrm>
+      </p:grpSpPr>
       <p:sp>
         <p:nvSpPr>
           <p:cNvPr id="2" name="Rectangle 1"/>
@@ -4046,6 +3826,7 @@
           <a:lstStyle/>
           <a:p>
             <a:pPr algn="ctr"/>
+            <a:endParaRPr/>
           </a:p>
         </p:txBody>
       </p:sp>
@@ -4066,7 +3847,7 @@
           <a:noFill/>
         </p:spPr>
         <p:txBody>
-          <a:bodyPr wrap="square" anchor="t" lIns="45720" rIns="45720" tIns="27432" bIns="27432">
+          <a:bodyPr wrap="square" lIns="45720" tIns="27432" rIns="45720" bIns="27432" anchor="t">
             <a:spAutoFit/>
           </a:bodyPr>
           <a:lstStyle/>
@@ -4105,7 +3886,7 @@
           <a:noFill/>
         </p:spPr>
         <p:txBody>
-          <a:bodyPr wrap="square" anchor="t" lIns="45720" rIns="45720" tIns="27432" bIns="27432">
+          <a:bodyPr wrap="square" lIns="45720" tIns="27432" rIns="45720" bIns="27432" anchor="t">
             <a:spAutoFit/>
           </a:bodyPr>
           <a:lstStyle/>
@@ -4168,6 +3949,7 @@
           <a:lstStyle/>
           <a:p>
             <a:pPr algn="ctr"/>
+            <a:endParaRPr/>
           </a:p>
         </p:txBody>
       </p:sp>
@@ -4188,7 +3970,7 @@
           <a:noFill/>
         </p:spPr>
         <p:txBody>
-          <a:bodyPr wrap="square" anchor="t" lIns="45720" rIns="45720" tIns="27432" bIns="27432">
+          <a:bodyPr wrap="square" lIns="45720" tIns="27432" rIns="45720" bIns="27432" anchor="t">
             <a:spAutoFit/>
           </a:bodyPr>
           <a:lstStyle/>
@@ -4227,7 +4009,7 @@
           <a:noFill/>
         </p:spPr>
         <p:txBody>
-          <a:bodyPr wrap="square" anchor="t" lIns="45720" rIns="45720" tIns="27432" bIns="27432">
+          <a:bodyPr wrap="square" lIns="45720" tIns="27432" rIns="45720" bIns="27432" anchor="t">
             <a:spAutoFit/>
           </a:bodyPr>
           <a:lstStyle/>
@@ -4290,6 +4072,7 @@
           <a:lstStyle/>
           <a:p>
             <a:pPr algn="ctr"/>
+            <a:endParaRPr/>
           </a:p>
         </p:txBody>
       </p:sp>
@@ -4310,7 +4093,7 @@
           <a:noFill/>
         </p:spPr>
         <p:txBody>
-          <a:bodyPr wrap="square" anchor="t" lIns="45720" rIns="45720" tIns="27432" bIns="27432">
+          <a:bodyPr wrap="square" lIns="45720" tIns="27432" rIns="45720" bIns="27432" anchor="t">
             <a:spAutoFit/>
           </a:bodyPr>
           <a:lstStyle/>
@@ -4349,7 +4132,7 @@
           <a:noFill/>
         </p:spPr>
         <p:txBody>
-          <a:bodyPr wrap="square" anchor="t" lIns="45720" rIns="45720" tIns="27432" bIns="27432">
+          <a:bodyPr wrap="square" lIns="45720" tIns="27432" rIns="45720" bIns="27432" anchor="t">
             <a:spAutoFit/>
           </a:bodyPr>
           <a:lstStyle/>
@@ -4412,6 +4195,7 @@
           <a:lstStyle/>
           <a:p>
             <a:pPr algn="ctr"/>
+            <a:endParaRPr/>
           </a:p>
         </p:txBody>
       </p:sp>
@@ -4432,7 +4216,7 @@
           <a:noFill/>
         </p:spPr>
         <p:txBody>
-          <a:bodyPr wrap="square" anchor="t" lIns="45720" rIns="45720" tIns="27432" bIns="27432">
+          <a:bodyPr wrap="square" lIns="45720" tIns="27432" rIns="45720" bIns="27432" anchor="t">
             <a:spAutoFit/>
           </a:bodyPr>
           <a:lstStyle/>
@@ -4471,7 +4255,7 @@
           <a:noFill/>
         </p:spPr>
         <p:txBody>
-          <a:bodyPr wrap="square" anchor="t" lIns="45720" rIns="45720" tIns="27432" bIns="27432">
+          <a:bodyPr wrap="square" lIns="45720" tIns="27432" rIns="45720" bIns="27432" anchor="t">
             <a:spAutoFit/>
           </a:bodyPr>
           <a:lstStyle/>
@@ -4534,6 +4318,7 @@
           <a:lstStyle/>
           <a:p>
             <a:pPr algn="ctr"/>
+            <a:endParaRPr/>
           </a:p>
         </p:txBody>
       </p:sp>
@@ -4554,7 +4339,7 @@
           <a:noFill/>
         </p:spPr>
         <p:txBody>
-          <a:bodyPr wrap="square" anchor="t" lIns="45720" rIns="45720" tIns="27432" bIns="27432">
+          <a:bodyPr wrap="square" lIns="45720" tIns="27432" rIns="45720" bIns="27432" anchor="t">
             <a:spAutoFit/>
           </a:bodyPr>
           <a:lstStyle/>
@@ -4593,7 +4378,7 @@
           <a:noFill/>
         </p:spPr>
         <p:txBody>
-          <a:bodyPr wrap="square" anchor="t" lIns="45720" rIns="45720" tIns="27432" bIns="27432">
+          <a:bodyPr wrap="square" lIns="45720" tIns="27432" rIns="45720" bIns="27432" anchor="t">
             <a:spAutoFit/>
           </a:bodyPr>
           <a:lstStyle/>
@@ -4632,7 +4417,7 @@
           <a:noFill/>
         </p:spPr>
         <p:txBody>
-          <a:bodyPr wrap="square" anchor="t" lIns="45720" rIns="45720" tIns="27432" bIns="27432">
+          <a:bodyPr wrap="square" lIns="45720" tIns="27432" rIns="45720" bIns="27432" anchor="t">
             <a:spAutoFit/>
           </a:bodyPr>
           <a:lstStyle/>
@@ -4679,7 +4464,7 @@
           <p:nvPr/>
         </p:nvPicPr>
         <p:blipFill>
-          <a:blip r:embed="rId2"/>
+          <a:blip r:embed="rId3"/>
           <a:stretch>
             <a:fillRect/>
           </a:stretch>
@@ -4711,7 +4496,7 @@
           <a:noFill/>
         </p:spPr>
         <p:txBody>
-          <a:bodyPr wrap="square" anchor="t" lIns="45720" rIns="45720" tIns="27432" bIns="27432">
+          <a:bodyPr wrap="square" lIns="45720" tIns="27432" rIns="45720" bIns="27432" anchor="t">
             <a:spAutoFit/>
           </a:bodyPr>
           <a:lstStyle/>
@@ -4742,7 +4527,7 @@
 </file>
 
 <file path=ppt/slides/slide2.xml><?xml version="1.0" encoding="utf-8"?>
-<p:sld xmlns:a="http://schemas.openxmlformats.org/drawingml/2006/main" xmlns:p="http://schemas.openxmlformats.org/presentationml/2006/main" xmlns:r="http://schemas.openxmlformats.org/officeDocument/2006/relationships">
+<p:sld xmlns:a="http://schemas.openxmlformats.org/drawingml/2006/main" xmlns:r="http://schemas.openxmlformats.org/officeDocument/2006/relationships" xmlns:p="http://schemas.openxmlformats.org/presentationml/2006/main">
   <p:cSld>
     <p:spTree>
       <p:nvGrpSpPr>
@@ -4750,7 +4535,14 @@
         <p:cNvGrpSpPr/>
         <p:nvPr/>
       </p:nvGrpSpPr>
-      <p:grpSpPr/>
+      <p:grpSpPr>
+        <a:xfrm>
+          <a:off x="0" y="0"/>
+          <a:ext cx="0" cy="0"/>
+          <a:chOff x="0" y="0"/>
+          <a:chExt cx="0" cy="0"/>
+        </a:xfrm>
+      </p:grpSpPr>
       <p:sp>
         <p:nvSpPr>
           <p:cNvPr id="2" name="TextBox 1"/>
@@ -4768,7 +4560,7 @@
           <a:noFill/>
         </p:spPr>
         <p:txBody>
-          <a:bodyPr wrap="square" anchor="t" lIns="45720" rIns="45720" tIns="27432" bIns="27432">
+          <a:bodyPr wrap="square" lIns="45720" tIns="27432" rIns="45720" bIns="27432" anchor="t">
             <a:spAutoFit/>
           </a:bodyPr>
           <a:lstStyle/>
@@ -4799,7 +4591,7 @@
           <p:nvPr/>
         </p:nvPicPr>
         <p:blipFill>
-          <a:blip r:embed="rId2"/>
+          <a:blip r:embed="rId3"/>
           <a:stretch>
             <a:fillRect/>
           </a:stretch>
@@ -4831,7 +4623,7 @@
           <a:noFill/>
         </p:spPr>
         <p:txBody>
-          <a:bodyPr wrap="square" anchor="t" lIns="45720" rIns="45720" tIns="27432" bIns="27432">
+          <a:bodyPr wrap="square" lIns="45720" tIns="27432" rIns="45720" bIns="27432" anchor="t">
             <a:spAutoFit/>
           </a:bodyPr>
           <a:lstStyle/>
@@ -4910,6 +4702,7 @@
           <a:lstStyle/>
           <a:p>
             <a:pPr algn="ctr"/>
+            <a:endParaRPr/>
           </a:p>
         </p:txBody>
       </p:sp>
@@ -4930,7 +4723,7 @@
           <a:noFill/>
         </p:spPr>
         <p:txBody>
-          <a:bodyPr wrap="square" anchor="t" lIns="45720" rIns="45720" tIns="27432" bIns="27432">
+          <a:bodyPr wrap="square" lIns="45720" tIns="27432" rIns="45720" bIns="27432" anchor="t">
             <a:spAutoFit/>
           </a:bodyPr>
           <a:lstStyle/>
@@ -4969,7 +4762,7 @@
           <a:noFill/>
         </p:spPr>
         <p:txBody>
-          <a:bodyPr wrap="square" anchor="t" lIns="45720" rIns="45720" tIns="27432" bIns="27432">
+          <a:bodyPr wrap="square" lIns="45720" tIns="27432" rIns="45720" bIns="27432" anchor="t">
             <a:spAutoFit/>
           </a:bodyPr>
           <a:lstStyle/>
@@ -5064,7 +4857,7 @@
 </file>
 
 <file path=ppt/slides/slide3.xml><?xml version="1.0" encoding="utf-8"?>
-<p:sld xmlns:a="http://schemas.openxmlformats.org/drawingml/2006/main" xmlns:p="http://schemas.openxmlformats.org/presentationml/2006/main" xmlns:r="http://schemas.openxmlformats.org/officeDocument/2006/relationships">
+<p:sld xmlns:a="http://schemas.openxmlformats.org/drawingml/2006/main" xmlns:r="http://schemas.openxmlformats.org/officeDocument/2006/relationships" xmlns:p="http://schemas.openxmlformats.org/presentationml/2006/main">
   <p:cSld>
     <p:spTree>
       <p:nvGrpSpPr>
@@ -5072,7 +4865,14 @@
         <p:cNvGrpSpPr/>
         <p:nvPr/>
       </p:nvGrpSpPr>
-      <p:grpSpPr/>
+      <p:grpSpPr>
+        <a:xfrm>
+          <a:off x="0" y="0"/>
+          <a:ext cx="0" cy="0"/>
+          <a:chOff x="0" y="0"/>
+          <a:chExt cx="0" cy="0"/>
+        </a:xfrm>
+      </p:grpSpPr>
       <p:sp>
         <p:nvSpPr>
           <p:cNvPr id="2" name="TextBox 1"/>
@@ -5081,8 +4881,8 @@
         </p:nvSpPr>
         <p:spPr>
           <a:xfrm>
-            <a:off x="548640" y="365760"/>
-            <a:ext cx="11094415" cy="685800"/>
+            <a:off x="278053" y="325090"/>
+            <a:ext cx="11094415" cy="486287"/>
           </a:xfrm>
           <a:prstGeom prst="rect">
             <a:avLst/>
@@ -5090,7 +4890,7 @@
           <a:noFill/>
         </p:spPr>
         <p:txBody>
-          <a:bodyPr wrap="square" anchor="t" lIns="45720" rIns="45720" tIns="27432" bIns="27432">
+          <a:bodyPr wrap="square" lIns="45720" tIns="27432" rIns="45720" bIns="27432" anchor="t">
             <a:spAutoFit/>
           </a:bodyPr>
           <a:lstStyle/>
@@ -5101,13 +4901,31 @@
               </a:spcAft>
             </a:pPr>
             <a:r>
-              <a:rPr sz="2800" b="1">
+              <a:rPr sz="2800" b="1" dirty="0">
                 <a:solidFill>
                   <a:srgbClr val="0A4A4A"/>
                 </a:solidFill>
                 <a:latin typeface="Cambria"/>
               </a:rPr>
-              <a:t>The new line: her notes set the rules, the data sets the numbers</a:t>
+              <a:t>The new line: </a:t>
+            </a:r>
+            <a:r>
+              <a:rPr lang="en-US" sz="2800" b="1" dirty="0">
+                <a:solidFill>
+                  <a:srgbClr val="0A4A4A"/>
+                </a:solidFill>
+                <a:latin typeface="Cambria"/>
+              </a:rPr>
+              <a:t>policy</a:t>
+            </a:r>
+            <a:r>
+              <a:rPr sz="2800" b="1" dirty="0">
+                <a:solidFill>
+                  <a:srgbClr val="0A4A4A"/>
+                </a:solidFill>
+                <a:latin typeface="Cambria"/>
+              </a:rPr>
+              <a:t> notes set the rules, the data sets the numbers</a:t>
             </a:r>
           </a:p>
         </p:txBody>
@@ -5122,7 +4940,7 @@
         </p:nvGraphicFramePr>
         <p:xfrm>
           <a:off x="548640" y="1234440"/>
-          <a:ext cx="5440680" cy="2048256"/>
+          <a:ext cx="5440680" cy="2383536"/>
         </p:xfrm>
         <a:graphic>
           <a:graphicData uri="http://schemas.openxmlformats.org/drawingml/2006/table">
@@ -5131,8 +4949,20 @@
                 <a:tableStyleId>{5C22544A-7EE6-4342-B048-85BDC9FD1C3A}</a:tableStyleId>
               </a:tblPr>
               <a:tblGrid>
-                <a:gridCol w="2514600"/>
-                <a:gridCol w="2926080"/>
+                <a:gridCol w="2514600">
+                  <a:extLst>
+                    <a:ext uri="{9D8B030D-6E8A-4147-A177-3AD203B41FA5}">
+                      <a16:colId xmlns:a16="http://schemas.microsoft.com/office/drawing/2014/main" val="20000"/>
+                    </a:ext>
+                  </a:extLst>
+                </a:gridCol>
+                <a:gridCol w="2926080">
+                  <a:extLst>
+                    <a:ext uri="{9D8B030D-6E8A-4147-A177-3AD203B41FA5}">
+                      <a16:colId xmlns:a16="http://schemas.microsoft.com/office/drawing/2014/main" val="20001"/>
+                    </a:ext>
+                  </a:extLst>
+                </a:gridCol>
               </a:tblGrid>
               <a:tr h="292608">
                 <a:tc>
@@ -5183,6 +5013,11 @@
                     </a:solidFill>
                   </a:tcPr>
                 </a:tc>
+                <a:extLst>
+                  <a:ext uri="{0D108BD9-81ED-4DB2-BD59-A6C34878D82A}">
+                    <a16:rowId xmlns:a16="http://schemas.microsoft.com/office/drawing/2014/main" val="10000"/>
+                  </a:ext>
+                </a:extLst>
               </a:tr>
               <a:tr h="292608">
                 <a:tc>
@@ -5233,6 +5068,11 @@
                     </a:solidFill>
                   </a:tcPr>
                 </a:tc>
+                <a:extLst>
+                  <a:ext uri="{0D108BD9-81ED-4DB2-BD59-A6C34878D82A}">
+                    <a16:rowId xmlns:a16="http://schemas.microsoft.com/office/drawing/2014/main" val="10001"/>
+                  </a:ext>
+                </a:extLst>
               </a:tr>
               <a:tr h="292608">
                 <a:tc>
@@ -5283,6 +5123,11 @@
                     </a:solidFill>
                   </a:tcPr>
                 </a:tc>
+                <a:extLst>
+                  <a:ext uri="{0D108BD9-81ED-4DB2-BD59-A6C34878D82A}">
+                    <a16:rowId xmlns:a16="http://schemas.microsoft.com/office/drawing/2014/main" val="10002"/>
+                  </a:ext>
+                </a:extLst>
               </a:tr>
               <a:tr h="292608">
                 <a:tc>
@@ -5333,6 +5178,11 @@
                     </a:solidFill>
                   </a:tcPr>
                 </a:tc>
+                <a:extLst>
+                  <a:ext uri="{0D108BD9-81ED-4DB2-BD59-A6C34878D82A}">
+                    <a16:rowId xmlns:a16="http://schemas.microsoft.com/office/drawing/2014/main" val="10003"/>
+                  </a:ext>
+                </a:extLst>
               </a:tr>
               <a:tr h="292608">
                 <a:tc>
@@ -5383,6 +5233,11 @@
                     </a:solidFill>
                   </a:tcPr>
                 </a:tc>
+                <a:extLst>
+                  <a:ext uri="{0D108BD9-81ED-4DB2-BD59-A6C34878D82A}">
+                    <a16:rowId xmlns:a16="http://schemas.microsoft.com/office/drawing/2014/main" val="10004"/>
+                  </a:ext>
+                </a:extLst>
               </a:tr>
               <a:tr h="292608">
                 <a:tc>
@@ -5433,6 +5288,11 @@
                     </a:solidFill>
                   </a:tcPr>
                 </a:tc>
+                <a:extLst>
+                  <a:ext uri="{0D108BD9-81ED-4DB2-BD59-A6C34878D82A}">
+                    <a16:rowId xmlns:a16="http://schemas.microsoft.com/office/drawing/2014/main" val="10005"/>
+                  </a:ext>
+                </a:extLst>
               </a:tr>
               <a:tr h="292608">
                 <a:tc>
@@ -5483,6 +5343,11 @@
                     </a:solidFill>
                   </a:tcPr>
                 </a:tc>
+                <a:extLst>
+                  <a:ext uri="{0D108BD9-81ED-4DB2-BD59-A6C34878D82A}">
+                    <a16:rowId xmlns:a16="http://schemas.microsoft.com/office/drawing/2014/main" val="10006"/>
+                  </a:ext>
+                </a:extLst>
               </a:tr>
             </a:tbl>
           </a:graphicData>
@@ -5505,7 +5370,7 @@
           <a:noFill/>
         </p:spPr>
         <p:txBody>
-          <a:bodyPr wrap="square" anchor="t" lIns="45720" rIns="45720" tIns="27432" bIns="27432">
+          <a:bodyPr wrap="square" lIns="45720" tIns="27432" rIns="45720" bIns="27432" anchor="t">
             <a:spAutoFit/>
           </a:bodyPr>
           <a:lstStyle/>
@@ -5532,7 +5397,7 @@
               </a:spcAft>
             </a:pPr>
             <a:r>
-              <a:rPr sz="1200" b="0">
+              <a:rPr sz="1200" b="0" dirty="0">
                 <a:solidFill>
                   <a:srgbClr val="1B1B1B"/>
                 </a:solidFill>
@@ -5548,7 +5413,7 @@
               </a:spcAft>
             </a:pPr>
             <a:r>
-              <a:rPr sz="1200" b="0">
+              <a:rPr sz="1200" b="0" dirty="0">
                 <a:solidFill>
                   <a:srgbClr val="1B1B1B"/>
                 </a:solidFill>
@@ -5568,7 +5433,7 @@
           <p:nvPr/>
         </p:nvPicPr>
         <p:blipFill>
-          <a:blip r:embed="rId2"/>
+          <a:blip r:embed="rId3"/>
           <a:stretch>
             <a:fillRect/>
           </a:stretch>
@@ -5600,7 +5465,7 @@
           <a:noFill/>
         </p:spPr>
         <p:txBody>
-          <a:bodyPr wrap="square" anchor="t" lIns="45720" rIns="45720" tIns="27432" bIns="27432">
+          <a:bodyPr wrap="square" lIns="45720" tIns="27432" rIns="45720" bIns="27432" anchor="t">
             <a:spAutoFit/>
           </a:bodyPr>
           <a:lstStyle/>
@@ -5632,7 +5497,7 @@
         </p:nvGraphicFramePr>
         <p:xfrm>
           <a:off x="6217920" y="4050029"/>
-          <a:ext cx="5440680" cy="1463040"/>
+          <a:ext cx="5440680" cy="1530096"/>
         </p:xfrm>
         <a:graphic>
           <a:graphicData uri="http://schemas.openxmlformats.org/drawingml/2006/table">
@@ -5641,10 +5506,34 @@
                 <a:tableStyleId>{5C22544A-7EE6-4342-B048-85BDC9FD1C3A}</a:tableStyleId>
               </a:tblPr>
               <a:tblGrid>
-                <a:gridCol w="1188720"/>
-                <a:gridCol w="1188720"/>
-                <a:gridCol w="1417320"/>
-                <a:gridCol w="1645920"/>
+                <a:gridCol w="1188720">
+                  <a:extLst>
+                    <a:ext uri="{9D8B030D-6E8A-4147-A177-3AD203B41FA5}">
+                      <a16:colId xmlns:a16="http://schemas.microsoft.com/office/drawing/2014/main" val="20000"/>
+                    </a:ext>
+                  </a:extLst>
+                </a:gridCol>
+                <a:gridCol w="1188720">
+                  <a:extLst>
+                    <a:ext uri="{9D8B030D-6E8A-4147-A177-3AD203B41FA5}">
+                      <a16:colId xmlns:a16="http://schemas.microsoft.com/office/drawing/2014/main" val="20001"/>
+                    </a:ext>
+                  </a:extLst>
+                </a:gridCol>
+                <a:gridCol w="1417320">
+                  <a:extLst>
+                    <a:ext uri="{9D8B030D-6E8A-4147-A177-3AD203B41FA5}">
+                      <a16:colId xmlns:a16="http://schemas.microsoft.com/office/drawing/2014/main" val="20002"/>
+                    </a:ext>
+                  </a:extLst>
+                </a:gridCol>
+                <a:gridCol w="1645920">
+                  <a:extLst>
+                    <a:ext uri="{9D8B030D-6E8A-4147-A177-3AD203B41FA5}">
+                      <a16:colId xmlns:a16="http://schemas.microsoft.com/office/drawing/2014/main" val="20003"/>
+                    </a:ext>
+                  </a:extLst>
+                </a:gridCol>
               </a:tblGrid>
               <a:tr h="292608">
                 <a:tc>
@@ -5743,6 +5632,11 @@
                     </a:solidFill>
                   </a:tcPr>
                 </a:tc>
+                <a:extLst>
+                  <a:ext uri="{0D108BD9-81ED-4DB2-BD59-A6C34878D82A}">
+                    <a16:rowId xmlns:a16="http://schemas.microsoft.com/office/drawing/2014/main" val="10000"/>
+                  </a:ext>
+                </a:extLst>
               </a:tr>
               <a:tr h="292608">
                 <a:tc>
@@ -5841,6 +5735,11 @@
                     </a:solidFill>
                   </a:tcPr>
                 </a:tc>
+                <a:extLst>
+                  <a:ext uri="{0D108BD9-81ED-4DB2-BD59-A6C34878D82A}">
+                    <a16:rowId xmlns:a16="http://schemas.microsoft.com/office/drawing/2014/main" val="10001"/>
+                  </a:ext>
+                </a:extLst>
               </a:tr>
               <a:tr h="292608">
                 <a:tc>
@@ -5939,6 +5838,11 @@
                     </a:solidFill>
                   </a:tcPr>
                 </a:tc>
+                <a:extLst>
+                  <a:ext uri="{0D108BD9-81ED-4DB2-BD59-A6C34878D82A}">
+                    <a16:rowId xmlns:a16="http://schemas.microsoft.com/office/drawing/2014/main" val="10002"/>
+                  </a:ext>
+                </a:extLst>
               </a:tr>
               <a:tr h="292608">
                 <a:tc>
@@ -6037,6 +5941,11 @@
                     </a:solidFill>
                   </a:tcPr>
                 </a:tc>
+                <a:extLst>
+                  <a:ext uri="{0D108BD9-81ED-4DB2-BD59-A6C34878D82A}">
+                    <a16:rowId xmlns:a16="http://schemas.microsoft.com/office/drawing/2014/main" val="10003"/>
+                  </a:ext>
+                </a:extLst>
               </a:tr>
               <a:tr h="292608">
                 <a:tc>
@@ -6135,6 +6044,11 @@
                     </a:solidFill>
                   </a:tcPr>
                 </a:tc>
+                <a:extLst>
+                  <a:ext uri="{0D108BD9-81ED-4DB2-BD59-A6C34878D82A}">
+                    <a16:rowId xmlns:a16="http://schemas.microsoft.com/office/drawing/2014/main" val="10004"/>
+                  </a:ext>
+                </a:extLst>
               </a:tr>
             </a:tbl>
           </a:graphicData>
@@ -6157,7 +6071,7 @@
           <a:noFill/>
         </p:spPr>
         <p:txBody>
-          <a:bodyPr wrap="square" anchor="t" lIns="45720" rIns="45720" tIns="27432" bIns="27432">
+          <a:bodyPr wrap="square" lIns="45720" tIns="27432" rIns="45720" bIns="27432" anchor="t">
             <a:spAutoFit/>
           </a:bodyPr>
           <a:lstStyle/>
@@ -6188,7 +6102,7 @@
 </file>
 
 <file path=ppt/slides/slide4.xml><?xml version="1.0" encoding="utf-8"?>
-<p:sld xmlns:a="http://schemas.openxmlformats.org/drawingml/2006/main" xmlns:p="http://schemas.openxmlformats.org/presentationml/2006/main" xmlns:r="http://schemas.openxmlformats.org/officeDocument/2006/relationships">
+<p:sld xmlns:a="http://schemas.openxmlformats.org/drawingml/2006/main" xmlns:r="http://schemas.openxmlformats.org/officeDocument/2006/relationships" xmlns:p="http://schemas.openxmlformats.org/presentationml/2006/main">
   <p:cSld>
     <p:spTree>
       <p:nvGrpSpPr>
@@ -6196,7 +6110,14 @@
         <p:cNvGrpSpPr/>
         <p:nvPr/>
       </p:nvGrpSpPr>
-      <p:grpSpPr/>
+      <p:grpSpPr>
+        <a:xfrm>
+          <a:off x="0" y="0"/>
+          <a:ext cx="0" cy="0"/>
+          <a:chOff x="0" y="0"/>
+          <a:chExt cx="0" cy="0"/>
+        </a:xfrm>
+      </p:grpSpPr>
       <p:sp>
         <p:nvSpPr>
           <p:cNvPr id="2" name="TextBox 1"/>
@@ -6214,7 +6135,7 @@
           <a:noFill/>
         </p:spPr>
         <p:txBody>
-          <a:bodyPr wrap="square" anchor="t" lIns="45720" rIns="45720" tIns="27432" bIns="27432">
+          <a:bodyPr wrap="square" lIns="45720" tIns="27432" rIns="45720" bIns="27432" anchor="t">
             <a:spAutoFit/>
           </a:bodyPr>
           <a:lstStyle/>
@@ -6277,6 +6198,7 @@
           <a:lstStyle/>
           <a:p>
             <a:pPr algn="ctr"/>
+            <a:endParaRPr/>
           </a:p>
         </p:txBody>
       </p:sp>
@@ -6297,7 +6219,7 @@
           <a:noFill/>
         </p:spPr>
         <p:txBody>
-          <a:bodyPr wrap="square" anchor="t" lIns="45720" rIns="45720" tIns="27432" bIns="27432">
+          <a:bodyPr wrap="square" lIns="45720" tIns="27432" rIns="45720" bIns="27432" anchor="t">
             <a:spAutoFit/>
           </a:bodyPr>
           <a:lstStyle/>
@@ -6376,6 +6298,7 @@
           <a:lstStyle/>
           <a:p>
             <a:pPr algn="ctr"/>
+            <a:endParaRPr/>
           </a:p>
         </p:txBody>
       </p:sp>
@@ -6420,6 +6343,7 @@
           <a:lstStyle/>
           <a:p>
             <a:pPr algn="ctr"/>
+            <a:endParaRPr/>
           </a:p>
         </p:txBody>
       </p:sp>
@@ -6440,7 +6364,7 @@
           <a:noFill/>
         </p:spPr>
         <p:txBody>
-          <a:bodyPr wrap="square" anchor="t" lIns="45720" rIns="45720" tIns="27432" bIns="27432">
+          <a:bodyPr wrap="square" lIns="45720" tIns="27432" rIns="45720" bIns="27432" anchor="t">
             <a:spAutoFit/>
           </a:bodyPr>
           <a:lstStyle/>
@@ -6519,6 +6443,7 @@
           <a:lstStyle/>
           <a:p>
             <a:pPr algn="ctr"/>
+            <a:endParaRPr/>
           </a:p>
         </p:txBody>
       </p:sp>
@@ -6563,6 +6488,7 @@
           <a:lstStyle/>
           <a:p>
             <a:pPr algn="ctr"/>
+            <a:endParaRPr/>
           </a:p>
         </p:txBody>
       </p:sp>
@@ -6583,7 +6509,7 @@
           <a:noFill/>
         </p:spPr>
         <p:txBody>
-          <a:bodyPr wrap="square" anchor="t" lIns="45720" rIns="45720" tIns="27432" bIns="27432">
+          <a:bodyPr wrap="square" lIns="45720" tIns="27432" rIns="45720" bIns="27432" anchor="t">
             <a:spAutoFit/>
           </a:bodyPr>
           <a:lstStyle/>
@@ -6662,6 +6588,7 @@
           <a:lstStyle/>
           <a:p>
             <a:pPr algn="ctr"/>
+            <a:endParaRPr/>
           </a:p>
         </p:txBody>
       </p:sp>
@@ -6706,6 +6633,7 @@
           <a:lstStyle/>
           <a:p>
             <a:pPr algn="ctr"/>
+            <a:endParaRPr/>
           </a:p>
         </p:txBody>
       </p:sp>
@@ -6726,7 +6654,7 @@
           <a:noFill/>
         </p:spPr>
         <p:txBody>
-          <a:bodyPr wrap="square" anchor="t" lIns="45720" rIns="45720" tIns="27432" bIns="27432">
+          <a:bodyPr wrap="square" lIns="45720" tIns="27432" rIns="45720" bIns="27432" anchor="t">
             <a:spAutoFit/>
           </a:bodyPr>
           <a:lstStyle/>
@@ -6805,6 +6733,7 @@
           <a:lstStyle/>
           <a:p>
             <a:pPr algn="ctr"/>
+            <a:endParaRPr/>
           </a:p>
         </p:txBody>
       </p:sp>
@@ -6825,7 +6754,7 @@
           <a:noFill/>
         </p:spPr>
         <p:txBody>
-          <a:bodyPr wrap="square" anchor="t" lIns="45720" rIns="45720" tIns="27432" bIns="27432">
+          <a:bodyPr wrap="square" lIns="45720" tIns="27432" rIns="45720" bIns="27432" anchor="t">
             <a:spAutoFit/>
           </a:bodyPr>
           <a:lstStyle/>
@@ -6904,6 +6833,7 @@
           <a:lstStyle/>
           <a:p>
             <a:pPr algn="ctr"/>
+            <a:endParaRPr/>
           </a:p>
         </p:txBody>
       </p:sp>
@@ -6948,6 +6878,7 @@
           <a:lstStyle/>
           <a:p>
             <a:pPr algn="ctr"/>
+            <a:endParaRPr/>
           </a:p>
         </p:txBody>
       </p:sp>
@@ -6968,7 +6899,7 @@
           <a:noFill/>
         </p:spPr>
         <p:txBody>
-          <a:bodyPr wrap="square" anchor="t" lIns="45720" rIns="45720" tIns="27432" bIns="27432">
+          <a:bodyPr wrap="square" lIns="45720" tIns="27432" rIns="45720" bIns="27432" anchor="t">
             <a:spAutoFit/>
           </a:bodyPr>
           <a:lstStyle/>
@@ -7047,6 +6978,7 @@
           <a:lstStyle/>
           <a:p>
             <a:pPr algn="ctr"/>
+            <a:endParaRPr/>
           </a:p>
         </p:txBody>
       </p:sp>
@@ -7091,6 +7023,7 @@
           <a:lstStyle/>
           <a:p>
             <a:pPr algn="ctr"/>
+            <a:endParaRPr/>
           </a:p>
         </p:txBody>
       </p:sp>
@@ -7111,7 +7044,7 @@
           <a:noFill/>
         </p:spPr>
         <p:txBody>
-          <a:bodyPr wrap="square" anchor="t" lIns="45720" rIns="45720" tIns="27432" bIns="27432">
+          <a:bodyPr wrap="square" lIns="45720" tIns="27432" rIns="45720" bIns="27432" anchor="t">
             <a:spAutoFit/>
           </a:bodyPr>
           <a:lstStyle/>
@@ -7166,7 +7099,7 @@
           <a:noFill/>
         </p:spPr>
         <p:txBody>
-          <a:bodyPr wrap="square" anchor="t" lIns="45720" rIns="45720" tIns="27432" bIns="27432">
+          <a:bodyPr wrap="square" lIns="45720" tIns="27432" rIns="45720" bIns="27432" anchor="t">
             <a:spAutoFit/>
           </a:bodyPr>
           <a:lstStyle/>
@@ -7221,7 +7154,7 @@
           <a:noFill/>
         </p:spPr>
         <p:txBody>
-          <a:bodyPr wrap="square" anchor="t" lIns="45720" rIns="45720" tIns="27432" bIns="27432">
+          <a:bodyPr wrap="square" lIns="45720" tIns="27432" rIns="45720" bIns="27432" anchor="t">
             <a:spAutoFit/>
           </a:bodyPr>
           <a:lstStyle/>
@@ -7300,6 +7233,7 @@
           <a:lstStyle/>
           <a:p>
             <a:pPr algn="ctr"/>
+            <a:endParaRPr/>
           </a:p>
         </p:txBody>
       </p:sp>
@@ -7320,7 +7254,7 @@
           <a:noFill/>
         </p:spPr>
         <p:txBody>
-          <a:bodyPr wrap="square" anchor="t" lIns="45720" rIns="45720" tIns="27432" bIns="27432">
+          <a:bodyPr wrap="square" lIns="45720" tIns="27432" rIns="45720" bIns="27432" anchor="t">
             <a:spAutoFit/>
           </a:bodyPr>
           <a:lstStyle/>
@@ -7359,7 +7293,7 @@
           <a:noFill/>
         </p:spPr>
         <p:txBody>
-          <a:bodyPr wrap="square" anchor="t" lIns="45720" rIns="45720" tIns="27432" bIns="27432">
+          <a:bodyPr wrap="square" lIns="45720" tIns="27432" rIns="45720" bIns="27432" anchor="t">
             <a:spAutoFit/>
           </a:bodyPr>
           <a:lstStyle/>
@@ -7438,6 +7372,7 @@
           <a:lstStyle/>
           <a:p>
             <a:pPr algn="ctr"/>
+            <a:endParaRPr/>
           </a:p>
         </p:txBody>
       </p:sp>
@@ -7458,7 +7393,7 @@
           <a:noFill/>
         </p:spPr>
         <p:txBody>
-          <a:bodyPr wrap="square" anchor="t" lIns="45720" rIns="45720" tIns="27432" bIns="27432">
+          <a:bodyPr wrap="square" lIns="45720" tIns="27432" rIns="45720" bIns="27432" anchor="t">
             <a:spAutoFit/>
           </a:bodyPr>
           <a:lstStyle/>
@@ -7497,7 +7432,7 @@
           <a:noFill/>
         </p:spPr>
         <p:txBody>
-          <a:bodyPr wrap="square" anchor="t" lIns="45720" rIns="45720" tIns="27432" bIns="27432">
+          <a:bodyPr wrap="square" lIns="45720" tIns="27432" rIns="45720" bIns="27432" anchor="t">
             <a:spAutoFit/>
           </a:bodyPr>
           <a:lstStyle/>
@@ -7576,6 +7511,7 @@
           <a:lstStyle/>
           <a:p>
             <a:pPr algn="ctr"/>
+            <a:endParaRPr/>
           </a:p>
         </p:txBody>
       </p:sp>
@@ -7596,7 +7532,7 @@
           <a:noFill/>
         </p:spPr>
         <p:txBody>
-          <a:bodyPr wrap="square" anchor="t" lIns="45720" rIns="45720" tIns="27432" bIns="27432">
+          <a:bodyPr wrap="square" lIns="45720" tIns="27432" rIns="45720" bIns="27432" anchor="t">
             <a:spAutoFit/>
           </a:bodyPr>
           <a:lstStyle/>
@@ -7635,7 +7571,7 @@
           <a:noFill/>
         </p:spPr>
         <p:txBody>
-          <a:bodyPr wrap="square" anchor="t" lIns="45720" rIns="45720" tIns="27432" bIns="27432">
+          <a:bodyPr wrap="square" lIns="45720" tIns="27432" rIns="45720" bIns="27432" anchor="t">
             <a:spAutoFit/>
           </a:bodyPr>
           <a:lstStyle/>
@@ -7682,7 +7618,7 @@
 </file>
 
 <file path=ppt/slides/slide5.xml><?xml version="1.0" encoding="utf-8"?>
-<p:sld xmlns:a="http://schemas.openxmlformats.org/drawingml/2006/main" xmlns:p="http://schemas.openxmlformats.org/presentationml/2006/main" xmlns:r="http://schemas.openxmlformats.org/officeDocument/2006/relationships">
+<p:sld xmlns:a="http://schemas.openxmlformats.org/drawingml/2006/main" xmlns:r="http://schemas.openxmlformats.org/officeDocument/2006/relationships" xmlns:p="http://schemas.openxmlformats.org/presentationml/2006/main">
   <p:cSld>
     <p:spTree>
       <p:nvGrpSpPr>
@@ -7690,7 +7626,14 @@
         <p:cNvGrpSpPr/>
         <p:nvPr/>
       </p:nvGrpSpPr>
-      <p:grpSpPr/>
+      <p:grpSpPr>
+        <a:xfrm>
+          <a:off x="0" y="0"/>
+          <a:ext cx="0" cy="0"/>
+          <a:chOff x="0" y="0"/>
+          <a:chExt cx="0" cy="0"/>
+        </a:xfrm>
+      </p:grpSpPr>
       <p:sp>
         <p:nvSpPr>
           <p:cNvPr id="2" name="TextBox 1"/>
@@ -7708,7 +7651,7 @@
           <a:noFill/>
         </p:spPr>
         <p:txBody>
-          <a:bodyPr wrap="square" anchor="t" lIns="45720" rIns="45720" tIns="27432" bIns="27432">
+          <a:bodyPr wrap="square" lIns="45720" tIns="27432" rIns="45720" bIns="27432" anchor="t">
             <a:spAutoFit/>
           </a:bodyPr>
           <a:lstStyle/>
@@ -7736,11 +7679,17 @@
           <p:cNvGraphicFramePr>
             <a:graphicFrameLocks noGrp="1"/>
           </p:cNvGraphicFramePr>
-          <p:nvPr/>
+          <p:nvPr>
+            <p:extLst>
+              <p:ext uri="{D42A27DB-BD31-4B8C-83A1-F6EECF244321}">
+                <p14:modId xmlns:p14="http://schemas.microsoft.com/office/powerpoint/2010/main" val="1170979996"/>
+              </p:ext>
+            </p:extLst>
+          </p:nvPr>
         </p:nvGraphicFramePr>
         <p:xfrm>
           <a:off x="548640" y="1234440"/>
-          <a:ext cx="11091672" cy="2926080"/>
+          <a:ext cx="11091672" cy="2535936"/>
         </p:xfrm>
         <a:graphic>
           <a:graphicData uri="http://schemas.openxmlformats.org/drawingml/2006/table">
@@ -7749,9 +7698,27 @@
                 <a:tableStyleId>{5C22544A-7EE6-4342-B048-85BDC9FD1C3A}</a:tableStyleId>
               </a:tblPr>
               <a:tblGrid>
-                <a:gridCol w="2148840"/>
-                <a:gridCol w="4023360"/>
-                <a:gridCol w="4919472"/>
+                <a:gridCol w="2148840">
+                  <a:extLst>
+                    <a:ext uri="{9D8B030D-6E8A-4147-A177-3AD203B41FA5}">
+                      <a16:colId xmlns:a16="http://schemas.microsoft.com/office/drawing/2014/main" val="20000"/>
+                    </a:ext>
+                  </a:extLst>
+                </a:gridCol>
+                <a:gridCol w="4023360">
+                  <a:extLst>
+                    <a:ext uri="{9D8B030D-6E8A-4147-A177-3AD203B41FA5}">
+                      <a16:colId xmlns:a16="http://schemas.microsoft.com/office/drawing/2014/main" val="20001"/>
+                    </a:ext>
+                  </a:extLst>
+                </a:gridCol>
+                <a:gridCol w="4919472">
+                  <a:extLst>
+                    <a:ext uri="{9D8B030D-6E8A-4147-A177-3AD203B41FA5}">
+                      <a16:colId xmlns:a16="http://schemas.microsoft.com/office/drawing/2014/main" val="20002"/>
+                    </a:ext>
+                  </a:extLst>
+                </a:gridCol>
               </a:tblGrid>
               <a:tr h="292608">
                 <a:tc>
@@ -7767,6 +7734,7 @@
                           <a:latin typeface="Calibri"/>
                         </a:defRPr>
                       </a:pPr>
+                      <a:endParaRPr/>
                     </a:p>
                   </a:txBody>
                   <a:tcPr marL="54864" marR="54864" marT="27432" marB="27432">
@@ -7823,6 +7791,11 @@
                     </a:solidFill>
                   </a:tcPr>
                 </a:tc>
+                <a:extLst>
+                  <a:ext uri="{0D108BD9-81ED-4DB2-BD59-A6C34878D82A}">
+                    <a16:rowId xmlns:a16="http://schemas.microsoft.com/office/drawing/2014/main" val="10000"/>
+                  </a:ext>
+                </a:extLst>
               </a:tr>
               <a:tr h="292608">
                 <a:tc>
@@ -7863,7 +7836,8 @@
                         </a:defRPr>
                       </a:pPr>
                       <a:r>
-                        <a:t>an old rule nobody remembers, then four reviewers</a:t>
+                        <a:rPr dirty="0"/>
+                        <a:t>an old rule, then four reviewers</a:t>
                       </a:r>
                     </a:p>
                   </a:txBody>
@@ -7897,6 +7871,11 @@
                     </a:solidFill>
                   </a:tcPr>
                 </a:tc>
+                <a:extLst>
+                  <a:ext uri="{0D108BD9-81ED-4DB2-BD59-A6C34878D82A}">
+                    <a16:rowId xmlns:a16="http://schemas.microsoft.com/office/drawing/2014/main" val="10001"/>
+                  </a:ext>
+                </a:extLst>
               </a:tr>
               <a:tr h="292608">
                 <a:tc>
@@ -7971,6 +7950,11 @@
                     </a:solidFill>
                   </a:tcPr>
                 </a:tc>
+                <a:extLst>
+                  <a:ext uri="{0D108BD9-81ED-4DB2-BD59-A6C34878D82A}">
+                    <a16:rowId xmlns:a16="http://schemas.microsoft.com/office/drawing/2014/main" val="10002"/>
+                  </a:ext>
+                </a:extLst>
               </a:tr>
               <a:tr h="292608">
                 <a:tc>
@@ -8011,6 +7995,7 @@
                         </a:defRPr>
                       </a:pPr>
                       <a:r>
+                        <a:rPr dirty="0"/>
                         <a:t>1,119 minutes over 137 requests</a:t>
                       </a:r>
                     </a:p>
@@ -8045,6 +8030,11 @@
                     </a:solidFill>
                   </a:tcPr>
                 </a:tc>
+                <a:extLst>
+                  <a:ext uri="{0D108BD9-81ED-4DB2-BD59-A6C34878D82A}">
+                    <a16:rowId xmlns:a16="http://schemas.microsoft.com/office/drawing/2014/main" val="10003"/>
+                  </a:ext>
+                </a:extLst>
               </a:tr>
               <a:tr h="292608">
                 <a:tc>
@@ -8085,6 +8075,7 @@
                         </a:defRPr>
                       </a:pPr>
                       <a:r>
+                        <a:rPr dirty="0"/>
                         <a:t>not recorded</a:t>
                       </a:r>
                     </a:p>
@@ -8119,6 +8110,11 @@
                     </a:solidFill>
                   </a:tcPr>
                 </a:tc>
+                <a:extLst>
+                  <a:ext uri="{0D108BD9-81ED-4DB2-BD59-A6C34878D82A}">
+                    <a16:rowId xmlns:a16="http://schemas.microsoft.com/office/drawing/2014/main" val="10004"/>
+                  </a:ext>
+                </a:extLst>
               </a:tr>
               <a:tr h="292608">
                 <a:tc>
@@ -8193,6 +8189,11 @@
                     </a:solidFill>
                   </a:tcPr>
                 </a:tc>
+                <a:extLst>
+                  <a:ext uri="{0D108BD9-81ED-4DB2-BD59-A6C34878D82A}">
+                    <a16:rowId xmlns:a16="http://schemas.microsoft.com/office/drawing/2014/main" val="10005"/>
+                  </a:ext>
+                </a:extLst>
               </a:tr>
               <a:tr h="292608">
                 <a:tc>
@@ -8267,154 +8268,11 @@
                     </a:solidFill>
                   </a:tcPr>
                 </a:tc>
-              </a:tr>
-              <a:tr h="292608">
-                <a:tc>
-                  <a:txBody>
-                    <a:bodyPr/>
-                    <a:lstStyle/>
-                    <a:p>
-                      <a:pPr>
-                        <a:defRPr sz="1100" b="0">
-                          <a:solidFill>
-                            <a:srgbClr val="1B1B1B"/>
-                          </a:solidFill>
-                          <a:latin typeface="Calibri"/>
-                        </a:defRPr>
-                      </a:pPr>
-                      <a:r>
-                        <a:t>changing a rule</a:t>
-                      </a:r>
-                    </a:p>
-                  </a:txBody>
-                  <a:tcPr marL="54864" marR="54864" marT="27432" marB="27432">
-                    <a:solidFill>
-                      <a:srgbClr val="F1EDE4"/>
-                    </a:solidFill>
-                  </a:tcPr>
-                </a:tc>
-                <a:tc>
-                  <a:txBody>
-                    <a:bodyPr/>
-                    <a:lstStyle/>
-                    <a:p>
-                      <a:pPr>
-                        <a:defRPr sz="1100" b="0">
-                          <a:solidFill>
-                            <a:srgbClr val="1B1B1B"/>
-                          </a:solidFill>
-                          <a:latin typeface="Calibri"/>
-                        </a:defRPr>
-                      </a:pPr>
-                      <a:r>
-                        <a:t>find whoever set it up at IT; no way to test it first</a:t>
-                      </a:r>
-                    </a:p>
-                  </a:txBody>
-                  <a:tcPr marL="54864" marR="54864" marT="27432" marB="27432">
-                    <a:solidFill>
-                      <a:srgbClr val="F1EDE4"/>
-                    </a:solidFill>
-                  </a:tcPr>
-                </a:tc>
-                <a:tc>
-                  <a:txBody>
-                    <a:bodyPr/>
-                    <a:lstStyle/>
-                    <a:p>
-                      <a:pPr>
-                        <a:defRPr sz="1100" b="0">
-                          <a:solidFill>
-                            <a:srgbClr val="1B1B1B"/>
-                          </a:solidFill>
-                          <a:latin typeface="Calibri"/>
-                        </a:defRPr>
-                      </a:pPr>
-                      <a:r>
-                        <a:t>the manager types a sentence, sees the dry run on 248 past cases, publishes a version; rollback in one click</a:t>
-                      </a:r>
-                    </a:p>
-                  </a:txBody>
-                  <a:tcPr marL="54864" marR="54864" marT="27432" marB="27432">
-                    <a:solidFill>
-                      <a:srgbClr val="F1EDE4"/>
-                    </a:solidFill>
-                  </a:tcPr>
-                </a:tc>
-              </a:tr>
-              <a:tr h="292608">
-                <a:tc>
-                  <a:txBody>
-                    <a:bodyPr/>
-                    <a:lstStyle/>
-                    <a:p>
-                      <a:pPr>
-                        <a:defRPr sz="1100" b="0">
-                          <a:solidFill>
-                            <a:srgbClr val="1B1B1B"/>
-                          </a:solidFill>
-                          <a:latin typeface="Calibri"/>
-                        </a:defRPr>
-                      </a:pPr>
-                      <a:r>
-                        <a:t>catching a bad rule</a:t>
-                      </a:r>
-                    </a:p>
-                  </a:txBody>
-                  <a:tcPr marL="54864" marR="54864" marT="27432" marB="27432">
-                    <a:solidFill>
-                      <a:srgbClr val="FFFFFF"/>
-                    </a:solidFill>
-                  </a:tcPr>
-                </a:tc>
-                <a:tc>
-                  <a:txBody>
-                    <a:bodyPr/>
-                    <a:lstStyle/>
-                    <a:p>
-                      <a:pPr>
-                        <a:defRPr sz="1100" b="0">
-                          <a:solidFill>
-                            <a:srgbClr val="1B1B1B"/>
-                          </a:solidFill>
-                          <a:latin typeface="Calibri"/>
-                        </a:defRPr>
-                      </a:pPr>
-                      <a:r>
-                        <a:t>a chargeback, weeks later</a:t>
-                      </a:r>
-                    </a:p>
-                  </a:txBody>
-                  <a:tcPr marL="54864" marR="54864" marT="27432" marB="27432">
-                    <a:solidFill>
-                      <a:srgbClr val="FFFFFF"/>
-                    </a:solidFill>
-                  </a:tcPr>
-                </a:tc>
-                <a:tc>
-                  <a:txBody>
-                    <a:bodyPr/>
-                    <a:lstStyle/>
-                    <a:p>
-                      <a:pPr>
-                        <a:defRPr sz="1100" b="0">
-                          <a:solidFill>
-                            <a:srgbClr val="1B1B1B"/>
-                          </a:solidFill>
-                          <a:latin typeface="Calibri"/>
-                        </a:defRPr>
-                      </a:pPr>
-                      <a:r>
-                        <a:t>the replay before publishing; five weekly numbers and two rollback levels after</a:t>
-                      </a:r>
-                    </a:p>
-                  </a:txBody>
-                  <a:tcPr marL="54864" marR="54864" marT="27432" marB="27432">
-                    <a:solidFill>
-                      <a:srgbClr val="FFFFFF"/>
-                    </a:solidFill>
-                  </a:tcPr>
-                </a:tc>
+                <a:extLst>
+                  <a:ext uri="{0D108BD9-81ED-4DB2-BD59-A6C34878D82A}">
+                    <a16:rowId xmlns:a16="http://schemas.microsoft.com/office/drawing/2014/main" val="10006"/>
+                  </a:ext>
+                </a:extLst>
               </a:tr>
               <a:tr h="292608">
                 <a:tc>
@@ -8479,6 +8337,7 @@
                         </a:defRPr>
                       </a:pPr>
                       <a:r>
+                        <a:rPr dirty="0"/>
                         <a:t>unchanged: the system never rejects</a:t>
                       </a:r>
                     </a:p>
@@ -8489,6 +8348,11 @@
                     </a:solidFill>
                   </a:tcPr>
                 </a:tc>
+                <a:extLst>
+                  <a:ext uri="{0D108BD9-81ED-4DB2-BD59-A6C34878D82A}">
+                    <a16:rowId xmlns:a16="http://schemas.microsoft.com/office/drawing/2014/main" val="10009"/>
+                  </a:ext>
+                </a:extLst>
               </a:tr>
             </a:tbl>
           </a:graphicData>
@@ -8535,6 +8399,7 @@
           <a:lstStyle/>
           <a:p>
             <a:pPr algn="ctr"/>
+            <a:endParaRPr/>
           </a:p>
         </p:txBody>
       </p:sp>
@@ -8555,7 +8420,7 @@
           <a:noFill/>
         </p:spPr>
         <p:txBody>
-          <a:bodyPr wrap="square" anchor="t" lIns="45720" rIns="45720" tIns="27432" bIns="27432">
+          <a:bodyPr wrap="square" lIns="45720" tIns="27432" rIns="45720" bIns="27432" anchor="t">
             <a:spAutoFit/>
           </a:bodyPr>
           <a:lstStyle/>
@@ -8594,7 +8459,7 @@
           <a:noFill/>
         </p:spPr>
         <p:txBody>
-          <a:bodyPr wrap="square" anchor="t" lIns="45720" rIns="45720" tIns="27432" bIns="27432">
+          <a:bodyPr wrap="square" lIns="45720" tIns="27432" rIns="45720" bIns="27432" anchor="t">
             <a:spAutoFit/>
           </a:bodyPr>
           <a:lstStyle/>
@@ -8657,6 +8522,7 @@
           <a:lstStyle/>
           <a:p>
             <a:pPr algn="ctr"/>
+            <a:endParaRPr/>
           </a:p>
         </p:txBody>
       </p:sp>
@@ -8668,7 +8534,7 @@
         </p:nvSpPr>
         <p:spPr>
           <a:xfrm>
-            <a:off x="4505858" y="5074920"/>
+            <a:off x="4505858" y="5102352"/>
             <a:ext cx="3179978" cy="594360"/>
           </a:xfrm>
           <a:prstGeom prst="rect">
@@ -8677,7 +8543,7 @@
           <a:noFill/>
         </p:spPr>
         <p:txBody>
-          <a:bodyPr wrap="square" anchor="t" lIns="45720" rIns="45720" tIns="27432" bIns="27432">
+          <a:bodyPr wrap="square" lIns="45720" tIns="27432" rIns="45720" bIns="27432" anchor="t">
             <a:spAutoFit/>
           </a:bodyPr>
           <a:lstStyle/>
@@ -8716,7 +8582,7 @@
           <a:noFill/>
         </p:spPr>
         <p:txBody>
-          <a:bodyPr wrap="square" anchor="t" lIns="45720" rIns="45720" tIns="27432" bIns="27432">
+          <a:bodyPr wrap="square" lIns="45720" tIns="27432" rIns="45720" bIns="27432" anchor="t">
             <a:spAutoFit/>
           </a:bodyPr>
           <a:lstStyle/>
@@ -8779,6 +8645,7 @@
           <a:lstStyle/>
           <a:p>
             <a:pPr algn="ctr"/>
+            <a:endParaRPr/>
           </a:p>
         </p:txBody>
       </p:sp>
@@ -8799,7 +8666,7 @@
           <a:noFill/>
         </p:spPr>
         <p:txBody>
-          <a:bodyPr wrap="square" anchor="t" lIns="45720" rIns="45720" tIns="27432" bIns="27432">
+          <a:bodyPr wrap="square" lIns="45720" tIns="27432" rIns="45720" bIns="27432" anchor="t">
             <a:spAutoFit/>
           </a:bodyPr>
           <a:lstStyle/>
@@ -8838,7 +8705,7 @@
           <a:noFill/>
         </p:spPr>
         <p:txBody>
-          <a:bodyPr wrap="square" anchor="t" lIns="45720" rIns="45720" tIns="27432" bIns="27432">
+          <a:bodyPr wrap="square" lIns="45720" tIns="27432" rIns="45720" bIns="27432" anchor="t">
             <a:spAutoFit/>
           </a:bodyPr>
           <a:lstStyle/>
@@ -8869,7 +8736,7 @@
 </file>
 
 <file path=ppt/slides/slide6.xml><?xml version="1.0" encoding="utf-8"?>
-<p:sld xmlns:a="http://schemas.openxmlformats.org/drawingml/2006/main" xmlns:p="http://schemas.openxmlformats.org/presentationml/2006/main" xmlns:r="http://schemas.openxmlformats.org/officeDocument/2006/relationships">
+<p:sld xmlns:a="http://schemas.openxmlformats.org/drawingml/2006/main" xmlns:r="http://schemas.openxmlformats.org/officeDocument/2006/relationships" xmlns:p="http://schemas.openxmlformats.org/presentationml/2006/main">
   <p:cSld>
     <p:spTree>
       <p:nvGrpSpPr>
@@ -8877,7 +8744,14 @@
         <p:cNvGrpSpPr/>
         <p:nvPr/>
       </p:nvGrpSpPr>
-      <p:grpSpPr/>
+      <p:grpSpPr>
+        <a:xfrm>
+          <a:off x="0" y="0"/>
+          <a:ext cx="0" cy="0"/>
+          <a:chOff x="0" y="0"/>
+          <a:chExt cx="0" cy="0"/>
+        </a:xfrm>
+      </p:grpSpPr>
       <p:sp>
         <p:nvSpPr>
           <p:cNvPr id="2" name="TextBox 1"/>
@@ -8895,7 +8769,7 @@
           <a:noFill/>
         </p:spPr>
         <p:txBody>
-          <a:bodyPr wrap="square" anchor="t" lIns="45720" rIns="45720" tIns="27432" bIns="27432">
+          <a:bodyPr wrap="square" lIns="45720" tIns="27432" rIns="45720" bIns="27432" anchor="t">
             <a:spAutoFit/>
           </a:bodyPr>
           <a:lstStyle/>
@@ -8958,6 +8832,7 @@
           <a:lstStyle/>
           <a:p>
             <a:pPr algn="ctr"/>
+            <a:endParaRPr/>
           </a:p>
         </p:txBody>
       </p:sp>
@@ -8978,7 +8853,7 @@
           <a:noFill/>
         </p:spPr>
         <p:txBody>
-          <a:bodyPr wrap="square" anchor="t" lIns="45720" rIns="45720" tIns="27432" bIns="27432">
+          <a:bodyPr wrap="square" lIns="45720" tIns="27432" rIns="45720" bIns="27432" anchor="t">
             <a:spAutoFit/>
           </a:bodyPr>
           <a:lstStyle/>
@@ -9017,7 +8892,7 @@
           <a:noFill/>
         </p:spPr>
         <p:txBody>
-          <a:bodyPr wrap="square" anchor="t" lIns="45720" rIns="45720" tIns="27432" bIns="27432">
+          <a:bodyPr wrap="square" lIns="45720" tIns="27432" rIns="45720" bIns="27432" anchor="t">
             <a:spAutoFit/>
           </a:bodyPr>
           <a:lstStyle/>
@@ -9096,6 +8971,7 @@
           <a:lstStyle/>
           <a:p>
             <a:pPr algn="ctr"/>
+            <a:endParaRPr/>
           </a:p>
         </p:txBody>
       </p:sp>
@@ -9116,7 +8992,7 @@
           <a:noFill/>
         </p:spPr>
         <p:txBody>
-          <a:bodyPr wrap="square" anchor="t" lIns="45720" rIns="45720" tIns="27432" bIns="27432">
+          <a:bodyPr wrap="square" lIns="45720" tIns="27432" rIns="45720" bIns="27432" anchor="t">
             <a:spAutoFit/>
           </a:bodyPr>
           <a:lstStyle/>
@@ -9155,7 +9031,7 @@
           <a:noFill/>
         </p:spPr>
         <p:txBody>
-          <a:bodyPr wrap="square" anchor="t" lIns="45720" rIns="45720" tIns="27432" bIns="27432">
+          <a:bodyPr wrap="square" lIns="45720" tIns="27432" rIns="45720" bIns="27432" anchor="t">
             <a:spAutoFit/>
           </a:bodyPr>
           <a:lstStyle/>
@@ -9210,7 +9086,7 @@
           <a:noFill/>
         </p:spPr>
         <p:txBody>
-          <a:bodyPr wrap="square" anchor="t" lIns="45720" rIns="45720" tIns="27432" bIns="27432">
+          <a:bodyPr wrap="square" lIns="45720" tIns="27432" rIns="45720" bIns="27432" anchor="t">
             <a:spAutoFit/>
           </a:bodyPr>
           <a:lstStyle/>
@@ -9251,8 +9127,20 @@
                 <a:tableStyleId>{5C22544A-7EE6-4342-B048-85BDC9FD1C3A}</a:tableStyleId>
               </a:tblPr>
               <a:tblGrid>
-                <a:gridCol w="2834640"/>
-                <a:gridCol w="2606040"/>
+                <a:gridCol w="2834640">
+                  <a:extLst>
+                    <a:ext uri="{9D8B030D-6E8A-4147-A177-3AD203B41FA5}">
+                      <a16:colId xmlns:a16="http://schemas.microsoft.com/office/drawing/2014/main" val="20000"/>
+                    </a:ext>
+                  </a:extLst>
+                </a:gridCol>
+                <a:gridCol w="2606040">
+                  <a:extLst>
+                    <a:ext uri="{9D8B030D-6E8A-4147-A177-3AD203B41FA5}">
+                      <a16:colId xmlns:a16="http://schemas.microsoft.com/office/drawing/2014/main" val="20001"/>
+                    </a:ext>
+                  </a:extLst>
+                </a:gridCol>
               </a:tblGrid>
               <a:tr h="292608">
                 <a:tc>
@@ -9303,6 +9191,11 @@
                     </a:solidFill>
                   </a:tcPr>
                 </a:tc>
+                <a:extLst>
+                  <a:ext uri="{0D108BD9-81ED-4DB2-BD59-A6C34878D82A}">
+                    <a16:rowId xmlns:a16="http://schemas.microsoft.com/office/drawing/2014/main" val="10000"/>
+                  </a:ext>
+                </a:extLst>
               </a:tr>
               <a:tr h="292608">
                 <a:tc>
@@ -9353,6 +9246,11 @@
                     </a:solidFill>
                   </a:tcPr>
                 </a:tc>
+                <a:extLst>
+                  <a:ext uri="{0D108BD9-81ED-4DB2-BD59-A6C34878D82A}">
+                    <a16:rowId xmlns:a16="http://schemas.microsoft.com/office/drawing/2014/main" val="10001"/>
+                  </a:ext>
+                </a:extLst>
               </a:tr>
               <a:tr h="292608">
                 <a:tc>
@@ -9403,6 +9301,11 @@
                     </a:solidFill>
                   </a:tcPr>
                 </a:tc>
+                <a:extLst>
+                  <a:ext uri="{0D108BD9-81ED-4DB2-BD59-A6C34878D82A}">
+                    <a16:rowId xmlns:a16="http://schemas.microsoft.com/office/drawing/2014/main" val="10002"/>
+                  </a:ext>
+                </a:extLst>
               </a:tr>
               <a:tr h="292608">
                 <a:tc>
@@ -9453,6 +9356,11 @@
                     </a:solidFill>
                   </a:tcPr>
                 </a:tc>
+                <a:extLst>
+                  <a:ext uri="{0D108BD9-81ED-4DB2-BD59-A6C34878D82A}">
+                    <a16:rowId xmlns:a16="http://schemas.microsoft.com/office/drawing/2014/main" val="10003"/>
+                  </a:ext>
+                </a:extLst>
               </a:tr>
               <a:tr h="292608">
                 <a:tc>
@@ -9503,6 +9411,11 @@
                     </a:solidFill>
                   </a:tcPr>
                 </a:tc>
+                <a:extLst>
+                  <a:ext uri="{0D108BD9-81ED-4DB2-BD59-A6C34878D82A}">
+                    <a16:rowId xmlns:a16="http://schemas.microsoft.com/office/drawing/2014/main" val="10004"/>
+                  </a:ext>
+                </a:extLst>
               </a:tr>
               <a:tr h="292608">
                 <a:tc>
@@ -9553,6 +9466,11 @@
                     </a:solidFill>
                   </a:tcPr>
                 </a:tc>
+                <a:extLst>
+                  <a:ext uri="{0D108BD9-81ED-4DB2-BD59-A6C34878D82A}">
+                    <a16:rowId xmlns:a16="http://schemas.microsoft.com/office/drawing/2014/main" val="10005"/>
+                  </a:ext>
+                </a:extLst>
               </a:tr>
             </a:tbl>
           </a:graphicData>
@@ -9575,7 +9493,7 @@
           <a:noFill/>
         </p:spPr>
         <p:txBody>
-          <a:bodyPr wrap="square" anchor="t" lIns="45720" rIns="45720" tIns="27432" bIns="27432">
+          <a:bodyPr wrap="square" lIns="45720" tIns="27432" rIns="45720" bIns="27432" anchor="t">
             <a:spAutoFit/>
           </a:bodyPr>
           <a:lstStyle/>
@@ -9606,7 +9524,7 @@
 </file>
 
 <file path=ppt/slides/slide7.xml><?xml version="1.0" encoding="utf-8"?>
-<p:sld xmlns:a="http://schemas.openxmlformats.org/drawingml/2006/main" xmlns:p="http://schemas.openxmlformats.org/presentationml/2006/main" xmlns:r="http://schemas.openxmlformats.org/officeDocument/2006/relationships">
+<p:sld xmlns:a="http://schemas.openxmlformats.org/drawingml/2006/main" xmlns:r="http://schemas.openxmlformats.org/officeDocument/2006/relationships" xmlns:p="http://schemas.openxmlformats.org/presentationml/2006/main">
   <p:cSld>
     <p:spTree>
       <p:nvGrpSpPr>
@@ -9614,7 +9532,14 @@
         <p:cNvGrpSpPr/>
         <p:nvPr/>
       </p:nvGrpSpPr>
-      <p:grpSpPr/>
+      <p:grpSpPr>
+        <a:xfrm>
+          <a:off x="0" y="0"/>
+          <a:ext cx="0" cy="0"/>
+          <a:chOff x="0" y="0"/>
+          <a:chExt cx="0" cy="0"/>
+        </a:xfrm>
+      </p:grpSpPr>
       <p:sp>
         <p:nvSpPr>
           <p:cNvPr id="2" name="TextBox 1"/>
@@ -9632,7 +9557,7 @@
           <a:noFill/>
         </p:spPr>
         <p:txBody>
-          <a:bodyPr wrap="square" anchor="t" lIns="45720" rIns="45720" tIns="27432" bIns="27432">
+          <a:bodyPr wrap="square" lIns="45720" tIns="27432" rIns="45720" bIns="27432" anchor="t">
             <a:spAutoFit/>
           </a:bodyPr>
           <a:lstStyle/>
@@ -9695,6 +9620,7 @@
           <a:lstStyle/>
           <a:p>
             <a:pPr algn="ctr"/>
+            <a:endParaRPr/>
           </a:p>
         </p:txBody>
       </p:sp>
@@ -9715,7 +9641,7 @@
           <a:noFill/>
         </p:spPr>
         <p:txBody>
-          <a:bodyPr wrap="square" anchor="t" lIns="45720" rIns="45720" tIns="27432" bIns="27432">
+          <a:bodyPr wrap="square" lIns="45720" tIns="27432" rIns="45720" bIns="27432" anchor="t">
             <a:spAutoFit/>
           </a:bodyPr>
           <a:lstStyle/>
@@ -9754,7 +9680,7 @@
           <a:noFill/>
         </p:spPr>
         <p:txBody>
-          <a:bodyPr wrap="square" anchor="t" lIns="45720" rIns="45720" tIns="27432" bIns="27432">
+          <a:bodyPr wrap="square" lIns="45720" tIns="27432" rIns="45720" bIns="27432" anchor="t">
             <a:spAutoFit/>
           </a:bodyPr>
           <a:lstStyle/>
@@ -9801,7 +9727,7 @@
         <p:spPr>
           <a:xfrm>
             <a:off x="548640" y="3886200"/>
-            <a:ext cx="5440680" cy="2468880"/>
+            <a:ext cx="5440680" cy="1853184"/>
           </a:xfrm>
           <a:prstGeom prst="roundRect">
             <a:avLst/>
@@ -9833,6 +9759,7 @@
           <a:lstStyle/>
           <a:p>
             <a:pPr algn="ctr"/>
+            <a:endParaRPr/>
           </a:p>
         </p:txBody>
       </p:sp>
@@ -9853,7 +9780,7 @@
           <a:noFill/>
         </p:spPr>
         <p:txBody>
-          <a:bodyPr wrap="square" anchor="t" lIns="45720" rIns="45720" tIns="27432" bIns="27432">
+          <a:bodyPr wrap="square" lIns="45720" tIns="27432" rIns="45720" bIns="27432" anchor="t">
             <a:spAutoFit/>
           </a:bodyPr>
           <a:lstStyle/>
@@ -9884,7 +9811,7 @@
         <p:spPr>
           <a:xfrm>
             <a:off x="777240" y="4526280"/>
-            <a:ext cx="4983480" cy="1691640"/>
+            <a:ext cx="4983480" cy="711990"/>
           </a:xfrm>
           <a:prstGeom prst="rect">
             <a:avLst/>
@@ -9892,7 +9819,7 @@
           <a:noFill/>
         </p:spPr>
         <p:txBody>
-          <a:bodyPr wrap="square" anchor="t" lIns="45720" rIns="45720" tIns="27432" bIns="27432">
+          <a:bodyPr wrap="square" lIns="45720" tIns="27432" rIns="45720" bIns="27432" anchor="t">
             <a:spAutoFit/>
           </a:bodyPr>
           <a:lstStyle/>
@@ -9903,7 +9830,7 @@
               </a:spcAft>
             </a:pPr>
             <a:r>
-              <a:rPr sz="1200" b="0">
+              <a:rPr sz="1200" b="0" dirty="0">
                 <a:solidFill>
                   <a:srgbClr val="1B1B1B"/>
                 </a:solidFill>
@@ -9919,29 +9846,13 @@
               </a:spcAft>
             </a:pPr>
             <a:r>
-              <a:rPr sz="1200" b="0">
+              <a:rPr sz="1200" b="0" dirty="0">
                 <a:solidFill>
                   <a:srgbClr val="1B1B1B"/>
                 </a:solidFill>
                 <a:latin typeface="Calibri"/>
               </a:rPr>
               <a:t>•  Rejecting anyone. Rejections stay with people.</a:t>
-            </a:r>
-          </a:p>
-          <a:p>
-            <a:pPr algn="l">
-              <a:spcAft>
-                <a:spcPts val="800"/>
-              </a:spcAft>
-            </a:pPr>
-            <a:r>
-              <a:rPr sz="1200" b="0">
-                <a:solidFill>
-                  <a:srgbClr val="1B1B1B"/>
-                </a:solidFill>
-                <a:latin typeface="Calibri"/>
-              </a:rPr>
-              <a:t>•  A 'risk score' model: 248 rows is too few, and a line you can explain is worth more.</a:t>
             </a:r>
           </a:p>
         </p:txBody>
@@ -9963,7 +9874,7 @@
           <a:noFill/>
         </p:spPr>
         <p:txBody>
-          <a:bodyPr wrap="square" anchor="t" lIns="45720" rIns="45720" tIns="27432" bIns="27432">
+          <a:bodyPr wrap="square" lIns="45720" tIns="27432" rIns="45720" bIns="27432" anchor="t">
             <a:spAutoFit/>
           </a:bodyPr>
           <a:lstStyle/>
@@ -10002,7 +9913,7 @@
           <a:noFill/>
         </p:spPr>
         <p:txBody>
-          <a:bodyPr wrap="square" anchor="t" lIns="45720" rIns="45720" tIns="27432" bIns="27432">
+          <a:bodyPr wrap="square" lIns="45720" tIns="27432" rIns="45720" bIns="27432" anchor="t">
             <a:spAutoFit/>
           </a:bodyPr>
           <a:lstStyle/>
@@ -10050,7 +9961,7 @@
         </p:nvGraphicFramePr>
         <p:xfrm>
           <a:off x="6217920" y="3520440"/>
-          <a:ext cx="5440680" cy="1755648"/>
+          <a:ext cx="5440680" cy="1853184"/>
         </p:xfrm>
         <a:graphic>
           <a:graphicData uri="http://schemas.openxmlformats.org/drawingml/2006/table">
@@ -10059,9 +9970,27 @@
                 <a:tableStyleId>{5C22544A-7EE6-4342-B048-85BDC9FD1C3A}</a:tableStyleId>
               </a:tblPr>
               <a:tblGrid>
-                <a:gridCol w="2514600"/>
-                <a:gridCol w="1600200"/>
-                <a:gridCol w="1325880"/>
+                <a:gridCol w="2514600">
+                  <a:extLst>
+                    <a:ext uri="{9D8B030D-6E8A-4147-A177-3AD203B41FA5}">
+                      <a16:colId xmlns:a16="http://schemas.microsoft.com/office/drawing/2014/main" val="20000"/>
+                    </a:ext>
+                  </a:extLst>
+                </a:gridCol>
+                <a:gridCol w="1600200">
+                  <a:extLst>
+                    <a:ext uri="{9D8B030D-6E8A-4147-A177-3AD203B41FA5}">
+                      <a16:colId xmlns:a16="http://schemas.microsoft.com/office/drawing/2014/main" val="20001"/>
+                    </a:ext>
+                  </a:extLst>
+                </a:gridCol>
+                <a:gridCol w="1325880">
+                  <a:extLst>
+                    <a:ext uri="{9D8B030D-6E8A-4147-A177-3AD203B41FA5}">
+                      <a16:colId xmlns:a16="http://schemas.microsoft.com/office/drawing/2014/main" val="20002"/>
+                    </a:ext>
+                  </a:extLst>
+                </a:gridCol>
               </a:tblGrid>
               <a:tr h="292608">
                 <a:tc>
@@ -10136,6 +10065,11 @@
                     </a:solidFill>
                   </a:tcPr>
                 </a:tc>
+                <a:extLst>
+                  <a:ext uri="{0D108BD9-81ED-4DB2-BD59-A6C34878D82A}">
+                    <a16:rowId xmlns:a16="http://schemas.microsoft.com/office/drawing/2014/main" val="10000"/>
+                  </a:ext>
+                </a:extLst>
               </a:tr>
               <a:tr h="292608">
                 <a:tc>
@@ -10210,6 +10144,11 @@
                     </a:solidFill>
                   </a:tcPr>
                 </a:tc>
+                <a:extLst>
+                  <a:ext uri="{0D108BD9-81ED-4DB2-BD59-A6C34878D82A}">
+                    <a16:rowId xmlns:a16="http://schemas.microsoft.com/office/drawing/2014/main" val="10001"/>
+                  </a:ext>
+                </a:extLst>
               </a:tr>
               <a:tr h="292608">
                 <a:tc>
@@ -10284,6 +10223,11 @@
                     </a:solidFill>
                   </a:tcPr>
                 </a:tc>
+                <a:extLst>
+                  <a:ext uri="{0D108BD9-81ED-4DB2-BD59-A6C34878D82A}">
+                    <a16:rowId xmlns:a16="http://schemas.microsoft.com/office/drawing/2014/main" val="10002"/>
+                  </a:ext>
+                </a:extLst>
               </a:tr>
               <a:tr h="292608">
                 <a:tc>
@@ -10358,6 +10302,11 @@
                     </a:solidFill>
                   </a:tcPr>
                 </a:tc>
+                <a:extLst>
+                  <a:ext uri="{0D108BD9-81ED-4DB2-BD59-A6C34878D82A}">
+                    <a16:rowId xmlns:a16="http://schemas.microsoft.com/office/drawing/2014/main" val="10003"/>
+                  </a:ext>
+                </a:extLst>
               </a:tr>
               <a:tr h="292608">
                 <a:tc>
@@ -10432,6 +10381,11 @@
                     </a:solidFill>
                   </a:tcPr>
                 </a:tc>
+                <a:extLst>
+                  <a:ext uri="{0D108BD9-81ED-4DB2-BD59-A6C34878D82A}">
+                    <a16:rowId xmlns:a16="http://schemas.microsoft.com/office/drawing/2014/main" val="10004"/>
+                  </a:ext>
+                </a:extLst>
               </a:tr>
               <a:tr h="292608">
                 <a:tc>
@@ -10506,6 +10460,11 @@
                     </a:solidFill>
                   </a:tcPr>
                 </a:tc>
+                <a:extLst>
+                  <a:ext uri="{0D108BD9-81ED-4DB2-BD59-A6C34878D82A}">
+                    <a16:rowId xmlns:a16="http://schemas.microsoft.com/office/drawing/2014/main" val="10005"/>
+                  </a:ext>
+                </a:extLst>
               </a:tr>
             </a:tbl>
           </a:graphicData>
@@ -10528,7 +10487,7 @@
           <a:noFill/>
         </p:spPr>
         <p:txBody>
-          <a:bodyPr wrap="square" anchor="t" lIns="45720" rIns="45720" tIns="27432" bIns="27432">
+          <a:bodyPr wrap="square" lIns="45720" tIns="27432" rIns="45720" bIns="27432" anchor="t">
             <a:spAutoFit/>
           </a:bodyPr>
           <a:lstStyle/>
@@ -10559,7 +10518,7 @@
 </file>
 
 <file path=ppt/slides/slide8.xml><?xml version="1.0" encoding="utf-8"?>
-<p:sld xmlns:a="http://schemas.openxmlformats.org/drawingml/2006/main" xmlns:p="http://schemas.openxmlformats.org/presentationml/2006/main" xmlns:r="http://schemas.openxmlformats.org/officeDocument/2006/relationships">
+<p:sld xmlns:a="http://schemas.openxmlformats.org/drawingml/2006/main" xmlns:r="http://schemas.openxmlformats.org/officeDocument/2006/relationships" xmlns:p="http://schemas.openxmlformats.org/presentationml/2006/main">
   <p:cSld>
     <p:spTree>
       <p:nvGrpSpPr>
@@ -10567,7 +10526,14 @@
         <p:cNvGrpSpPr/>
         <p:nvPr/>
       </p:nvGrpSpPr>
-      <p:grpSpPr/>
+      <p:grpSpPr>
+        <a:xfrm>
+          <a:off x="0" y="0"/>
+          <a:ext cx="0" cy="0"/>
+          <a:chOff x="0" y="0"/>
+          <a:chExt cx="0" cy="0"/>
+        </a:xfrm>
+      </p:grpSpPr>
       <p:sp>
         <p:nvSpPr>
           <p:cNvPr id="2" name="TextBox 1"/>
@@ -10585,7 +10551,7 @@
           <a:noFill/>
         </p:spPr>
         <p:txBody>
-          <a:bodyPr wrap="square" anchor="t" lIns="45720" rIns="45720" tIns="27432" bIns="27432">
+          <a:bodyPr wrap="square" lIns="45720" tIns="27432" rIns="45720" bIns="27432" anchor="t">
             <a:spAutoFit/>
           </a:bodyPr>
           <a:lstStyle/>
@@ -10648,6 +10614,7 @@
           <a:lstStyle/>
           <a:p>
             <a:pPr algn="ctr"/>
+            <a:endParaRPr/>
           </a:p>
         </p:txBody>
       </p:sp>
@@ -10668,7 +10635,7 @@
           <a:noFill/>
         </p:spPr>
         <p:txBody>
-          <a:bodyPr wrap="square" anchor="t" lIns="45720" rIns="45720" tIns="27432" bIns="27432">
+          <a:bodyPr wrap="square" lIns="45720" tIns="27432" rIns="45720" bIns="27432" anchor="t">
             <a:spAutoFit/>
           </a:bodyPr>
           <a:lstStyle/>
@@ -10707,7 +10674,7 @@
           <a:noFill/>
         </p:spPr>
         <p:txBody>
-          <a:bodyPr wrap="square" anchor="t" lIns="45720" rIns="45720" tIns="27432" bIns="27432">
+          <a:bodyPr wrap="square" lIns="45720" tIns="27432" rIns="45720" bIns="27432" anchor="t">
             <a:spAutoFit/>
           </a:bodyPr>
           <a:lstStyle/>
@@ -10802,6 +10769,7 @@
           <a:lstStyle/>
           <a:p>
             <a:pPr algn="ctr"/>
+            <a:endParaRPr/>
           </a:p>
         </p:txBody>
       </p:sp>
@@ -10822,7 +10790,7 @@
           <a:noFill/>
         </p:spPr>
         <p:txBody>
-          <a:bodyPr wrap="square" anchor="t" lIns="45720" rIns="45720" tIns="27432" bIns="27432">
+          <a:bodyPr wrap="square" lIns="45720" tIns="27432" rIns="45720" bIns="27432" anchor="t">
             <a:spAutoFit/>
           </a:bodyPr>
           <a:lstStyle/>
@@ -10861,7 +10829,7 @@
           <a:noFill/>
         </p:spPr>
         <p:txBody>
-          <a:bodyPr wrap="square" anchor="t" lIns="45720" rIns="45720" tIns="27432" bIns="27432">
+          <a:bodyPr wrap="square" lIns="45720" tIns="27432" rIns="45720" bIns="27432" anchor="t">
             <a:spAutoFit/>
           </a:bodyPr>
           <a:lstStyle/>
@@ -11286,44 +11254,44 @@
         <a:sysClr val="window" lastClr="FFFFFF"/>
       </a:lt1>
       <a:dk2>
-        <a:srgbClr val="1F497D"/>
+        <a:srgbClr val="0E2841"/>
       </a:dk2>
       <a:lt2>
-        <a:srgbClr val="EEECE1"/>
+        <a:srgbClr val="E8E8E8"/>
       </a:lt2>
       <a:accent1>
-        <a:srgbClr val="4F81BD"/>
+        <a:srgbClr val="156082"/>
       </a:accent1>
       <a:accent2>
-        <a:srgbClr val="C0504D"/>
+        <a:srgbClr val="E97132"/>
       </a:accent2>
       <a:accent3>
-        <a:srgbClr val="9BBB59"/>
+        <a:srgbClr val="196B24"/>
       </a:accent3>
       <a:accent4>
-        <a:srgbClr val="8064A2"/>
+        <a:srgbClr val="0F9ED5"/>
       </a:accent4>
       <a:accent5>
-        <a:srgbClr val="4BACC6"/>
+        <a:srgbClr val="A02B93"/>
       </a:accent5>
       <a:accent6>
-        <a:srgbClr val="F79646"/>
+        <a:srgbClr val="4EA72E"/>
       </a:accent6>
       <a:hlink>
-        <a:srgbClr val="0000FF"/>
+        <a:srgbClr val="467886"/>
       </a:hlink>
       <a:folHlink>
-        <a:srgbClr val="800080"/>
+        <a:srgbClr val="96607D"/>
       </a:folHlink>
     </a:clrScheme>
     <a:fontScheme name="Office">
       <a:majorFont>
-        <a:latin typeface="Calibri"/>
+        <a:latin typeface="Aptos Display" panose="02110004020202020204"/>
         <a:ea typeface=""/>
         <a:cs typeface=""/>
-        <a:font script="Jpan" typeface="ＭＳ Ｐゴシック"/>
+        <a:font script="Jpan" typeface="游ゴシック Light"/>
         <a:font script="Hang" typeface="맑은 고딕"/>
-        <a:font script="Hans" typeface="宋体"/>
+        <a:font script="Hans" typeface="等线 Light"/>
         <a:font script="Hant" typeface="新細明體"/>
         <a:font script="Arab" typeface="Times New Roman"/>
         <a:font script="Hebr" typeface="Times New Roman"/>
@@ -11351,14 +11319,31 @@
         <a:font script="Viet" typeface="Times New Roman"/>
         <a:font script="Uigh" typeface="Microsoft Uighur"/>
         <a:font script="Geor" typeface="Sylfaen"/>
+        <a:font script="Armn" typeface="Arial"/>
+        <a:font script="Bugi" typeface="Leelawadee UI"/>
+        <a:font script="Bopo" typeface="Microsoft JhengHei"/>
+        <a:font script="Java" typeface="Javanese Text"/>
+        <a:font script="Lisu" typeface="Segoe UI"/>
+        <a:font script="Mymr" typeface="Myanmar Text"/>
+        <a:font script="Nkoo" typeface="Ebrima"/>
+        <a:font script="Olck" typeface="Nirmala UI"/>
+        <a:font script="Osma" typeface="Ebrima"/>
+        <a:font script="Phag" typeface="Phagspa"/>
+        <a:font script="Syrn" typeface="Estrangelo Edessa"/>
+        <a:font script="Syrj" typeface="Estrangelo Edessa"/>
+        <a:font script="Syre" typeface="Estrangelo Edessa"/>
+        <a:font script="Sora" typeface="Nirmala UI"/>
+        <a:font script="Tale" typeface="Microsoft Tai Le"/>
+        <a:font script="Talu" typeface="Microsoft New Tai Lue"/>
+        <a:font script="Tfng" typeface="Ebrima"/>
       </a:majorFont>
       <a:minorFont>
-        <a:latin typeface="Calibri"/>
+        <a:latin typeface="Aptos" panose="02110004020202020204"/>
         <a:ea typeface=""/>
         <a:cs typeface=""/>
-        <a:font script="Jpan" typeface="ＭＳ Ｐゴシック"/>
+        <a:font script="Jpan" typeface="游ゴシック"/>
         <a:font script="Hang" typeface="맑은 고딕"/>
-        <a:font script="Hans" typeface="宋体"/>
+        <a:font script="Hans" typeface="等线"/>
         <a:font script="Hant" typeface="新細明體"/>
         <a:font script="Arab" typeface="Arial"/>
         <a:font script="Hebr" typeface="Arial"/>
@@ -11386,6 +11371,23 @@
         <a:font script="Viet" typeface="Arial"/>
         <a:font script="Uigh" typeface="Microsoft Uighur"/>
         <a:font script="Geor" typeface="Sylfaen"/>
+        <a:font script="Armn" typeface="Arial"/>
+        <a:font script="Bugi" typeface="Leelawadee UI"/>
+        <a:font script="Bopo" typeface="Microsoft JhengHei"/>
+        <a:font script="Java" typeface="Javanese Text"/>
+        <a:font script="Lisu" typeface="Segoe UI"/>
+        <a:font script="Mymr" typeface="Myanmar Text"/>
+        <a:font script="Nkoo" typeface="Ebrima"/>
+        <a:font script="Olck" typeface="Nirmala UI"/>
+        <a:font script="Osma" typeface="Ebrima"/>
+        <a:font script="Phag" typeface="Phagspa"/>
+        <a:font script="Syrn" typeface="Estrangelo Edessa"/>
+        <a:font script="Syrj" typeface="Estrangelo Edessa"/>
+        <a:font script="Syre" typeface="Estrangelo Edessa"/>
+        <a:font script="Sora" typeface="Nirmala UI"/>
+        <a:font script="Tale" typeface="Microsoft Tai Le"/>
+        <a:font script="Talu" typeface="Microsoft New Tai Lue"/>
+        <a:font script="Tfng" typeface="Ebrima"/>
       </a:minorFont>
     </a:fontScheme>
     <a:fmtScheme name="Office">
@@ -11397,180 +11399,136 @@
           <a:gsLst>
             <a:gs pos="0">
               <a:schemeClr val="phClr">
-                <a:tint val="50000"/>
-                <a:satMod val="300000"/>
+                <a:lumMod val="110000"/>
+                <a:satMod val="105000"/>
+                <a:tint val="67000"/>
               </a:schemeClr>
             </a:gs>
-            <a:gs pos="35000">
+            <a:gs pos="50000">
               <a:schemeClr val="phClr">
-                <a:tint val="37000"/>
-                <a:satMod val="300000"/>
+                <a:lumMod val="105000"/>
+                <a:satMod val="103000"/>
+                <a:tint val="73000"/>
               </a:schemeClr>
             </a:gs>
             <a:gs pos="100000">
               <a:schemeClr val="phClr">
-                <a:tint val="15000"/>
-                <a:satMod val="350000"/>
+                <a:lumMod val="105000"/>
+                <a:satMod val="109000"/>
+                <a:tint val="81000"/>
               </a:schemeClr>
             </a:gs>
           </a:gsLst>
-          <a:lin ang="16200000" scaled="1"/>
+          <a:lin ang="5400000" scaled="0"/>
         </a:gradFill>
         <a:gradFill rotWithShape="1">
           <a:gsLst>
             <a:gs pos="0">
               <a:schemeClr val="phClr">
-                <a:tint val="100000"/>
+                <a:satMod val="103000"/>
+                <a:lumMod val="102000"/>
+                <a:tint val="94000"/>
+              </a:schemeClr>
+            </a:gs>
+            <a:gs pos="50000">
+              <a:schemeClr val="phClr">
+                <a:satMod val="110000"/>
+                <a:lumMod val="100000"/>
                 <a:shade val="100000"/>
-                <a:satMod val="130000"/>
               </a:schemeClr>
             </a:gs>
             <a:gs pos="100000">
               <a:schemeClr val="phClr">
-                <a:tint val="50000"/>
-                <a:shade val="100000"/>
-                <a:satMod val="350000"/>
+                <a:lumMod val="99000"/>
+                <a:satMod val="120000"/>
+                <a:shade val="78000"/>
               </a:schemeClr>
             </a:gs>
           </a:gsLst>
-          <a:lin ang="16200000" scaled="0"/>
+          <a:lin ang="5400000" scaled="0"/>
         </a:gradFill>
       </a:fillStyleLst>
       <a:lnStyleLst>
-        <a:ln w="9525" cap="flat" cmpd="sng" algn="ctr">
+        <a:ln w="12700" cap="flat" cmpd="sng" algn="ctr">
           <a:solidFill>
-            <a:schemeClr val="phClr">
-              <a:shade val="95000"/>
-              <a:satMod val="105000"/>
-            </a:schemeClr>
+            <a:schemeClr val="phClr"/>
           </a:solidFill>
           <a:prstDash val="solid"/>
+          <a:miter lim="800000"/>
+        </a:ln>
+        <a:ln w="19050" cap="flat" cmpd="sng" algn="ctr">
+          <a:solidFill>
+            <a:schemeClr val="phClr"/>
+          </a:solidFill>
+          <a:prstDash val="solid"/>
+          <a:miter lim="800000"/>
         </a:ln>
         <a:ln w="25400" cap="flat" cmpd="sng" algn="ctr">
           <a:solidFill>
             <a:schemeClr val="phClr"/>
           </a:solidFill>
           <a:prstDash val="solid"/>
-        </a:ln>
-        <a:ln w="38100" cap="flat" cmpd="sng" algn="ctr">
-          <a:solidFill>
-            <a:schemeClr val="phClr"/>
-          </a:solidFill>
-          <a:prstDash val="solid"/>
+          <a:miter lim="800000"/>
         </a:ln>
       </a:lnStyleLst>
       <a:effectStyleLst>
         <a:effectStyle>
+          <a:effectLst/>
+        </a:effectStyle>
+        <a:effectStyle>
+          <a:effectLst/>
+        </a:effectStyle>
+        <a:effectStyle>
           <a:effectLst>
-            <a:outerShdw blurRad="40000" dist="20000" dir="5400000" rotWithShape="0">
+            <a:outerShdw blurRad="57150" dist="19050" dir="5400000" algn="ctr" rotWithShape="0">
               <a:srgbClr val="000000">
-                <a:alpha val="38000"/>
+                <a:alpha val="63000"/>
               </a:srgbClr>
             </a:outerShdw>
           </a:effectLst>
-        </a:effectStyle>
-        <a:effectStyle>
-          <a:effectLst>
-            <a:outerShdw blurRad="40000" dist="23000" dir="5400000" rotWithShape="0">
-              <a:srgbClr val="000000">
-                <a:alpha val="35000"/>
-              </a:srgbClr>
-            </a:outerShdw>
-          </a:effectLst>
-        </a:effectStyle>
-        <a:effectStyle>
-          <a:effectLst>
-            <a:outerShdw blurRad="40000" dist="23000" dir="5400000" rotWithShape="0">
-              <a:srgbClr val="000000">
-                <a:alpha val="35000"/>
-              </a:srgbClr>
-            </a:outerShdw>
-          </a:effectLst>
-          <a:scene3d>
-            <a:camera prst="orthographicFront">
-              <a:rot lat="0" lon="0" rev="0"/>
-            </a:camera>
-            <a:lightRig rig="threePt" dir="t">
-              <a:rot lat="0" lon="0" rev="1200000"/>
-            </a:lightRig>
-          </a:scene3d>
-          <a:sp3d>
-            <a:bevelT w="63500" h="25400"/>
-          </a:sp3d>
         </a:effectStyle>
       </a:effectStyleLst>
       <a:bgFillStyleLst>
         <a:solidFill>
           <a:schemeClr val="phClr"/>
         </a:solidFill>
+        <a:solidFill>
+          <a:schemeClr val="phClr">
+            <a:tint val="95000"/>
+            <a:satMod val="170000"/>
+          </a:schemeClr>
+        </a:solidFill>
         <a:gradFill rotWithShape="1">
           <a:gsLst>
             <a:gs pos="0">
               <a:schemeClr val="phClr">
-                <a:tint val="40000"/>
-                <a:satMod val="350000"/>
+                <a:tint val="93000"/>
+                <a:satMod val="150000"/>
+                <a:shade val="98000"/>
+                <a:lumMod val="102000"/>
               </a:schemeClr>
             </a:gs>
-            <a:gs pos="40000">
+            <a:gs pos="50000">
               <a:schemeClr val="phClr">
-                <a:tint val="45000"/>
-                <a:shade val="99000"/>
-                <a:satMod val="350000"/>
+                <a:tint val="98000"/>
+                <a:satMod val="130000"/>
+                <a:shade val="90000"/>
+                <a:lumMod val="103000"/>
               </a:schemeClr>
             </a:gs>
             <a:gs pos="100000">
               <a:schemeClr val="phClr">
-                <a:shade val="20000"/>
-                <a:satMod val="255000"/>
+                <a:shade val="63000"/>
+                <a:satMod val="120000"/>
               </a:schemeClr>
             </a:gs>
           </a:gsLst>
-          <a:path path="circle">
-            <a:fillToRect l="50000" t="-80000" r="50000" b="180000"/>
-          </a:path>
-        </a:gradFill>
-        <a:gradFill rotWithShape="1">
-          <a:gsLst>
-            <a:gs pos="0">
-              <a:schemeClr val="phClr">
-                <a:tint val="80000"/>
-                <a:satMod val="300000"/>
-              </a:schemeClr>
-            </a:gs>
-            <a:gs pos="100000">
-              <a:schemeClr val="phClr">
-                <a:shade val="30000"/>
-                <a:satMod val="200000"/>
-              </a:schemeClr>
-            </a:gs>
-          </a:gsLst>
-          <a:path path="circle">
-            <a:fillToRect l="50000" t="50000" r="50000" b="50000"/>
-          </a:path>
+          <a:lin ang="5400000" scaled="0"/>
         </a:gradFill>
       </a:bgFillStyleLst>
     </a:fmtScheme>
   </a:themeElements>
   <a:objectDefaults>
-    <a:spDef>
-      <a:spPr/>
-      <a:bodyPr/>
-      <a:lstStyle/>
-      <a:style>
-        <a:lnRef idx="1">
-          <a:schemeClr val="accent1"/>
-        </a:lnRef>
-        <a:fillRef idx="3">
-          <a:schemeClr val="accent1"/>
-        </a:fillRef>
-        <a:effectRef idx="2">
-          <a:schemeClr val="accent1"/>
-        </a:effectRef>
-        <a:fontRef idx="minor">
-          <a:schemeClr val="lt1"/>
-        </a:fontRef>
-      </a:style>
-    </a:spDef>
     <a:lnDef>
       <a:spPr/>
       <a:bodyPr/>
@@ -11592,5 +11550,10 @@
     </a:lnDef>
   </a:objectDefaults>
   <a:extraClrSchemeLst/>
+  <a:extLst>
+    <a:ext uri="{05A4C25C-085E-4340-85A3-A5531E510DB2}">
+      <thm15:themeFamily xmlns:thm15="http://schemas.microsoft.com/office/thememl/2012/main" name="Office Theme" id="{2E142A2C-CD16-42D6-873A-C26D2A0506FA}" vid="{1BDDFF52-6CD6-40A5-AB3C-68EB2F1E4D0A}"/>
+    </a:ext>
+  </a:extLst>
 </a:theme>
 </file>